--- a/slides/5_outlook.pptx
+++ b/slides/5_outlook.pptx
@@ -5,22 +5,26 @@
     <p:sldMasterId id="2147483648" r:id="rId1"/>
   </p:sldMasterIdLst>
   <p:notesMasterIdLst>
-    <p:notesMasterId r:id="rId15"/>
+    <p:notesMasterId r:id="rId19"/>
   </p:notesMasterIdLst>
   <p:sldIdLst>
     <p:sldId id="256" r:id="rId2"/>
     <p:sldId id="257" r:id="rId3"/>
     <p:sldId id="258" r:id="rId4"/>
     <p:sldId id="278" r:id="rId5"/>
-    <p:sldId id="277" r:id="rId6"/>
-    <p:sldId id="265" r:id="rId7"/>
-    <p:sldId id="276" r:id="rId8"/>
-    <p:sldId id="279" r:id="rId9"/>
-    <p:sldId id="264" r:id="rId10"/>
-    <p:sldId id="268" r:id="rId11"/>
-    <p:sldId id="266" r:id="rId12"/>
-    <p:sldId id="269" r:id="rId13"/>
-    <p:sldId id="267" r:id="rId14"/>
+    <p:sldId id="279" r:id="rId6"/>
+    <p:sldId id="280" r:id="rId7"/>
+    <p:sldId id="265" r:id="rId8"/>
+    <p:sldId id="276" r:id="rId9"/>
+    <p:sldId id="277" r:id="rId10"/>
+    <p:sldId id="281" r:id="rId11"/>
+    <p:sldId id="283" r:id="rId12"/>
+    <p:sldId id="282" r:id="rId13"/>
+    <p:sldId id="264" r:id="rId14"/>
+    <p:sldId id="268" r:id="rId15"/>
+    <p:sldId id="266" r:id="rId16"/>
+    <p:sldId id="269" r:id="rId17"/>
+    <p:sldId id="267" r:id="rId18"/>
   </p:sldIdLst>
   <p:sldSz cx="12192000" cy="6858000"/>
   <p:notesSz cx="6858000" cy="9144000"/>
@@ -209,7 +213,7 @@
           <a:p>
             <a:fld id="{13D2B9E5-E14E-A242-A6EC-A933D52BB951}" type="datetimeFigureOut">
               <a:rPr lang="de-DE" smtClean="0"/>
-              <a:t>06.11.25</a:t>
+              <a:t>13.11.25</a:t>
             </a:fld>
             <a:endParaRPr lang="de-DE"/>
           </a:p>
@@ -623,7 +627,7 @@
           <a:p>
             <a:fld id="{031D7779-9ED7-6548-B26D-2134BA4A857B}" type="datetime1">
               <a:rPr lang="de-DE" smtClean="0"/>
-              <a:t>06.11.25</a:t>
+              <a:t>13.11.25</a:t>
             </a:fld>
             <a:endParaRPr lang="de-DE"/>
           </a:p>
@@ -821,7 +825,7 @@
           <a:p>
             <a:fld id="{D8311470-8E75-0440-9190-9B2DFC272B83}" type="datetime1">
               <a:rPr lang="de-DE" smtClean="0"/>
-              <a:t>06.11.25</a:t>
+              <a:t>13.11.25</a:t>
             </a:fld>
             <a:endParaRPr lang="de-DE"/>
           </a:p>
@@ -1029,7 +1033,7 @@
           <a:p>
             <a:fld id="{22419E69-F517-504E-AF77-B00F51394D07}" type="datetime1">
               <a:rPr lang="de-DE" smtClean="0"/>
-              <a:t>06.11.25</a:t>
+              <a:t>13.11.25</a:t>
             </a:fld>
             <a:endParaRPr lang="de-DE"/>
           </a:p>
@@ -1227,7 +1231,7 @@
           <a:p>
             <a:fld id="{B405AE1B-76E6-F54D-86C0-AD1CFF11F96B}" type="datetime1">
               <a:rPr lang="de-DE" smtClean="0"/>
-              <a:t>06.11.25</a:t>
+              <a:t>13.11.25</a:t>
             </a:fld>
             <a:endParaRPr lang="de-DE"/>
           </a:p>
@@ -1502,7 +1506,7 @@
           <a:p>
             <a:fld id="{47B7A32C-3B0E-9046-9BCA-8D3CFD0D0D95}" type="datetime1">
               <a:rPr lang="de-DE" smtClean="0"/>
-              <a:t>06.11.25</a:t>
+              <a:t>13.11.25</a:t>
             </a:fld>
             <a:endParaRPr lang="de-DE"/>
           </a:p>
@@ -1767,7 +1771,7 @@
           <a:p>
             <a:fld id="{CACA52F7-8793-A141-AE69-198742CC6702}" type="datetime1">
               <a:rPr lang="de-DE" smtClean="0"/>
-              <a:t>06.11.25</a:t>
+              <a:t>13.11.25</a:t>
             </a:fld>
             <a:endParaRPr lang="de-DE"/>
           </a:p>
@@ -2179,7 +2183,7 @@
           <a:p>
             <a:fld id="{C615A209-622F-A54E-9C3A-3E2911113FDF}" type="datetime1">
               <a:rPr lang="de-DE" smtClean="0"/>
-              <a:t>06.11.25</a:t>
+              <a:t>13.11.25</a:t>
             </a:fld>
             <a:endParaRPr lang="de-DE"/>
           </a:p>
@@ -2320,7 +2324,7 @@
           <a:p>
             <a:fld id="{0634749A-61C6-C743-AD5E-DC0649EEC230}" type="datetime1">
               <a:rPr lang="de-DE" smtClean="0"/>
-              <a:t>06.11.25</a:t>
+              <a:t>13.11.25</a:t>
             </a:fld>
             <a:endParaRPr lang="de-DE"/>
           </a:p>
@@ -2433,7 +2437,7 @@
           <a:p>
             <a:fld id="{C664BC4F-BCF2-2249-A269-0F72DF7AA52E}" type="datetime1">
               <a:rPr lang="de-DE" smtClean="0"/>
-              <a:t>06.11.25</a:t>
+              <a:t>13.11.25</a:t>
             </a:fld>
             <a:endParaRPr lang="de-DE"/>
           </a:p>
@@ -2744,7 +2748,7 @@
           <a:p>
             <a:fld id="{3B504219-3111-8B48-BBA8-24CFD5B6C566}" type="datetime1">
               <a:rPr lang="de-DE" smtClean="0"/>
-              <a:t>06.11.25</a:t>
+              <a:t>13.11.25</a:t>
             </a:fld>
             <a:endParaRPr lang="de-DE"/>
           </a:p>
@@ -3032,7 +3036,7 @@
           <a:p>
             <a:fld id="{90E936FB-CAFC-9C44-A14F-A26CC8C15BFF}" type="datetime1">
               <a:rPr lang="de-DE" smtClean="0"/>
-              <a:t>06.11.25</a:t>
+              <a:t>13.11.25</a:t>
             </a:fld>
             <a:endParaRPr lang="de-DE"/>
           </a:p>
@@ -3273,7 +3277,7 @@
           <a:p>
             <a:fld id="{8CD96802-0338-9943-B015-E12CC58B8DD0}" type="datetime1">
               <a:rPr lang="de-DE" smtClean="0"/>
-              <a:t>06.11.25</a:t>
+              <a:t>13.11.25</a:t>
             </a:fld>
             <a:endParaRPr lang="de-DE"/>
           </a:p>
@@ -3953,7 +3957,7 @@
           <p:cNvPr id="2" name="Titel 1">
             <a:extLst>
               <a:ext uri="{FF2B5EF4-FFF2-40B4-BE49-F238E27FC236}">
-                <a16:creationId xmlns:a16="http://schemas.microsoft.com/office/drawing/2014/main" id="{8386C014-A999-0992-19B5-7233A1A1E341}"/>
+                <a16:creationId xmlns:a16="http://schemas.microsoft.com/office/drawing/2014/main" id="{986FFD7B-59D8-41D4-CF8F-01343640A875}"/>
               </a:ext>
             </a:extLst>
           </p:cNvPr>
@@ -3971,7 +3975,7 @@
           <a:p>
             <a:r>
               <a:rPr lang="de-DE" dirty="0"/>
-              <a:t>Energy Systems</a:t>
+              <a:t>Electric Motors</a:t>
             </a:r>
           </a:p>
         </p:txBody>
@@ -3981,7 +3985,7 @@
           <p:cNvPr id="3" name="Inhaltsplatzhalter 2">
             <a:extLst>
               <a:ext uri="{FF2B5EF4-FFF2-40B4-BE49-F238E27FC236}">
-                <a16:creationId xmlns:a16="http://schemas.microsoft.com/office/drawing/2014/main" id="{E9299970-2F98-E623-F08D-D9041FD7B2A8}"/>
+                <a16:creationId xmlns:a16="http://schemas.microsoft.com/office/drawing/2014/main" id="{4DD47009-6EE5-EEDB-983E-BCCEF9D2460C}"/>
               </a:ext>
             </a:extLst>
           </p:cNvPr>
@@ -3994,7 +3998,9 @@
         </p:nvSpPr>
         <p:spPr/>
         <p:txBody>
-          <a:bodyPr/>
+          <a:bodyPr>
+            <a:normAutofit/>
+          </a:bodyPr>
           <a:lstStyle/>
           <a:p>
             <a:pPr marL="0" indent="0">
@@ -4002,31 +4008,23 @@
             </a:pPr>
             <a:r>
               <a:rPr lang="de-DE" dirty="0" err="1"/>
-              <a:t>generation</a:t>
-            </a:r>
-            <a:r>
-              <a:rPr lang="de-DE" dirty="0"/>
-              <a:t>, </a:t>
-            </a:r>
-            <a:r>
-              <a:rPr lang="de-DE" dirty="0" err="1"/>
-              <a:t>conversion</a:t>
-            </a:r>
-            <a:r>
-              <a:rPr lang="de-DE" dirty="0"/>
-              <a:t>, and </a:t>
-            </a:r>
-            <a:r>
-              <a:rPr lang="de-DE" dirty="0" err="1"/>
-              <a:t>distribution</a:t>
-            </a:r>
-            <a:r>
-              <a:rPr lang="de-DE" dirty="0"/>
-              <a:t> </a:t>
-            </a:r>
-            <a:r>
-              <a:rPr lang="de-DE" dirty="0" err="1"/>
-              <a:t>of</a:t>
+              <a:t>working</a:t>
+            </a:r>
+            <a:r>
+              <a:rPr lang="de-DE" dirty="0"/>
+              <a:t> </a:t>
+            </a:r>
+            <a:r>
+              <a:rPr lang="de-DE" dirty="0" err="1"/>
+              <a:t>principle</a:t>
+            </a:r>
+            <a:r>
+              <a:rPr lang="de-DE" dirty="0"/>
+              <a:t>: </a:t>
+            </a:r>
+            <a:r>
+              <a:rPr lang="de-DE" dirty="0" err="1"/>
+              <a:t>convert</a:t>
             </a:r>
             <a:r>
               <a:rPr lang="de-DE" dirty="0"/>
@@ -4038,8 +4036,187 @@
             </a:r>
             <a:r>
               <a:rPr lang="de-DE" dirty="0"/>
-              <a:t> power</a:t>
-            </a:r>
+              <a:t> </a:t>
+            </a:r>
+            <a:r>
+              <a:rPr lang="de-DE" dirty="0" err="1"/>
+              <a:t>energy</a:t>
+            </a:r>
+            <a:r>
+              <a:rPr lang="de-DE" dirty="0"/>
+              <a:t> </a:t>
+            </a:r>
+            <a:r>
+              <a:rPr lang="de-DE" dirty="0" err="1"/>
+              <a:t>into</a:t>
+            </a:r>
+            <a:r>
+              <a:rPr lang="de-DE" dirty="0"/>
+              <a:t> </a:t>
+            </a:r>
+            <a:r>
+              <a:rPr lang="de-DE" dirty="0" err="1"/>
+              <a:t>mechanical</a:t>
+            </a:r>
+            <a:r>
+              <a:rPr lang="de-DE" dirty="0"/>
+              <a:t> </a:t>
+            </a:r>
+            <a:r>
+              <a:rPr lang="de-DE" dirty="0" err="1"/>
+              <a:t>motion</a:t>
+            </a:r>
+            <a:r>
+              <a:rPr lang="de-DE" dirty="0"/>
+              <a:t> </a:t>
+            </a:r>
+            <a:r>
+              <a:rPr lang="de-DE" dirty="0" err="1"/>
+              <a:t>through</a:t>
+            </a:r>
+            <a:r>
+              <a:rPr lang="de-DE" dirty="0"/>
+              <a:t> </a:t>
+            </a:r>
+            <a:r>
+              <a:rPr lang="de-DE" dirty="0" err="1"/>
+              <a:t>electromagnetic</a:t>
+            </a:r>
+            <a:r>
+              <a:rPr lang="de-DE" dirty="0"/>
+              <a:t> </a:t>
+            </a:r>
+            <a:r>
+              <a:rPr lang="de-DE" dirty="0" err="1"/>
+              <a:t>interaction</a:t>
+            </a:r>
+            <a:endParaRPr lang="de-DE" dirty="0"/>
+          </a:p>
+          <a:p>
+            <a:endParaRPr lang="de-DE" dirty="0"/>
+          </a:p>
+          <a:p>
+            <a:r>
+              <a:rPr lang="de-DE" b="1" dirty="0"/>
+              <a:t>AC </a:t>
+            </a:r>
+            <a:r>
+              <a:rPr lang="de-DE" b="1" dirty="0" err="1"/>
+              <a:t>motor</a:t>
+            </a:r>
+            <a:r>
+              <a:rPr lang="de-DE" dirty="0"/>
+              <a:t>: </a:t>
+            </a:r>
+            <a:r>
+              <a:rPr lang="de-DE" dirty="0" err="1"/>
+              <a:t>rotating</a:t>
+            </a:r>
+            <a:r>
+              <a:rPr lang="de-DE" dirty="0"/>
+              <a:t> </a:t>
+            </a:r>
+            <a:r>
+              <a:rPr lang="de-DE" dirty="0" err="1"/>
+              <a:t>magnetic</a:t>
+            </a:r>
+            <a:r>
+              <a:rPr lang="de-DE" dirty="0"/>
+              <a:t> </a:t>
+            </a:r>
+            <a:r>
+              <a:rPr lang="de-DE" dirty="0" err="1"/>
+              <a:t>field</a:t>
+            </a:r>
+            <a:r>
+              <a:rPr lang="de-DE" dirty="0"/>
+              <a:t> </a:t>
+            </a:r>
+            <a:r>
+              <a:rPr lang="de-DE" dirty="0" err="1"/>
+              <a:t>generated</a:t>
+            </a:r>
+            <a:r>
+              <a:rPr lang="de-DE" dirty="0"/>
+              <a:t> </a:t>
+            </a:r>
+            <a:r>
+              <a:rPr lang="de-DE" dirty="0" err="1"/>
+              <a:t>by</a:t>
+            </a:r>
+            <a:r>
+              <a:rPr lang="de-DE" dirty="0"/>
+              <a:t> AC, </a:t>
+            </a:r>
+            <a:r>
+              <a:rPr lang="de-DE" dirty="0" err="1"/>
+              <a:t>producing</a:t>
+            </a:r>
+            <a:r>
+              <a:rPr lang="de-DE" dirty="0"/>
+              <a:t> </a:t>
+            </a:r>
+            <a:r>
+              <a:rPr lang="de-DE" dirty="0" err="1"/>
+              <a:t>torque</a:t>
+            </a:r>
+            <a:r>
+              <a:rPr lang="de-DE" dirty="0"/>
+              <a:t> </a:t>
+            </a:r>
+            <a:r>
+              <a:rPr lang="de-DE" dirty="0" err="1"/>
+              <a:t>without</a:t>
+            </a:r>
+            <a:r>
+              <a:rPr lang="de-DE" dirty="0"/>
+              <a:t> </a:t>
+            </a:r>
+            <a:r>
+              <a:rPr lang="de-DE" dirty="0" err="1"/>
+              <a:t>direct</a:t>
+            </a:r>
+            <a:r>
+              <a:rPr lang="de-DE" dirty="0"/>
+              <a:t> </a:t>
+            </a:r>
+            <a:r>
+              <a:rPr lang="de-DE" dirty="0" err="1"/>
+              <a:t>electrical</a:t>
+            </a:r>
+            <a:r>
+              <a:rPr lang="de-DE" dirty="0"/>
+              <a:t> </a:t>
+            </a:r>
+            <a:r>
+              <a:rPr lang="de-DE" dirty="0" err="1"/>
+              <a:t>contact</a:t>
+            </a:r>
+            <a:r>
+              <a:rPr lang="de-DE" dirty="0"/>
+              <a:t> </a:t>
+            </a:r>
+            <a:r>
+              <a:rPr lang="de-DE" dirty="0" err="1"/>
+              <a:t>to</a:t>
+            </a:r>
+            <a:r>
+              <a:rPr lang="de-DE" dirty="0"/>
+              <a:t> </a:t>
+            </a:r>
+            <a:r>
+              <a:rPr lang="de-DE" dirty="0" err="1"/>
+              <a:t>the</a:t>
+            </a:r>
+            <a:r>
+              <a:rPr lang="de-DE" dirty="0"/>
+              <a:t> </a:t>
+            </a:r>
+            <a:r>
+              <a:rPr lang="de-DE" dirty="0" err="1"/>
+              <a:t>rotor</a:t>
+            </a:r>
+            <a:endParaRPr lang="de-DE" dirty="0"/>
           </a:p>
           <a:p>
             <a:pPr marL="0" indent="0">
@@ -4049,29 +4226,109 @@
           </a:p>
           <a:p>
             <a:r>
-              <a:rPr lang="de-DE" dirty="0" err="1"/>
-              <a:t>transformers</a:t>
-            </a:r>
-            <a:r>
-              <a:rPr lang="de-DE" dirty="0"/>
-              <a:t> and power </a:t>
-            </a:r>
-            <a:r>
-              <a:rPr lang="de-DE" dirty="0" err="1"/>
-              <a:t>converters</a:t>
-            </a:r>
-            <a:endParaRPr lang="de-DE" dirty="0"/>
-          </a:p>
-          <a:p>
-            <a:r>
-              <a:rPr lang="de-DE" dirty="0"/>
-              <a:t>power </a:t>
-            </a:r>
-            <a:r>
-              <a:rPr lang="de-DE" dirty="0" err="1"/>
-              <a:t>electronics</a:t>
-            </a:r>
-            <a:endParaRPr lang="de-DE" dirty="0"/>
+              <a:rPr lang="de-DE" b="1" dirty="0"/>
+              <a:t>DC </a:t>
+            </a:r>
+            <a:r>
+              <a:rPr lang="de-DE" b="1" dirty="0" err="1"/>
+              <a:t>motor</a:t>
+            </a:r>
+            <a:r>
+              <a:rPr lang="de-DE" b="1" dirty="0"/>
+              <a:t>:</a:t>
+            </a:r>
+            <a:r>
+              <a:rPr lang="de-DE" dirty="0"/>
+              <a:t> </a:t>
+            </a:r>
+            <a:r>
+              <a:rPr lang="de-DE" dirty="0" err="1"/>
+              <a:t>commutator</a:t>
+            </a:r>
+            <a:r>
+              <a:rPr lang="de-DE" dirty="0"/>
+              <a:t> and </a:t>
+            </a:r>
+            <a:r>
+              <a:rPr lang="de-DE" dirty="0" err="1"/>
+              <a:t>brushes</a:t>
+            </a:r>
+            <a:r>
+              <a:rPr lang="de-DE" dirty="0"/>
+              <a:t> </a:t>
+            </a:r>
+            <a:r>
+              <a:rPr lang="de-DE" dirty="0" err="1"/>
+              <a:t>to</a:t>
+            </a:r>
+            <a:r>
+              <a:rPr lang="de-DE" dirty="0"/>
+              <a:t> reverse </a:t>
+            </a:r>
+            <a:r>
+              <a:rPr lang="de-DE" dirty="0" err="1"/>
+              <a:t>rotor</a:t>
+            </a:r>
+            <a:r>
+              <a:rPr lang="de-DE" dirty="0"/>
+              <a:t> </a:t>
+            </a:r>
+            <a:r>
+              <a:rPr lang="de-DE" dirty="0" err="1"/>
+              <a:t>current</a:t>
+            </a:r>
+            <a:r>
+              <a:rPr lang="de-DE" dirty="0"/>
+              <a:t> </a:t>
+            </a:r>
+            <a:r>
+              <a:rPr lang="de-DE" dirty="0" err="1"/>
+              <a:t>every</a:t>
+            </a:r>
+            <a:r>
+              <a:rPr lang="de-DE" dirty="0"/>
+              <a:t> half </a:t>
+            </a:r>
+            <a:r>
+              <a:rPr lang="de-DE" dirty="0" err="1"/>
+              <a:t>revolution</a:t>
+            </a:r>
+            <a:r>
+              <a:rPr lang="de-DE" dirty="0"/>
+              <a:t>, </a:t>
+            </a:r>
+            <a:r>
+              <a:rPr lang="de-DE" dirty="0" err="1"/>
+              <a:t>maintaining</a:t>
+            </a:r>
+            <a:r>
+              <a:rPr lang="de-DE" dirty="0"/>
+              <a:t> </a:t>
+            </a:r>
+            <a:r>
+              <a:rPr lang="de-DE" dirty="0" err="1"/>
+              <a:t>continuous</a:t>
+            </a:r>
+            <a:r>
+              <a:rPr lang="de-DE" dirty="0"/>
+              <a:t> </a:t>
+            </a:r>
+            <a:r>
+              <a:rPr lang="de-DE" dirty="0" err="1"/>
+              <a:t>rotation</a:t>
+            </a:r>
+            <a:r>
+              <a:rPr lang="de-DE" dirty="0"/>
+              <a:t> </a:t>
+            </a:r>
+            <a:r>
+              <a:rPr lang="de-DE" dirty="0" err="1"/>
+              <a:t>under</a:t>
+            </a:r>
+            <a:r>
+              <a:rPr lang="de-DE" dirty="0"/>
+              <a:t> DC</a:t>
+            </a:r>
           </a:p>
         </p:txBody>
       </p:sp>
@@ -4080,7 +4337,7 @@
           <p:cNvPr id="4" name="Foliennummernplatzhalter 3">
             <a:extLst>
               <a:ext uri="{FF2B5EF4-FFF2-40B4-BE49-F238E27FC236}">
-                <a16:creationId xmlns:a16="http://schemas.microsoft.com/office/drawing/2014/main" id="{5B80B9A4-BF32-EF21-5482-EF7FCC8F730F}"/>
+                <a16:creationId xmlns:a16="http://schemas.microsoft.com/office/drawing/2014/main" id="{6213294A-6DBA-9633-DB6C-D9C910C748E1}"/>
               </a:ext>
             </a:extLst>
           </p:cNvPr>
@@ -4107,7 +4364,7 @@
     </p:spTree>
     <p:extLst>
       <p:ext uri="{BB962C8B-B14F-4D97-AF65-F5344CB8AC3E}">
-        <p14:creationId xmlns:p14="http://schemas.microsoft.com/office/powerpoint/2010/main" val="3149205054"/>
+        <p14:creationId xmlns:p14="http://schemas.microsoft.com/office/powerpoint/2010/main" val="2515219080"/>
       </p:ext>
     </p:extLst>
   </p:cSld>
@@ -4139,7 +4396,7 @@
           <p:cNvPr id="2" name="Titel 1">
             <a:extLst>
               <a:ext uri="{FF2B5EF4-FFF2-40B4-BE49-F238E27FC236}">
-                <a16:creationId xmlns:a16="http://schemas.microsoft.com/office/drawing/2014/main" id="{2F69BA13-B9D6-E7FF-B225-4E17A4B17CB7}"/>
+                <a16:creationId xmlns:a16="http://schemas.microsoft.com/office/drawing/2014/main" id="{0E3DA2EF-ABA8-86ED-EA4C-72A57FEBD12F}"/>
               </a:ext>
             </a:extLst>
           </p:cNvPr>
@@ -4157,7 +4414,15 @@
           <a:p>
             <a:r>
               <a:rPr lang="de-DE" dirty="0"/>
-              <a:t>Information Systems</a:t>
+              <a:t>AC </a:t>
+            </a:r>
+            <a:r>
+              <a:rPr lang="de-DE" dirty="0" err="1"/>
+              <a:t>vs</a:t>
+            </a:r>
+            <a:r>
+              <a:rPr lang="de-DE" dirty="0"/>
+              <a:t> DC in Devices</a:t>
             </a:r>
           </a:p>
         </p:txBody>
@@ -4167,7 +4432,7 @@
           <p:cNvPr id="3" name="Inhaltsplatzhalter 2">
             <a:extLst>
               <a:ext uri="{FF2B5EF4-FFF2-40B4-BE49-F238E27FC236}">
-                <a16:creationId xmlns:a16="http://schemas.microsoft.com/office/drawing/2014/main" id="{5435AB8D-9101-AF00-247C-3C2F0D5E1A4C}"/>
+                <a16:creationId xmlns:a16="http://schemas.microsoft.com/office/drawing/2014/main" id="{62345681-B5C4-6541-3DDD-CC1734C3C146}"/>
               </a:ext>
             </a:extLst>
           </p:cNvPr>
@@ -4181,7 +4446,7 @@
         <p:spPr/>
         <p:txBody>
           <a:bodyPr>
-            <a:normAutofit fontScale="85000" lnSpcReduction="20000"/>
+            <a:normAutofit/>
           </a:bodyPr>
           <a:lstStyle/>
           <a:p>
@@ -4189,26 +4454,57 @@
               <a:buNone/>
             </a:pPr>
             <a:r>
-              <a:rPr lang="de-DE" dirty="0" err="1"/>
-              <a:t>transmitting</a:t>
-            </a:r>
-            <a:r>
-              <a:rPr lang="de-DE" dirty="0"/>
-              <a:t> and </a:t>
-            </a:r>
-            <a:r>
-              <a:rPr lang="de-DE" dirty="0" err="1"/>
-              <a:t>processing</a:t>
-            </a:r>
-            <a:r>
-              <a:rPr lang="de-DE" dirty="0"/>
-              <a:t> </a:t>
-            </a:r>
-            <a:r>
-              <a:rPr lang="de-DE" dirty="0" err="1"/>
-              <a:t>information</a:t>
-            </a:r>
-            <a:endParaRPr lang="de-DE" dirty="0"/>
+              <a:rPr lang="de-DE" dirty="0"/>
+              <a:t>simple </a:t>
+            </a:r>
+            <a:r>
+              <a:rPr lang="de-DE" dirty="0" err="1"/>
+              <a:t>appliances</a:t>
+            </a:r>
+            <a:r>
+              <a:rPr lang="de-DE" dirty="0"/>
+              <a:t> (</a:t>
+            </a:r>
+            <a:r>
+              <a:rPr lang="de-DE" dirty="0" err="1"/>
+              <a:t>kettles</a:t>
+            </a:r>
+            <a:r>
+              <a:rPr lang="de-DE" dirty="0"/>
+              <a:t>, </a:t>
+            </a:r>
+            <a:r>
+              <a:rPr lang="de-DE" dirty="0" err="1"/>
+              <a:t>irons</a:t>
+            </a:r>
+            <a:r>
+              <a:rPr lang="de-DE" dirty="0"/>
+              <a:t>, </a:t>
+            </a:r>
+            <a:r>
+              <a:rPr lang="de-DE" dirty="0" err="1"/>
+              <a:t>heaters</a:t>
+            </a:r>
+            <a:r>
+              <a:rPr lang="de-DE" dirty="0"/>
+              <a:t>) </a:t>
+            </a:r>
+            <a:r>
+              <a:rPr lang="de-DE" dirty="0" err="1"/>
+              <a:t>run</a:t>
+            </a:r>
+            <a:r>
+              <a:rPr lang="de-DE" dirty="0"/>
+              <a:t> </a:t>
+            </a:r>
+            <a:r>
+              <a:rPr lang="de-DE" dirty="0" err="1"/>
+              <a:t>directly</a:t>
+            </a:r>
+            <a:r>
+              <a:rPr lang="de-DE" dirty="0"/>
+              <a:t> on AC</a:t>
+            </a:r>
           </a:p>
           <a:p>
             <a:pPr marL="0" indent="0">
@@ -4222,170 +4518,320 @@
             </a:pPr>
             <a:r>
               <a:rPr lang="de-DE" dirty="0" err="1"/>
-              <a:t>signal</a:t>
-            </a:r>
-            <a:r>
-              <a:rPr lang="de-DE" dirty="0"/>
-              <a:t> </a:t>
-            </a:r>
-            <a:r>
-              <a:rPr lang="de-DE" dirty="0" err="1"/>
-              <a:t>processing</a:t>
+              <a:t>electronics</a:t>
+            </a:r>
+            <a:r>
+              <a:rPr lang="de-DE" dirty="0"/>
+              <a:t> (</a:t>
+            </a:r>
+            <a:r>
+              <a:rPr lang="de-DE" dirty="0" err="1"/>
+              <a:t>laptops</a:t>
+            </a:r>
+            <a:r>
+              <a:rPr lang="de-DE" dirty="0"/>
+              <a:t>, </a:t>
+            </a:r>
+            <a:r>
+              <a:rPr lang="de-DE" dirty="0" err="1"/>
+              <a:t>phones</a:t>
+            </a:r>
+            <a:r>
+              <a:rPr lang="de-DE" dirty="0"/>
+              <a:t>, TVs) </a:t>
+            </a:r>
+            <a:r>
+              <a:rPr lang="de-DE" dirty="0" err="1"/>
+              <a:t>run</a:t>
+            </a:r>
+            <a:r>
+              <a:rPr lang="de-DE" dirty="0"/>
+              <a:t> on DC </a:t>
+            </a:r>
+            <a:r>
+              <a:rPr lang="de-DE" dirty="0" err="1"/>
+              <a:t>internally</a:t>
             </a:r>
             <a:endParaRPr lang="de-DE" dirty="0"/>
           </a:p>
           <a:p>
             <a:r>
-              <a:rPr lang="de-DE" dirty="0"/>
-              <a:t>time-domain vs. </a:t>
-            </a:r>
-            <a:r>
-              <a:rPr lang="de-DE" dirty="0" err="1"/>
-              <a:t>frequency</a:t>
-            </a:r>
-            <a:r>
-              <a:rPr lang="de-DE" dirty="0"/>
-              <a:t>-domain </a:t>
-            </a:r>
-            <a:r>
-              <a:rPr lang="de-DE" dirty="0" err="1"/>
-              <a:t>analysis</a:t>
-            </a:r>
-            <a:endParaRPr lang="de-DE" dirty="0"/>
-          </a:p>
-          <a:p>
-            <a:r>
-              <a:rPr lang="de-DE" dirty="0"/>
-              <a:t>Fourier and Laplace </a:t>
-            </a:r>
-            <a:r>
-              <a:rPr lang="de-DE" dirty="0" err="1"/>
-              <a:t>transforms</a:t>
-            </a:r>
-            <a:endParaRPr lang="de-DE" dirty="0"/>
+              <a:rPr lang="de-DE" sz="2400" dirty="0" err="1"/>
+              <a:t>chips</a:t>
+            </a:r>
+            <a:r>
+              <a:rPr lang="de-DE" sz="2400" dirty="0"/>
+              <a:t> and </a:t>
+            </a:r>
+            <a:r>
+              <a:rPr lang="de-DE" sz="2400" dirty="0" err="1"/>
+              <a:t>memory</a:t>
+            </a:r>
+            <a:r>
+              <a:rPr lang="de-DE" sz="2400" dirty="0"/>
+              <a:t> </a:t>
+            </a:r>
+            <a:r>
+              <a:rPr lang="de-DE" sz="2400" dirty="0" err="1"/>
+              <a:t>require</a:t>
+            </a:r>
+            <a:r>
+              <a:rPr lang="de-DE" sz="2400" dirty="0"/>
+              <a:t> a </a:t>
+            </a:r>
+            <a:r>
+              <a:rPr lang="de-DE" sz="2400" dirty="0" err="1"/>
+              <a:t>constant</a:t>
+            </a:r>
+            <a:r>
+              <a:rPr lang="de-DE" sz="2400" dirty="0"/>
+              <a:t> </a:t>
+            </a:r>
+            <a:r>
+              <a:rPr lang="de-DE" sz="2400" dirty="0" err="1"/>
+              <a:t>voltage</a:t>
+            </a:r>
+            <a:r>
+              <a:rPr lang="de-DE" sz="2400" dirty="0"/>
+              <a:t> </a:t>
+            </a:r>
+            <a:r>
+              <a:rPr lang="de-DE" sz="2400" dirty="0" err="1"/>
+              <a:t>to</a:t>
+            </a:r>
+            <a:r>
+              <a:rPr lang="de-DE" sz="2400" dirty="0"/>
+              <a:t> </a:t>
+            </a:r>
+            <a:r>
+              <a:rPr lang="de-DE" sz="2400" dirty="0" err="1"/>
+              <a:t>work</a:t>
+            </a:r>
+            <a:r>
+              <a:rPr lang="de-DE" sz="2400" dirty="0"/>
+              <a:t> </a:t>
+            </a:r>
+            <a:r>
+              <a:rPr lang="de-DE" sz="2400" dirty="0" err="1"/>
+              <a:t>properly</a:t>
+            </a:r>
+            <a:endParaRPr lang="de-DE" sz="2400" dirty="0"/>
+          </a:p>
+          <a:p>
+            <a:r>
+              <a:rPr lang="de-DE" sz="2400" dirty="0" err="1"/>
+              <a:t>semiconductors</a:t>
+            </a:r>
+            <a:r>
+              <a:rPr lang="de-DE" sz="2400" dirty="0"/>
+              <a:t> (CPU, GPU, LEDs) </a:t>
+            </a:r>
+            <a:r>
+              <a:rPr lang="de-DE" sz="2400" dirty="0" err="1"/>
+              <a:t>only</a:t>
+            </a:r>
+            <a:r>
+              <a:rPr lang="de-DE" sz="2400" dirty="0"/>
+              <a:t> </a:t>
+            </a:r>
+            <a:r>
+              <a:rPr lang="de-DE" sz="2400" dirty="0" err="1"/>
+              <a:t>allow</a:t>
+            </a:r>
+            <a:r>
+              <a:rPr lang="de-DE" sz="2400" dirty="0"/>
+              <a:t> </a:t>
+            </a:r>
+            <a:r>
+              <a:rPr lang="de-DE" sz="2400" dirty="0" err="1"/>
+              <a:t>current</a:t>
+            </a:r>
+            <a:r>
+              <a:rPr lang="de-DE" sz="2400" dirty="0"/>
+              <a:t> in </a:t>
+            </a:r>
+            <a:r>
+              <a:rPr lang="de-DE" sz="2400" dirty="0" err="1"/>
+              <a:t>one</a:t>
+            </a:r>
+            <a:r>
+              <a:rPr lang="de-DE" sz="2400" dirty="0"/>
+              <a:t> </a:t>
+            </a:r>
+            <a:r>
+              <a:rPr lang="de-DE" sz="2400" dirty="0" err="1"/>
+              <a:t>direction</a:t>
+            </a:r>
+            <a:endParaRPr lang="de-DE" sz="2400" dirty="0"/>
+          </a:p>
+          <a:p>
+            <a:r>
+              <a:rPr lang="de-DE" sz="2400" dirty="0"/>
+              <a:t>DRAM, </a:t>
+            </a:r>
+            <a:r>
+              <a:rPr lang="de-DE" sz="2400" dirty="0" err="1"/>
+              <a:t>flash</a:t>
+            </a:r>
+            <a:r>
+              <a:rPr lang="de-DE" sz="2400" dirty="0"/>
+              <a:t>, and </a:t>
+            </a:r>
+            <a:r>
+              <a:rPr lang="de-DE" sz="2400" dirty="0" err="1"/>
+              <a:t>other</a:t>
+            </a:r>
+            <a:r>
+              <a:rPr lang="de-DE" sz="2400" dirty="0"/>
+              <a:t> </a:t>
+            </a:r>
+            <a:r>
+              <a:rPr lang="de-DE" sz="2400" dirty="0" err="1"/>
+              <a:t>memory</a:t>
+            </a:r>
+            <a:r>
+              <a:rPr lang="de-DE" sz="2400" dirty="0"/>
+              <a:t> </a:t>
+            </a:r>
+            <a:r>
+              <a:rPr lang="de-DE" sz="2400" dirty="0" err="1"/>
+              <a:t>need</a:t>
+            </a:r>
+            <a:r>
+              <a:rPr lang="de-DE" sz="2400" dirty="0"/>
+              <a:t> </a:t>
+            </a:r>
+            <a:r>
+              <a:rPr lang="de-DE" sz="2400" dirty="0" err="1"/>
+              <a:t>consistent</a:t>
+            </a:r>
+            <a:r>
+              <a:rPr lang="de-DE" sz="2400" dirty="0"/>
+              <a:t> DC </a:t>
+            </a:r>
+            <a:r>
+              <a:rPr lang="de-DE" sz="2400" dirty="0" err="1"/>
+              <a:t>to</a:t>
+            </a:r>
+            <a:r>
+              <a:rPr lang="de-DE" sz="2400" dirty="0"/>
+              <a:t> </a:t>
+            </a:r>
+            <a:r>
+              <a:rPr lang="de-DE" sz="2400" dirty="0" err="1"/>
+              <a:t>store</a:t>
+            </a:r>
+            <a:r>
+              <a:rPr lang="de-DE" sz="2400" dirty="0"/>
+              <a:t> </a:t>
+            </a:r>
+            <a:r>
+              <a:rPr lang="de-DE" sz="2400" dirty="0" err="1"/>
+              <a:t>data</a:t>
+            </a:r>
+            <a:endParaRPr lang="de-DE" sz="2400" dirty="0"/>
+          </a:p>
+          <a:p>
+            <a:r>
+              <a:rPr lang="de-DE" sz="2400" dirty="0"/>
+              <a:t>AC </a:t>
+            </a:r>
+            <a:r>
+              <a:rPr lang="de-DE" sz="2400" dirty="0" err="1"/>
+              <a:t>fluctuations</a:t>
+            </a:r>
+            <a:r>
+              <a:rPr lang="de-DE" sz="2400" dirty="0"/>
+              <a:t> </a:t>
+            </a:r>
+            <a:r>
+              <a:rPr lang="de-DE" sz="2400" dirty="0" err="1"/>
+              <a:t>could</a:t>
+            </a:r>
+            <a:r>
+              <a:rPr lang="de-DE" sz="2400" dirty="0"/>
+              <a:t> </a:t>
+            </a:r>
+            <a:r>
+              <a:rPr lang="de-DE" sz="2400" dirty="0" err="1"/>
+              <a:t>damage</a:t>
+            </a:r>
+            <a:r>
+              <a:rPr lang="de-DE" sz="2400" dirty="0"/>
+              <a:t> </a:t>
+            </a:r>
+            <a:r>
+              <a:rPr lang="de-DE" sz="2400" dirty="0" err="1"/>
+              <a:t>circuits</a:t>
+            </a:r>
+            <a:r>
+              <a:rPr lang="de-DE" sz="2400" dirty="0"/>
+              <a:t> </a:t>
+            </a:r>
+            <a:r>
+              <a:rPr lang="de-DE" sz="2400" dirty="0" err="1"/>
+              <a:t>or</a:t>
+            </a:r>
+            <a:r>
+              <a:rPr lang="de-DE" sz="2400" dirty="0"/>
+              <a:t> </a:t>
+            </a:r>
+            <a:r>
+              <a:rPr lang="de-DE" sz="2400" dirty="0" err="1"/>
+              <a:t>cause</a:t>
+            </a:r>
+            <a:r>
+              <a:rPr lang="de-DE" sz="2400" dirty="0"/>
+              <a:t> </a:t>
+            </a:r>
+            <a:r>
+              <a:rPr lang="de-DE" sz="2400" dirty="0" err="1"/>
+              <a:t>malfunction</a:t>
+            </a:r>
+            <a:endParaRPr lang="de-DE" sz="2400" dirty="0"/>
           </a:p>
           <a:p>
             <a:pPr marL="0" indent="0">
               <a:buNone/>
             </a:pPr>
-            <a:endParaRPr lang="de-DE" dirty="0"/>
-          </a:p>
-          <a:p>
-            <a:pPr marL="0" indent="0">
-              <a:buNone/>
-            </a:pPr>
-            <a:r>
-              <a:rPr lang="de-DE" dirty="0" err="1"/>
-              <a:t>communication</a:t>
-            </a:r>
-            <a:r>
-              <a:rPr lang="de-DE" dirty="0"/>
-              <a:t> </a:t>
-            </a:r>
-            <a:r>
-              <a:rPr lang="de-DE" dirty="0" err="1"/>
-              <a:t>systems</a:t>
-            </a:r>
-            <a:endParaRPr lang="de-DE" dirty="0"/>
-          </a:p>
-          <a:p>
-            <a:r>
-              <a:rPr lang="de-DE" dirty="0" err="1"/>
-              <a:t>amplitude</a:t>
-            </a:r>
-            <a:r>
-              <a:rPr lang="de-DE" dirty="0"/>
-              <a:t>/</a:t>
-            </a:r>
-            <a:r>
-              <a:rPr lang="de-DE" dirty="0" err="1"/>
-              <a:t>frequency</a:t>
-            </a:r>
-            <a:r>
-              <a:rPr lang="de-DE" dirty="0"/>
-              <a:t> </a:t>
-            </a:r>
-            <a:r>
-              <a:rPr lang="de-DE" dirty="0" err="1"/>
-              <a:t>modulation</a:t>
-            </a:r>
-            <a:r>
-              <a:rPr lang="de-DE" dirty="0"/>
-              <a:t> (AM/FM)</a:t>
-            </a:r>
-          </a:p>
-          <a:p>
-            <a:r>
-              <a:rPr lang="de-DE" dirty="0"/>
-              <a:t>digital </a:t>
-            </a:r>
-            <a:r>
-              <a:rPr lang="de-DE" dirty="0" err="1"/>
-              <a:t>modulation</a:t>
-            </a:r>
-            <a:endParaRPr lang="de-DE" dirty="0"/>
-          </a:p>
-          <a:p>
-            <a:r>
-              <a:rPr lang="de-DE" dirty="0" err="1"/>
-              <a:t>noise</a:t>
-            </a:r>
-            <a:r>
-              <a:rPr lang="de-DE" dirty="0"/>
-              <a:t>, </a:t>
-            </a:r>
-            <a:r>
-              <a:rPr lang="de-DE" dirty="0" err="1"/>
-              <a:t>bandwidth</a:t>
-            </a:r>
-            <a:r>
-              <a:rPr lang="de-DE" dirty="0"/>
-              <a:t>, and </a:t>
-            </a:r>
-            <a:r>
-              <a:rPr lang="de-DE" dirty="0" err="1"/>
-              <a:t>filtering</a:t>
-            </a:r>
-            <a:r>
-              <a:rPr lang="de-DE" dirty="0"/>
-              <a:t> </a:t>
-            </a:r>
-            <a:r>
-              <a:rPr lang="de-DE" dirty="0" err="1"/>
-              <a:t>concepts</a:t>
-            </a:r>
-            <a:endParaRPr lang="de-DE" dirty="0"/>
-          </a:p>
-          <a:p>
-            <a:r>
-              <a:rPr lang="de-DE" dirty="0" err="1"/>
-              <a:t>communication</a:t>
-            </a:r>
-            <a:r>
-              <a:rPr lang="de-DE" dirty="0"/>
-              <a:t> </a:t>
-            </a:r>
-            <a:r>
-              <a:rPr lang="de-DE" dirty="0" err="1"/>
-              <a:t>channels</a:t>
-            </a:r>
-            <a:r>
-              <a:rPr lang="de-DE" dirty="0"/>
-              <a:t> and </a:t>
-            </a:r>
-            <a:r>
-              <a:rPr lang="de-DE" dirty="0" err="1"/>
-              <a:t>data</a:t>
-            </a:r>
-            <a:r>
-              <a:rPr lang="de-DE" dirty="0"/>
-              <a:t> </a:t>
-            </a:r>
-            <a:r>
-              <a:rPr lang="de-DE" dirty="0" err="1"/>
-              <a:t>transmission</a:t>
-            </a:r>
-            <a:endParaRPr lang="de-DE" dirty="0"/>
+            <a:r>
+              <a:rPr lang="de-DE" dirty="0">
+                <a:sym typeface="Wingdings" pitchFamily="2" charset="2"/>
+              </a:rPr>
+              <a:t> </a:t>
+            </a:r>
+            <a:r>
+              <a:rPr lang="de-DE" dirty="0" err="1"/>
+              <a:t>adapters</a:t>
+            </a:r>
+            <a:r>
+              <a:rPr lang="de-DE" dirty="0"/>
+              <a:t> </a:t>
+            </a:r>
+            <a:r>
+              <a:rPr lang="de-DE" dirty="0" err="1"/>
+              <a:t>to</a:t>
+            </a:r>
+            <a:r>
+              <a:rPr lang="de-DE" dirty="0"/>
+              <a:t> </a:t>
+            </a:r>
+            <a:r>
+              <a:rPr lang="de-DE" dirty="0" err="1"/>
+              <a:t>convert</a:t>
+            </a:r>
+            <a:r>
+              <a:rPr lang="de-DE" dirty="0"/>
+              <a:t> AC </a:t>
+            </a:r>
+            <a:r>
+              <a:rPr lang="de-DE" dirty="0" err="1"/>
+              <a:t>to</a:t>
+            </a:r>
+            <a:r>
+              <a:rPr lang="de-DE" dirty="0"/>
+              <a:t> DC</a:t>
+            </a:r>
           </a:p>
         </p:txBody>
       </p:sp>
@@ -4394,7 +4840,7 @@
           <p:cNvPr id="4" name="Foliennummernplatzhalter 3">
             <a:extLst>
               <a:ext uri="{FF2B5EF4-FFF2-40B4-BE49-F238E27FC236}">
-                <a16:creationId xmlns:a16="http://schemas.microsoft.com/office/drawing/2014/main" id="{81D00159-36CB-5D28-5E14-AAA7EC157448}"/>
+                <a16:creationId xmlns:a16="http://schemas.microsoft.com/office/drawing/2014/main" id="{A68AE9F7-E31C-36F2-7183-6A19BA92962D}"/>
               </a:ext>
             </a:extLst>
           </p:cNvPr>
@@ -4421,7 +4867,7 @@
     </p:spTree>
     <p:extLst>
       <p:ext uri="{BB962C8B-B14F-4D97-AF65-F5344CB8AC3E}">
-        <p14:creationId xmlns:p14="http://schemas.microsoft.com/office/powerpoint/2010/main" val="1009869982"/>
+        <p14:creationId xmlns:p14="http://schemas.microsoft.com/office/powerpoint/2010/main" val="1104561317"/>
       </p:ext>
     </p:extLst>
   </p:cSld>
@@ -4453,7 +4899,7 @@
           <p:cNvPr id="2" name="Titel 1">
             <a:extLst>
               <a:ext uri="{FF2B5EF4-FFF2-40B4-BE49-F238E27FC236}">
-                <a16:creationId xmlns:a16="http://schemas.microsoft.com/office/drawing/2014/main" id="{5766A4C2-9266-7203-BB84-BAA0BBA2D064}"/>
+                <a16:creationId xmlns:a16="http://schemas.microsoft.com/office/drawing/2014/main" id="{92D4F2D7-D60E-BFDE-367D-043D1DEE8B72}"/>
               </a:ext>
             </a:extLst>
           </p:cNvPr>
@@ -4471,143 +4917,432 @@
           <a:p>
             <a:r>
               <a:rPr lang="de-DE" dirty="0"/>
-              <a:t>Control Systems</a:t>
-            </a:r>
-          </a:p>
-        </p:txBody>
-      </p:sp>
-      <p:sp>
-        <p:nvSpPr>
-          <p:cNvPr id="3" name="Inhaltsplatzhalter 2">
-            <a:extLst>
-              <a:ext uri="{FF2B5EF4-FFF2-40B4-BE49-F238E27FC236}">
-                <a16:creationId xmlns:a16="http://schemas.microsoft.com/office/drawing/2014/main" id="{D2987060-39ED-4C85-1627-55E612B0A864}"/>
-              </a:ext>
-            </a:extLst>
-          </p:cNvPr>
-          <p:cNvSpPr>
-            <a:spLocks noGrp="1"/>
-          </p:cNvSpPr>
-          <p:nvPr>
-            <p:ph idx="1"/>
-          </p:nvPr>
-        </p:nvSpPr>
-        <p:spPr/>
-        <p:txBody>
-          <a:bodyPr/>
-          <a:lstStyle/>
-          <a:p>
-            <a:r>
-              <a:rPr lang="de-DE" dirty="0" err="1"/>
-              <a:t>feedback</a:t>
-            </a:r>
-            <a:r>
-              <a:rPr lang="de-DE" dirty="0"/>
-              <a:t>, </a:t>
-            </a:r>
-            <a:r>
-              <a:rPr lang="de-DE" dirty="0" err="1"/>
-              <a:t>stability</a:t>
-            </a:r>
-            <a:r>
-              <a:rPr lang="de-DE" dirty="0"/>
-              <a:t>, and </a:t>
-            </a:r>
-            <a:r>
-              <a:rPr lang="de-DE" dirty="0" err="1"/>
-              <a:t>dynamic</a:t>
-            </a:r>
-            <a:r>
-              <a:rPr lang="de-DE" dirty="0"/>
-              <a:t> </a:t>
-            </a:r>
-            <a:r>
-              <a:rPr lang="de-DE" dirty="0" err="1"/>
-              <a:t>response</a:t>
-            </a:r>
-            <a:endParaRPr lang="de-DE" dirty="0"/>
-          </a:p>
-          <a:p>
-            <a:r>
-              <a:rPr lang="de-DE" dirty="0"/>
-              <a:t>root </a:t>
-            </a:r>
-            <a:r>
-              <a:rPr lang="de-DE" dirty="0" err="1"/>
-              <a:t>locus</a:t>
-            </a:r>
-            <a:r>
-              <a:rPr lang="de-DE" dirty="0"/>
-              <a:t>, Bode, and </a:t>
-            </a:r>
-            <a:r>
-              <a:rPr lang="de-DE" dirty="0" err="1"/>
-              <a:t>Nyquist</a:t>
-            </a:r>
-            <a:r>
-              <a:rPr lang="de-DE" dirty="0"/>
-              <a:t> </a:t>
-            </a:r>
-            <a:r>
-              <a:rPr lang="de-DE" dirty="0" err="1"/>
-              <a:t>techniques</a:t>
-            </a:r>
-            <a:endParaRPr lang="de-DE" dirty="0"/>
-          </a:p>
-          <a:p>
-            <a:r>
-              <a:rPr lang="de-DE" dirty="0"/>
-              <a:t>PID </a:t>
-            </a:r>
-            <a:r>
-              <a:rPr lang="de-DE" dirty="0" err="1"/>
-              <a:t>control</a:t>
-            </a:r>
-            <a:r>
-              <a:rPr lang="de-DE" dirty="0"/>
-              <a:t> and real-</a:t>
-            </a:r>
-            <a:r>
-              <a:rPr lang="de-DE" dirty="0" err="1"/>
-              <a:t>world</a:t>
-            </a:r>
-            <a:r>
-              <a:rPr lang="de-DE" dirty="0"/>
-              <a:t> </a:t>
-            </a:r>
-            <a:r>
-              <a:rPr lang="de-DE" dirty="0" err="1"/>
-              <a:t>applications</a:t>
-            </a:r>
-            <a:r>
-              <a:rPr lang="de-DE" dirty="0"/>
-              <a:t> (</a:t>
-            </a:r>
-            <a:r>
-              <a:rPr lang="de-DE" dirty="0" err="1"/>
-              <a:t>motors</a:t>
-            </a:r>
-            <a:r>
-              <a:rPr lang="de-DE" dirty="0"/>
-              <a:t>, </a:t>
-            </a:r>
-            <a:r>
-              <a:rPr lang="de-DE" dirty="0" err="1"/>
-              <a:t>robotics</a:t>
-            </a:r>
-            <a:r>
-              <a:rPr lang="de-DE" dirty="0"/>
-              <a:t>)</a:t>
-            </a:r>
-          </a:p>
-        </p:txBody>
-      </p:sp>
+              <a:t>Smartphone Charger</a:t>
+            </a:r>
+          </a:p>
+        </p:txBody>
+      </p:sp>
+      <mc:AlternateContent xmlns:mc="http://schemas.openxmlformats.org/markup-compatibility/2006">
+        <mc:Choice xmlns:a14="http://schemas.microsoft.com/office/drawing/2010/main" Requires="a14">
+          <p:sp>
+            <p:nvSpPr>
+              <p:cNvPr id="3" name="Inhaltsplatzhalter 2">
+                <a:extLst>
+                  <a:ext uri="{FF2B5EF4-FFF2-40B4-BE49-F238E27FC236}">
+                    <a16:creationId xmlns:a16="http://schemas.microsoft.com/office/drawing/2014/main" id="{F269BEF7-5CA9-5EE1-2720-F68AFAA23B3C}"/>
+                  </a:ext>
+                </a:extLst>
+              </p:cNvPr>
+              <p:cNvSpPr>
+                <a:spLocks noGrp="1"/>
+              </p:cNvSpPr>
+              <p:nvPr>
+                <p:ph idx="1"/>
+              </p:nvPr>
+            </p:nvSpPr>
+            <p:spPr>
+              <a:xfrm>
+                <a:off x="838199" y="1825625"/>
+                <a:ext cx="11141503" cy="4667250"/>
+              </a:xfrm>
+            </p:spPr>
+            <p:txBody>
+              <a:bodyPr>
+                <a:noAutofit/>
+              </a:bodyPr>
+              <a:lstStyle/>
+              <a:p>
+                <a:r>
+                  <a:rPr lang="de-DE" sz="2600" dirty="0" err="1"/>
+                  <a:t>input</a:t>
+                </a:r>
+                <a:r>
+                  <a:rPr lang="de-DE" sz="2600" dirty="0"/>
+                  <a:t>: AC </a:t>
+                </a:r>
+                <a:r>
+                  <a:rPr lang="de-DE" sz="2600" dirty="0" err="1"/>
+                  <a:t>from</a:t>
+                </a:r>
+                <a:r>
+                  <a:rPr lang="de-DE" sz="2600" dirty="0"/>
+                  <a:t> wall </a:t>
+                </a:r>
+                <a:r>
+                  <a:rPr lang="de-DE" sz="2600" dirty="0" err="1"/>
+                  <a:t>outlet</a:t>
+                </a:r>
+                <a:r>
+                  <a:rPr lang="de-DE" sz="2600" dirty="0"/>
+                  <a:t> (e.g., </a:t>
+                </a:r>
+                <a14:m>
+                  <m:oMath xmlns:m="http://schemas.openxmlformats.org/officeDocument/2006/math">
+                    <m:r>
+                      <a:rPr lang="de-DE" sz="2600" i="1" dirty="0" smtClean="0">
+                        <a:latin typeface="Cambria Math" panose="02040503050406030204" pitchFamily="18" charset="0"/>
+                        <a:ea typeface="Cambria Math" panose="02040503050406030204" pitchFamily="18" charset="0"/>
+                      </a:rPr>
+                      <m:t>2</m:t>
+                    </m:r>
+                    <m:r>
+                      <a:rPr lang="de-DE" sz="2600" b="0" i="1" dirty="0" smtClean="0">
+                        <a:latin typeface="Cambria Math" panose="02040503050406030204" pitchFamily="18" charset="0"/>
+                        <a:ea typeface="Cambria Math" panose="02040503050406030204" pitchFamily="18" charset="0"/>
+                      </a:rPr>
+                      <m:t>30</m:t>
+                    </m:r>
+                    <m:r>
+                      <a:rPr lang="de-DE" sz="2600" i="1">
+                        <a:latin typeface="Cambria Math" panose="02040503050406030204" pitchFamily="18" charset="0"/>
+                        <a:ea typeface="Cambria Math" panose="02040503050406030204" pitchFamily="18" charset="0"/>
+                      </a:rPr>
+                      <m:t> </m:t>
+                    </m:r>
+                    <m:r>
+                      <m:rPr>
+                        <m:sty m:val="p"/>
+                      </m:rPr>
+                      <a:rPr lang="de-DE" sz="2600" b="0" i="0" smtClean="0">
+                        <a:latin typeface="Cambria Math" panose="02040503050406030204" pitchFamily="18" charset="0"/>
+                        <a:ea typeface="Cambria Math" panose="02040503050406030204" pitchFamily="18" charset="0"/>
+                      </a:rPr>
+                      <m:t>V</m:t>
+                    </m:r>
+                  </m:oMath>
+                </a14:m>
+                <a:r>
+                  <a:rPr lang="de-DE" sz="2600" dirty="0"/>
+                  <a:t>)</a:t>
+                </a:r>
+              </a:p>
+              <a:p>
+                <a:pPr marL="0" indent="0">
+                  <a:buNone/>
+                </a:pPr>
+                <a:endParaRPr lang="de-DE" sz="2600" dirty="0"/>
+              </a:p>
+              <a:p>
+                <a:r>
+                  <a:rPr lang="de-DE" sz="2600" dirty="0" err="1"/>
+                  <a:t>diode</a:t>
+                </a:r>
+                <a:r>
+                  <a:rPr lang="de-DE" sz="2600" dirty="0"/>
+                  <a:t> </a:t>
+                </a:r>
+                <a:r>
+                  <a:rPr lang="de-DE" sz="2600" dirty="0" err="1"/>
+                  <a:t>bridge</a:t>
+                </a:r>
+                <a:r>
+                  <a:rPr lang="de-DE" sz="2600" dirty="0"/>
+                  <a:t> (4 </a:t>
+                </a:r>
+                <a:r>
+                  <a:rPr lang="de-DE" sz="2600" dirty="0" err="1"/>
+                  <a:t>diodes</a:t>
+                </a:r>
+                <a:r>
+                  <a:rPr lang="de-DE" sz="2600" dirty="0"/>
+                  <a:t>) </a:t>
+                </a:r>
+                <a:r>
+                  <a:rPr lang="de-DE" sz="2600" dirty="0" err="1"/>
+                  <a:t>converts</a:t>
+                </a:r>
+                <a:r>
+                  <a:rPr lang="de-DE" sz="2600" dirty="0"/>
+                  <a:t> AC </a:t>
+                </a:r>
+                <a:r>
+                  <a:rPr lang="de-DE" sz="2600" dirty="0" err="1"/>
+                  <a:t>into</a:t>
+                </a:r>
+                <a:r>
+                  <a:rPr lang="de-DE" sz="2600" dirty="0"/>
+                  <a:t> </a:t>
+                </a:r>
+                <a:r>
+                  <a:rPr lang="de-DE" sz="2600" dirty="0" err="1"/>
+                  <a:t>pulsating</a:t>
+                </a:r>
+                <a:r>
+                  <a:rPr lang="de-DE" sz="2600" dirty="0"/>
+                  <a:t> DC (</a:t>
+                </a:r>
+                <a:r>
+                  <a:rPr lang="de-DE" sz="2600" dirty="0" err="1"/>
+                  <a:t>rectification</a:t>
+                </a:r>
+                <a:r>
+                  <a:rPr lang="de-DE" sz="2600" dirty="0"/>
+                  <a:t>)</a:t>
+                </a:r>
+              </a:p>
+              <a:p>
+                <a:pPr marL="0" indent="0">
+                  <a:buNone/>
+                </a:pPr>
+                <a:endParaRPr lang="de-DE" sz="2600" dirty="0"/>
+              </a:p>
+              <a:p>
+                <a:r>
+                  <a:rPr lang="de-DE" sz="2600" dirty="0" err="1"/>
+                  <a:t>capacitor</a:t>
+                </a:r>
+                <a:r>
+                  <a:rPr lang="de-DE" sz="2600" dirty="0"/>
+                  <a:t> </a:t>
+                </a:r>
+                <a:r>
+                  <a:rPr lang="de-DE" sz="2600" dirty="0" err="1"/>
+                  <a:t>smooths</a:t>
+                </a:r>
+                <a:r>
+                  <a:rPr lang="de-DE" sz="2600" dirty="0"/>
+                  <a:t> </a:t>
+                </a:r>
+                <a:r>
+                  <a:rPr lang="de-DE" sz="2600" dirty="0" err="1"/>
+                  <a:t>pulsating</a:t>
+                </a:r>
+                <a:r>
+                  <a:rPr lang="de-DE" sz="2600" dirty="0"/>
+                  <a:t> DC</a:t>
+                </a:r>
+              </a:p>
+              <a:p>
+                <a:pPr marL="0" indent="0">
+                  <a:buNone/>
+                </a:pPr>
+                <a:endParaRPr lang="de-DE" sz="2600" dirty="0"/>
+              </a:p>
+              <a:p>
+                <a:r>
+                  <a:rPr lang="de-DE" sz="2600" dirty="0" err="1"/>
+                  <a:t>switching</a:t>
+                </a:r>
+                <a:r>
+                  <a:rPr lang="de-DE" sz="2600" dirty="0"/>
+                  <a:t> </a:t>
+                </a:r>
+                <a:r>
+                  <a:rPr lang="de-DE" sz="2600" dirty="0" err="1"/>
+                  <a:t>regulator</a:t>
+                </a:r>
+                <a:r>
+                  <a:rPr lang="de-DE" sz="2600" dirty="0"/>
+                  <a:t> </a:t>
+                </a:r>
+                <a:r>
+                  <a:rPr lang="de-DE" sz="2600" dirty="0" err="1"/>
+                  <a:t>steps</a:t>
+                </a:r>
+                <a:r>
+                  <a:rPr lang="de-DE" sz="2600" dirty="0"/>
+                  <a:t> high DC </a:t>
+                </a:r>
+                <a:r>
+                  <a:rPr lang="de-DE" sz="2600" dirty="0" err="1"/>
+                  <a:t>voltage</a:t>
+                </a:r>
+                <a:r>
+                  <a:rPr lang="de-DE" sz="2600" dirty="0"/>
+                  <a:t> down </a:t>
+                </a:r>
+                <a:r>
+                  <a:rPr lang="de-DE" sz="2600" dirty="0" err="1"/>
+                  <a:t>to</a:t>
+                </a:r>
+                <a:r>
+                  <a:rPr lang="de-DE" sz="2600" dirty="0"/>
+                  <a:t> </a:t>
+                </a:r>
+                <a:r>
+                  <a:rPr lang="de-DE" sz="2600" dirty="0" err="1"/>
+                  <a:t>required</a:t>
+                </a:r>
+                <a:r>
+                  <a:rPr lang="de-DE" sz="2600" dirty="0"/>
+                  <a:t> </a:t>
+                </a:r>
+                <a:r>
+                  <a:rPr lang="de-DE" sz="2600" dirty="0" err="1"/>
+                  <a:t>level</a:t>
+                </a:r>
+                <a:r>
+                  <a:rPr lang="de-DE" sz="2600" dirty="0"/>
+                  <a:t> (e.g., </a:t>
+                </a:r>
+                <a14:m>
+                  <m:oMath xmlns:m="http://schemas.openxmlformats.org/officeDocument/2006/math">
+                    <m:r>
+                      <a:rPr lang="de-DE" sz="2600" i="1" dirty="0" smtClean="0">
+                        <a:latin typeface="Cambria Math" panose="02040503050406030204" pitchFamily="18" charset="0"/>
+                        <a:ea typeface="Cambria Math" panose="02040503050406030204" pitchFamily="18" charset="0"/>
+                      </a:rPr>
+                      <m:t>5</m:t>
+                    </m:r>
+                    <m:r>
+                      <a:rPr lang="de-DE" sz="2600" i="1">
+                        <a:latin typeface="Cambria Math" panose="02040503050406030204" pitchFamily="18" charset="0"/>
+                        <a:ea typeface="Cambria Math" panose="02040503050406030204" pitchFamily="18" charset="0"/>
+                      </a:rPr>
+                      <m:t> </m:t>
+                    </m:r>
+                    <m:r>
+                      <m:rPr>
+                        <m:sty m:val="p"/>
+                      </m:rPr>
+                      <a:rPr lang="de-DE" sz="2600" b="0" i="0" smtClean="0">
+                        <a:latin typeface="Cambria Math" panose="02040503050406030204" pitchFamily="18" charset="0"/>
+                        <a:ea typeface="Cambria Math" panose="02040503050406030204" pitchFamily="18" charset="0"/>
+                      </a:rPr>
+                      <m:t>V</m:t>
+                    </m:r>
+                  </m:oMath>
+                </a14:m>
+                <a:r>
+                  <a:rPr lang="de-DE" sz="2600" dirty="0"/>
+                  <a:t>), </a:t>
+                </a:r>
+                <a:r>
+                  <a:rPr lang="de-DE" sz="2600" dirty="0" err="1"/>
+                  <a:t>using</a:t>
+                </a:r>
+                <a:r>
+                  <a:rPr lang="de-DE" sz="2600" dirty="0"/>
+                  <a:t> a </a:t>
+                </a:r>
+                <a:r>
+                  <a:rPr lang="de-DE" sz="2600" dirty="0" err="1"/>
+                  <a:t>transistor</a:t>
+                </a:r>
+                <a:r>
+                  <a:rPr lang="de-DE" sz="2600" dirty="0"/>
+                  <a:t> (switch) and a high-</a:t>
+                </a:r>
+                <a:r>
+                  <a:rPr lang="de-DE" sz="2600" dirty="0" err="1"/>
+                  <a:t>frequency</a:t>
+                </a:r>
+                <a:r>
+                  <a:rPr lang="de-DE" sz="2600" dirty="0"/>
+                  <a:t> </a:t>
+                </a:r>
+                <a:r>
+                  <a:rPr lang="de-DE" sz="2600" dirty="0" err="1"/>
+                  <a:t>transformer</a:t>
+                </a:r>
+                <a:endParaRPr lang="de-DE" sz="2600" dirty="0"/>
+              </a:p>
+              <a:p>
+                <a:pPr marL="0" indent="0">
+                  <a:buNone/>
+                </a:pPr>
+                <a:endParaRPr lang="de-DE" sz="2600" dirty="0"/>
+              </a:p>
+              <a:p>
+                <a:r>
+                  <a:rPr lang="de-DE" sz="2600" dirty="0" err="1"/>
+                  <a:t>output</a:t>
+                </a:r>
+                <a:r>
+                  <a:rPr lang="de-DE" sz="2600" dirty="0"/>
+                  <a:t>: </a:t>
+                </a:r>
+                <a:r>
+                  <a:rPr lang="de-DE" sz="2600" dirty="0" err="1"/>
+                  <a:t>stable</a:t>
+                </a:r>
+                <a:r>
+                  <a:rPr lang="de-DE" sz="2600" dirty="0"/>
+                  <a:t> DC </a:t>
+                </a:r>
+                <a:r>
+                  <a:rPr lang="de-DE" sz="2600" dirty="0" err="1"/>
+                  <a:t>voltage</a:t>
+                </a:r>
+                <a:r>
+                  <a:rPr lang="de-DE" sz="2600" dirty="0"/>
+                  <a:t> </a:t>
+                </a:r>
+                <a:r>
+                  <a:rPr lang="de-DE" sz="2600" dirty="0" err="1"/>
+                  <a:t>to</a:t>
+                </a:r>
+                <a:r>
+                  <a:rPr lang="de-DE" sz="2600" dirty="0"/>
+                  <a:t> </a:t>
+                </a:r>
+                <a:r>
+                  <a:rPr lang="de-DE" sz="2600" dirty="0" err="1"/>
+                  <a:t>charge</a:t>
+                </a:r>
+                <a:r>
+                  <a:rPr lang="de-DE" sz="2600" dirty="0"/>
+                  <a:t> </a:t>
+                </a:r>
+                <a:r>
+                  <a:rPr lang="de-DE" sz="2600" dirty="0" err="1"/>
+                  <a:t>battery</a:t>
+                </a:r>
+                <a:endParaRPr lang="de-DE" sz="2600" dirty="0"/>
+              </a:p>
+            </p:txBody>
+          </p:sp>
+        </mc:Choice>
+        <mc:Fallback>
+          <p:sp>
+            <p:nvSpPr>
+              <p:cNvPr id="3" name="Inhaltsplatzhalter 2">
+                <a:extLst>
+                  <a:ext uri="{FF2B5EF4-FFF2-40B4-BE49-F238E27FC236}">
+                    <a16:creationId xmlns:a16="http://schemas.microsoft.com/office/drawing/2014/main" id="{F269BEF7-5CA9-5EE1-2720-F68AFAA23B3C}"/>
+                  </a:ext>
+                </a:extLst>
+              </p:cNvPr>
+              <p:cNvSpPr>
+                <a:spLocks noGrp="1" noRot="1" noChangeAspect="1" noMove="1" noResize="1" noEditPoints="1" noAdjustHandles="1" noChangeArrowheads="1" noChangeShapeType="1" noTextEdit="1"/>
+              </p:cNvSpPr>
+              <p:nvPr>
+                <p:ph idx="1"/>
+              </p:nvPr>
+            </p:nvSpPr>
+            <p:spPr>
+              <a:xfrm>
+                <a:off x="838199" y="1825625"/>
+                <a:ext cx="11141503" cy="4667250"/>
+              </a:xfrm>
+              <a:blipFill>
+                <a:blip r:embed="rId2"/>
+                <a:stretch>
+                  <a:fillRect l="-796" t="-1897" b="-3523"/>
+                </a:stretch>
+              </a:blipFill>
+            </p:spPr>
+            <p:txBody>
+              <a:bodyPr/>
+              <a:lstStyle/>
+              <a:p>
+                <a:r>
+                  <a:rPr lang="de-DE">
+                    <a:noFill/>
+                  </a:rPr>
+                  <a:t> </a:t>
+                </a:r>
+              </a:p>
+            </p:txBody>
+          </p:sp>
+        </mc:Fallback>
+      </mc:AlternateContent>
       <p:sp>
         <p:nvSpPr>
           <p:cNvPr id="4" name="Foliennummernplatzhalter 3">
             <a:extLst>
               <a:ext uri="{FF2B5EF4-FFF2-40B4-BE49-F238E27FC236}">
-                <a16:creationId xmlns:a16="http://schemas.microsoft.com/office/drawing/2014/main" id="{BD96D762-A330-9A42-BD7C-EF29141C863C}"/>
+                <a16:creationId xmlns:a16="http://schemas.microsoft.com/office/drawing/2014/main" id="{CAB2F485-9575-28D1-4D95-5EEB6D0DF38E}"/>
               </a:ext>
             </a:extLst>
           </p:cNvPr>
@@ -4631,10 +5366,57 @@
           </a:p>
         </p:txBody>
       </p:sp>
+      <p:pic>
+        <p:nvPicPr>
+          <p:cNvPr id="11266" name="Picture 2" descr="Die schnellsten Handy-Ladegeräte: Alles, was Du wissen musst">
+            <a:extLst>
+              <a:ext uri="{FF2B5EF4-FFF2-40B4-BE49-F238E27FC236}">
+                <a16:creationId xmlns:a16="http://schemas.microsoft.com/office/drawing/2014/main" id="{74DB5081-9CD6-0524-C830-226A3225C4FD}"/>
+              </a:ext>
+            </a:extLst>
+          </p:cNvPr>
+          <p:cNvPicPr>
+            <a:picLocks noChangeAspect="1" noChangeArrowheads="1"/>
+          </p:cNvPicPr>
+          <p:nvPr/>
+        </p:nvPicPr>
+        <p:blipFill rotWithShape="1">
+          <a:blip r:embed="rId3">
+            <a:extLst>
+              <a:ext uri="{28A0092B-C50C-407E-A947-70E740481C1C}">
+                <a14:useLocalDpi xmlns:a14="http://schemas.microsoft.com/office/drawing/2010/main" val="0"/>
+              </a:ext>
+            </a:extLst>
+          </a:blip>
+          <a:srcRect l="27759" t="10716" r="4396" b="8226"/>
+          <a:stretch>
+            <a:fillRect/>
+          </a:stretch>
+        </p:blipFill>
+        <p:spPr bwMode="auto">
+          <a:xfrm>
+            <a:off x="9403433" y="136525"/>
+            <a:ext cx="2576270" cy="1729489"/>
+          </a:xfrm>
+          <a:prstGeom prst="rect">
+            <a:avLst/>
+          </a:prstGeom>
+          <a:noFill/>
+          <a:extLst>
+            <a:ext uri="{909E8E84-426E-40DD-AFC4-6F175D3DCCD1}">
+              <a14:hiddenFill xmlns:a14="http://schemas.microsoft.com/office/drawing/2010/main">
+                <a:solidFill>
+                  <a:srgbClr val="FFFFFF"/>
+                </a:solidFill>
+              </a14:hiddenFill>
+            </a:ext>
+          </a:extLst>
+        </p:spPr>
+      </p:pic>
     </p:spTree>
     <p:extLst>
       <p:ext uri="{BB962C8B-B14F-4D97-AF65-F5344CB8AC3E}">
-        <p14:creationId xmlns:p14="http://schemas.microsoft.com/office/powerpoint/2010/main" val="3140469727"/>
+        <p14:creationId xmlns:p14="http://schemas.microsoft.com/office/powerpoint/2010/main" val="159470242"/>
       </p:ext>
     </p:extLst>
   </p:cSld>
@@ -4666,7 +5448,7 @@
           <p:cNvPr id="2" name="Titel 1">
             <a:extLst>
               <a:ext uri="{FF2B5EF4-FFF2-40B4-BE49-F238E27FC236}">
-                <a16:creationId xmlns:a16="http://schemas.microsoft.com/office/drawing/2014/main" id="{0CC534FC-41EE-3B24-00E4-8C41F9D5F1EB}"/>
+                <a16:creationId xmlns:a16="http://schemas.microsoft.com/office/drawing/2014/main" id="{16B5AFDD-6905-A1A6-D8E9-30779D340D0B}"/>
               </a:ext>
             </a:extLst>
           </p:cNvPr>
@@ -4684,7 +5466,7 @@
           <a:p>
             <a:r>
               <a:rPr lang="de-DE" dirty="0"/>
-              <a:t>Embedded Systems</a:t>
+              <a:t>Semiconductor Devices and Electronics</a:t>
             </a:r>
           </a:p>
         </p:txBody>
@@ -4694,7 +5476,7 @@
           <p:cNvPr id="3" name="Inhaltsplatzhalter 2">
             <a:extLst>
               <a:ext uri="{FF2B5EF4-FFF2-40B4-BE49-F238E27FC236}">
-                <a16:creationId xmlns:a16="http://schemas.microsoft.com/office/drawing/2014/main" id="{628D2C43-4882-46AA-3BF3-E056EC9B431F}"/>
+                <a16:creationId xmlns:a16="http://schemas.microsoft.com/office/drawing/2014/main" id="{5BE38531-D0DF-A922-4ACF-65C093FFDE90}"/>
               </a:ext>
             </a:extLst>
           </p:cNvPr>
@@ -4705,33 +5487,45 @@
             <p:ph idx="1"/>
           </p:nvPr>
         </p:nvSpPr>
-        <p:spPr/>
-        <p:txBody>
-          <a:bodyPr/>
+        <p:spPr>
+          <a:xfrm>
+            <a:off x="838200" y="1825625"/>
+            <a:ext cx="6056870" cy="4351338"/>
+          </a:xfrm>
+        </p:spPr>
+        <p:txBody>
+          <a:bodyPr>
+            <a:normAutofit lnSpcReduction="10000"/>
+          </a:bodyPr>
           <a:lstStyle/>
           <a:p>
-            <a:pPr marL="0" indent="0">
-              <a:buNone/>
-            </a:pPr>
-            <a:r>
-              <a:rPr lang="de-DE" dirty="0" err="1"/>
-              <a:t>hardware</a:t>
-            </a:r>
-            <a:r>
-              <a:rPr lang="de-DE" dirty="0"/>
-              <a:t>–</a:t>
-            </a:r>
-            <a:r>
-              <a:rPr lang="de-DE" dirty="0" err="1"/>
-              <a:t>software</a:t>
-            </a:r>
-            <a:r>
-              <a:rPr lang="de-DE" dirty="0"/>
-              <a:t> </a:t>
-            </a:r>
-            <a:r>
-              <a:rPr lang="de-DE" dirty="0" err="1"/>
-              <a:t>integration</a:t>
+            <a:r>
+              <a:rPr lang="de-DE" dirty="0" err="1"/>
+              <a:t>diodes</a:t>
+            </a:r>
+            <a:r>
+              <a:rPr lang="de-DE" dirty="0"/>
+              <a:t> and </a:t>
+            </a:r>
+            <a:r>
+              <a:rPr lang="de-DE" dirty="0" err="1"/>
+              <a:t>transistors</a:t>
+            </a:r>
+            <a:r>
+              <a:rPr lang="de-DE" dirty="0"/>
+              <a:t> — </a:t>
+            </a:r>
+            <a:r>
+              <a:rPr lang="de-DE" dirty="0" err="1"/>
+              <a:t>switching</a:t>
+            </a:r>
+            <a:r>
+              <a:rPr lang="de-DE" dirty="0"/>
+              <a:t> and </a:t>
+            </a:r>
+            <a:r>
+              <a:rPr lang="de-DE" dirty="0" err="1"/>
+              <a:t>amplification</a:t>
             </a:r>
             <a:endParaRPr lang="de-DE" dirty="0"/>
           </a:p>
@@ -4743,23 +5537,69 @@
           </a:p>
           <a:p>
             <a:r>
-              <a:rPr lang="de-DE" dirty="0" err="1"/>
-              <a:t>microcontrollers</a:t>
-            </a:r>
-            <a:r>
-              <a:rPr lang="de-DE" dirty="0"/>
-              <a:t> and digital </a:t>
-            </a:r>
-            <a:r>
-              <a:rPr lang="de-DE" dirty="0" err="1"/>
-              <a:t>systems</a:t>
+              <a:rPr lang="de-DE" dirty="0"/>
+              <a:t>operational </a:t>
+            </a:r>
+            <a:r>
+              <a:rPr lang="de-DE" dirty="0" err="1"/>
+              <a:t>amplifiers</a:t>
+            </a:r>
+            <a:r>
+              <a:rPr lang="de-DE" dirty="0"/>
+              <a:t> — </a:t>
+            </a:r>
+            <a:r>
+              <a:rPr lang="de-DE" dirty="0" err="1"/>
+              <a:t>building</a:t>
+            </a:r>
+            <a:r>
+              <a:rPr lang="de-DE" dirty="0"/>
+              <a:t> </a:t>
+            </a:r>
+            <a:r>
+              <a:rPr lang="de-DE" dirty="0" err="1"/>
+              <a:t>blocks</a:t>
+            </a:r>
+            <a:r>
+              <a:rPr lang="de-DE" dirty="0"/>
+              <a:t> </a:t>
+            </a:r>
+            <a:r>
+              <a:rPr lang="de-DE" dirty="0" err="1"/>
+              <a:t>for</a:t>
+            </a:r>
+            <a:r>
+              <a:rPr lang="de-DE" dirty="0"/>
+              <a:t> analog </a:t>
+            </a:r>
+            <a:r>
+              <a:rPr lang="de-DE" dirty="0" err="1"/>
+              <a:t>circuits</a:t>
             </a:r>
             <a:endParaRPr lang="de-DE" dirty="0"/>
           </a:p>
           <a:p>
-            <a:r>
-              <a:rPr lang="de-DE" dirty="0" err="1"/>
-              <a:t>sensors</a:t>
+            <a:pPr marL="0" indent="0">
+              <a:buNone/>
+            </a:pPr>
+            <a:endParaRPr lang="de-DE" dirty="0"/>
+          </a:p>
+          <a:p>
+            <a:r>
+              <a:rPr lang="de-DE" dirty="0"/>
+              <a:t>analog </a:t>
+            </a:r>
+            <a:r>
+              <a:rPr lang="de-DE" dirty="0" err="1"/>
+              <a:t>circuit</a:t>
+            </a:r>
+            <a:r>
+              <a:rPr lang="de-DE" dirty="0"/>
+              <a:t> design — </a:t>
+            </a:r>
+            <a:r>
+              <a:rPr lang="de-DE" dirty="0" err="1"/>
+              <a:t>filters</a:t>
             </a:r>
             <a:r>
               <a:rPr lang="de-DE" dirty="0"/>
@@ -4767,18 +5607,59 @@
             </a:r>
             <a:r>
               <a:rPr lang="de-DE" dirty="0" err="1"/>
-              <a:t>actuators</a:t>
-            </a:r>
-            <a:r>
-              <a:rPr lang="de-DE" dirty="0"/>
-              <a:t>, and real-time </a:t>
-            </a:r>
-            <a:r>
-              <a:rPr lang="de-DE" dirty="0" err="1"/>
-              <a:t>control</a:t>
+              <a:t>amplifiers</a:t>
+            </a:r>
+            <a:r>
+              <a:rPr lang="de-DE" dirty="0"/>
+              <a:t>, </a:t>
+            </a:r>
+            <a:r>
+              <a:rPr lang="de-DE" dirty="0" err="1"/>
+              <a:t>signal</a:t>
+            </a:r>
+            <a:r>
+              <a:rPr lang="de-DE" dirty="0"/>
+              <a:t> </a:t>
+            </a:r>
+            <a:r>
+              <a:rPr lang="de-DE" dirty="0" err="1"/>
+              <a:t>conditioning</a:t>
             </a:r>
             <a:endParaRPr lang="de-DE" dirty="0"/>
           </a:p>
+          <a:p>
+            <a:pPr marL="0" indent="0">
+              <a:buNone/>
+            </a:pPr>
+            <a:endParaRPr lang="de-DE" dirty="0"/>
+          </a:p>
+          <a:p>
+            <a:r>
+              <a:rPr lang="de-DE" dirty="0"/>
+              <a:t>digital </a:t>
+            </a:r>
+            <a:r>
+              <a:rPr lang="de-DE" dirty="0" err="1"/>
+              <a:t>electronics</a:t>
+            </a:r>
+            <a:r>
+              <a:rPr lang="de-DE" dirty="0"/>
+              <a:t> — </a:t>
+            </a:r>
+            <a:r>
+              <a:rPr lang="de-DE" dirty="0" err="1"/>
+              <a:t>logic</a:t>
+            </a:r>
+            <a:r>
+              <a:rPr lang="de-DE" dirty="0"/>
+              <a:t> </a:t>
+            </a:r>
+            <a:r>
+              <a:rPr lang="de-DE" dirty="0" err="1"/>
+              <a:t>gates</a:t>
+            </a:r>
+            <a:endParaRPr lang="de-DE" dirty="0"/>
+          </a:p>
         </p:txBody>
       </p:sp>
       <p:sp>
@@ -4786,7 +5667,7 @@
           <p:cNvPr id="4" name="Foliennummernplatzhalter 3">
             <a:extLst>
               <a:ext uri="{FF2B5EF4-FFF2-40B4-BE49-F238E27FC236}">
-                <a16:creationId xmlns:a16="http://schemas.microsoft.com/office/drawing/2014/main" id="{7727894F-ECF0-2F7F-F1EF-4C561180ADD1}"/>
+                <a16:creationId xmlns:a16="http://schemas.microsoft.com/office/drawing/2014/main" id="{C9A813EC-88BD-575E-2667-FDC1D47FE316}"/>
               </a:ext>
             </a:extLst>
           </p:cNvPr>
@@ -4810,6 +5691,1192 @@
           </a:p>
         </p:txBody>
       </p:sp>
+      <p:pic>
+        <p:nvPicPr>
+          <p:cNvPr id="2050" name="Picture 2" descr="Prinzipieller Aufbau eines n-Kanal-MOSFETs im Querschnitt (Planartechnik)">
+            <a:extLst>
+              <a:ext uri="{FF2B5EF4-FFF2-40B4-BE49-F238E27FC236}">
+                <a16:creationId xmlns:a16="http://schemas.microsoft.com/office/drawing/2014/main" id="{6F9EE460-7BD2-5613-A70A-E416A5BC1A8D}"/>
+              </a:ext>
+            </a:extLst>
+          </p:cNvPr>
+          <p:cNvPicPr>
+            <a:picLocks noChangeAspect="1" noChangeArrowheads="1"/>
+          </p:cNvPicPr>
+          <p:nvPr/>
+        </p:nvPicPr>
+        <p:blipFill>
+          <a:blip r:embed="rId2">
+            <a:extLst>
+              <a:ext uri="{28A0092B-C50C-407E-A947-70E740481C1C}">
+                <a14:useLocalDpi xmlns:a14="http://schemas.microsoft.com/office/drawing/2010/main" val="0"/>
+              </a:ext>
+            </a:extLst>
+          </a:blip>
+          <a:srcRect/>
+          <a:stretch>
+            <a:fillRect/>
+          </a:stretch>
+        </p:blipFill>
+        <p:spPr bwMode="auto">
+          <a:xfrm>
+            <a:off x="7582160" y="2375284"/>
+            <a:ext cx="3771640" cy="3323967"/>
+          </a:xfrm>
+          <a:prstGeom prst="rect">
+            <a:avLst/>
+          </a:prstGeom>
+          <a:noFill/>
+          <a:extLst>
+            <a:ext uri="{909E8E84-426E-40DD-AFC4-6F175D3DCCD1}">
+              <a14:hiddenFill xmlns:a14="http://schemas.microsoft.com/office/drawing/2010/main">
+                <a:solidFill>
+                  <a:srgbClr val="FFFFFF"/>
+                </a:solidFill>
+              </a14:hiddenFill>
+            </a:ext>
+          </a:extLst>
+        </p:spPr>
+      </p:pic>
+    </p:spTree>
+    <p:extLst>
+      <p:ext uri="{BB962C8B-B14F-4D97-AF65-F5344CB8AC3E}">
+        <p14:creationId xmlns:p14="http://schemas.microsoft.com/office/powerpoint/2010/main" val="3057904092"/>
+      </p:ext>
+    </p:extLst>
+  </p:cSld>
+  <p:clrMapOvr>
+    <a:masterClrMapping/>
+  </p:clrMapOvr>
+</p:sld>
+</file>
+
+<file path=ppt/slides/slide14.xml><?xml version="1.0" encoding="utf-8"?>
+<p:sld xmlns:a="http://schemas.openxmlformats.org/drawingml/2006/main" xmlns:r="http://schemas.openxmlformats.org/officeDocument/2006/relationships" xmlns:p="http://schemas.openxmlformats.org/presentationml/2006/main">
+  <p:cSld>
+    <p:spTree>
+      <p:nvGrpSpPr>
+        <p:cNvPr id="1" name=""/>
+        <p:cNvGrpSpPr/>
+        <p:nvPr/>
+      </p:nvGrpSpPr>
+      <p:grpSpPr>
+        <a:xfrm>
+          <a:off x="0" y="0"/>
+          <a:ext cx="0" cy="0"/>
+          <a:chOff x="0" y="0"/>
+          <a:chExt cx="0" cy="0"/>
+        </a:xfrm>
+      </p:grpSpPr>
+      <p:sp>
+        <p:nvSpPr>
+          <p:cNvPr id="2" name="Titel 1">
+            <a:extLst>
+              <a:ext uri="{FF2B5EF4-FFF2-40B4-BE49-F238E27FC236}">
+                <a16:creationId xmlns:a16="http://schemas.microsoft.com/office/drawing/2014/main" id="{8386C014-A999-0992-19B5-7233A1A1E341}"/>
+              </a:ext>
+            </a:extLst>
+          </p:cNvPr>
+          <p:cNvSpPr>
+            <a:spLocks noGrp="1"/>
+          </p:cNvSpPr>
+          <p:nvPr>
+            <p:ph type="title"/>
+          </p:nvPr>
+        </p:nvSpPr>
+        <p:spPr/>
+        <p:txBody>
+          <a:bodyPr/>
+          <a:lstStyle/>
+          <a:p>
+            <a:r>
+              <a:rPr lang="de-DE" dirty="0"/>
+              <a:t>Energy Systems</a:t>
+            </a:r>
+          </a:p>
+        </p:txBody>
+      </p:sp>
+      <p:sp>
+        <p:nvSpPr>
+          <p:cNvPr id="3" name="Inhaltsplatzhalter 2">
+            <a:extLst>
+              <a:ext uri="{FF2B5EF4-FFF2-40B4-BE49-F238E27FC236}">
+                <a16:creationId xmlns:a16="http://schemas.microsoft.com/office/drawing/2014/main" id="{E9299970-2F98-E623-F08D-D9041FD7B2A8}"/>
+              </a:ext>
+            </a:extLst>
+          </p:cNvPr>
+          <p:cNvSpPr>
+            <a:spLocks noGrp="1"/>
+          </p:cNvSpPr>
+          <p:nvPr>
+            <p:ph idx="1"/>
+          </p:nvPr>
+        </p:nvSpPr>
+        <p:spPr>
+          <a:xfrm>
+            <a:off x="838200" y="1825625"/>
+            <a:ext cx="7490254" cy="4351338"/>
+          </a:xfrm>
+        </p:spPr>
+        <p:txBody>
+          <a:bodyPr/>
+          <a:lstStyle/>
+          <a:p>
+            <a:pPr marL="0" indent="0">
+              <a:buNone/>
+            </a:pPr>
+            <a:endParaRPr lang="de-DE" dirty="0"/>
+          </a:p>
+          <a:p>
+            <a:pPr marL="0" indent="0">
+              <a:buNone/>
+            </a:pPr>
+            <a:r>
+              <a:rPr lang="de-DE" dirty="0" err="1"/>
+              <a:t>generation</a:t>
+            </a:r>
+            <a:r>
+              <a:rPr lang="de-DE" dirty="0"/>
+              <a:t>, </a:t>
+            </a:r>
+            <a:r>
+              <a:rPr lang="de-DE" dirty="0" err="1"/>
+              <a:t>conversion</a:t>
+            </a:r>
+            <a:r>
+              <a:rPr lang="de-DE" dirty="0"/>
+              <a:t>, and </a:t>
+            </a:r>
+            <a:r>
+              <a:rPr lang="de-DE" dirty="0" err="1"/>
+              <a:t>distribution</a:t>
+            </a:r>
+            <a:r>
+              <a:rPr lang="de-DE" dirty="0"/>
+              <a:t> </a:t>
+            </a:r>
+            <a:r>
+              <a:rPr lang="de-DE" dirty="0" err="1"/>
+              <a:t>of</a:t>
+            </a:r>
+            <a:r>
+              <a:rPr lang="de-DE" dirty="0"/>
+              <a:t> </a:t>
+            </a:r>
+            <a:r>
+              <a:rPr lang="de-DE" dirty="0" err="1"/>
+              <a:t>electrical</a:t>
+            </a:r>
+            <a:r>
+              <a:rPr lang="de-DE" dirty="0"/>
+              <a:t> power</a:t>
+            </a:r>
+          </a:p>
+          <a:p>
+            <a:pPr marL="0" indent="0">
+              <a:buNone/>
+            </a:pPr>
+            <a:endParaRPr lang="de-DE" dirty="0"/>
+          </a:p>
+          <a:p>
+            <a:r>
+              <a:rPr lang="de-DE" dirty="0" err="1"/>
+              <a:t>transformers</a:t>
+            </a:r>
+            <a:r>
+              <a:rPr lang="de-DE" dirty="0"/>
+              <a:t> and power </a:t>
+            </a:r>
+            <a:r>
+              <a:rPr lang="de-DE" dirty="0" err="1"/>
+              <a:t>converters</a:t>
+            </a:r>
+            <a:endParaRPr lang="de-DE" dirty="0"/>
+          </a:p>
+          <a:p>
+            <a:pPr marL="0" indent="0">
+              <a:buNone/>
+            </a:pPr>
+            <a:endParaRPr lang="de-DE" dirty="0"/>
+          </a:p>
+          <a:p>
+            <a:r>
+              <a:rPr lang="de-DE" dirty="0"/>
+              <a:t>power </a:t>
+            </a:r>
+            <a:r>
+              <a:rPr lang="de-DE" dirty="0" err="1"/>
+              <a:t>electronics</a:t>
+            </a:r>
+            <a:endParaRPr lang="de-DE" dirty="0"/>
+          </a:p>
+        </p:txBody>
+      </p:sp>
+      <p:sp>
+        <p:nvSpPr>
+          <p:cNvPr id="4" name="Foliennummernplatzhalter 3">
+            <a:extLst>
+              <a:ext uri="{FF2B5EF4-FFF2-40B4-BE49-F238E27FC236}">
+                <a16:creationId xmlns:a16="http://schemas.microsoft.com/office/drawing/2014/main" id="{5B80B9A4-BF32-EF21-5482-EF7FCC8F730F}"/>
+              </a:ext>
+            </a:extLst>
+          </p:cNvPr>
+          <p:cNvSpPr>
+            <a:spLocks noGrp="1"/>
+          </p:cNvSpPr>
+          <p:nvPr>
+            <p:ph type="sldNum" sz="quarter" idx="12"/>
+          </p:nvPr>
+        </p:nvSpPr>
+        <p:spPr/>
+        <p:txBody>
+          <a:bodyPr/>
+          <a:lstStyle/>
+          <a:p>
+            <a:fld id="{487C53EB-36EE-1F44-B26B-550DFA5AE236}" type="slidenum">
+              <a:rPr lang="de-DE" smtClean="0"/>
+              <a:t>14</a:t>
+            </a:fld>
+            <a:endParaRPr lang="de-DE"/>
+          </a:p>
+        </p:txBody>
+      </p:sp>
+      <p:pic>
+        <p:nvPicPr>
+          <p:cNvPr id="4098" name="Picture 2">
+            <a:extLst>
+              <a:ext uri="{FF2B5EF4-FFF2-40B4-BE49-F238E27FC236}">
+                <a16:creationId xmlns:a16="http://schemas.microsoft.com/office/drawing/2014/main" id="{D3B4E319-1E7D-F835-9644-7BB75318BD95}"/>
+              </a:ext>
+            </a:extLst>
+          </p:cNvPr>
+          <p:cNvPicPr>
+            <a:picLocks noChangeAspect="1" noChangeArrowheads="1"/>
+          </p:cNvPicPr>
+          <p:nvPr/>
+        </p:nvPicPr>
+        <p:blipFill>
+          <a:blip r:embed="rId2">
+            <a:extLst>
+              <a:ext uri="{28A0092B-C50C-407E-A947-70E740481C1C}">
+                <a14:useLocalDpi xmlns:a14="http://schemas.microsoft.com/office/drawing/2010/main" val="0"/>
+              </a:ext>
+            </a:extLst>
+          </a:blip>
+          <a:srcRect/>
+          <a:stretch>
+            <a:fillRect/>
+          </a:stretch>
+        </p:blipFill>
+        <p:spPr bwMode="auto">
+          <a:xfrm>
+            <a:off x="8610600" y="2108994"/>
+            <a:ext cx="3175000" cy="3784600"/>
+          </a:xfrm>
+          <a:prstGeom prst="rect">
+            <a:avLst/>
+          </a:prstGeom>
+          <a:noFill/>
+          <a:extLst>
+            <a:ext uri="{909E8E84-426E-40DD-AFC4-6F175D3DCCD1}">
+              <a14:hiddenFill xmlns:a14="http://schemas.microsoft.com/office/drawing/2010/main">
+                <a:solidFill>
+                  <a:srgbClr val="FFFFFF"/>
+                </a:solidFill>
+              </a14:hiddenFill>
+            </a:ext>
+          </a:extLst>
+        </p:spPr>
+      </p:pic>
+    </p:spTree>
+    <p:extLst>
+      <p:ext uri="{BB962C8B-B14F-4D97-AF65-F5344CB8AC3E}">
+        <p14:creationId xmlns:p14="http://schemas.microsoft.com/office/powerpoint/2010/main" val="3149205054"/>
+      </p:ext>
+    </p:extLst>
+  </p:cSld>
+  <p:clrMapOvr>
+    <a:masterClrMapping/>
+  </p:clrMapOvr>
+</p:sld>
+</file>
+
+<file path=ppt/slides/slide15.xml><?xml version="1.0" encoding="utf-8"?>
+<p:sld xmlns:a="http://schemas.openxmlformats.org/drawingml/2006/main" xmlns:r="http://schemas.openxmlformats.org/officeDocument/2006/relationships" xmlns:p="http://schemas.openxmlformats.org/presentationml/2006/main">
+  <p:cSld>
+    <p:spTree>
+      <p:nvGrpSpPr>
+        <p:cNvPr id="1" name=""/>
+        <p:cNvGrpSpPr/>
+        <p:nvPr/>
+      </p:nvGrpSpPr>
+      <p:grpSpPr>
+        <a:xfrm>
+          <a:off x="0" y="0"/>
+          <a:ext cx="0" cy="0"/>
+          <a:chOff x="0" y="0"/>
+          <a:chExt cx="0" cy="0"/>
+        </a:xfrm>
+      </p:grpSpPr>
+      <p:sp>
+        <p:nvSpPr>
+          <p:cNvPr id="2" name="Titel 1">
+            <a:extLst>
+              <a:ext uri="{FF2B5EF4-FFF2-40B4-BE49-F238E27FC236}">
+                <a16:creationId xmlns:a16="http://schemas.microsoft.com/office/drawing/2014/main" id="{2F69BA13-B9D6-E7FF-B225-4E17A4B17CB7}"/>
+              </a:ext>
+            </a:extLst>
+          </p:cNvPr>
+          <p:cNvSpPr>
+            <a:spLocks noGrp="1"/>
+          </p:cNvSpPr>
+          <p:nvPr>
+            <p:ph type="title"/>
+          </p:nvPr>
+        </p:nvSpPr>
+        <p:spPr/>
+        <p:txBody>
+          <a:bodyPr/>
+          <a:lstStyle/>
+          <a:p>
+            <a:r>
+              <a:rPr lang="de-DE" dirty="0"/>
+              <a:t>Information Systems</a:t>
+            </a:r>
+          </a:p>
+        </p:txBody>
+      </p:sp>
+      <p:sp>
+        <p:nvSpPr>
+          <p:cNvPr id="3" name="Inhaltsplatzhalter 2">
+            <a:extLst>
+              <a:ext uri="{FF2B5EF4-FFF2-40B4-BE49-F238E27FC236}">
+                <a16:creationId xmlns:a16="http://schemas.microsoft.com/office/drawing/2014/main" id="{5435AB8D-9101-AF00-247C-3C2F0D5E1A4C}"/>
+              </a:ext>
+            </a:extLst>
+          </p:cNvPr>
+          <p:cNvSpPr>
+            <a:spLocks noGrp="1"/>
+          </p:cNvSpPr>
+          <p:nvPr>
+            <p:ph idx="1"/>
+          </p:nvPr>
+        </p:nvSpPr>
+        <p:spPr>
+          <a:xfrm>
+            <a:off x="838200" y="1825625"/>
+            <a:ext cx="7019260" cy="4351338"/>
+          </a:xfrm>
+        </p:spPr>
+        <p:txBody>
+          <a:bodyPr>
+            <a:normAutofit fontScale="85000" lnSpcReduction="20000"/>
+          </a:bodyPr>
+          <a:lstStyle/>
+          <a:p>
+            <a:pPr marL="0" indent="0">
+              <a:buNone/>
+            </a:pPr>
+            <a:r>
+              <a:rPr lang="de-DE" dirty="0" err="1"/>
+              <a:t>transmitting</a:t>
+            </a:r>
+            <a:r>
+              <a:rPr lang="de-DE" dirty="0"/>
+              <a:t> and </a:t>
+            </a:r>
+            <a:r>
+              <a:rPr lang="de-DE" dirty="0" err="1"/>
+              <a:t>processing</a:t>
+            </a:r>
+            <a:r>
+              <a:rPr lang="de-DE" dirty="0"/>
+              <a:t> </a:t>
+            </a:r>
+            <a:r>
+              <a:rPr lang="de-DE" dirty="0" err="1"/>
+              <a:t>information</a:t>
+            </a:r>
+            <a:endParaRPr lang="de-DE" dirty="0"/>
+          </a:p>
+          <a:p>
+            <a:pPr marL="0" indent="0">
+              <a:buNone/>
+            </a:pPr>
+            <a:endParaRPr lang="de-DE" dirty="0"/>
+          </a:p>
+          <a:p>
+            <a:pPr marL="0" indent="0">
+              <a:buNone/>
+            </a:pPr>
+            <a:r>
+              <a:rPr lang="de-DE" dirty="0" err="1"/>
+              <a:t>signal</a:t>
+            </a:r>
+            <a:r>
+              <a:rPr lang="de-DE" dirty="0"/>
+              <a:t> </a:t>
+            </a:r>
+            <a:r>
+              <a:rPr lang="de-DE" dirty="0" err="1"/>
+              <a:t>processing</a:t>
+            </a:r>
+            <a:endParaRPr lang="de-DE" dirty="0"/>
+          </a:p>
+          <a:p>
+            <a:r>
+              <a:rPr lang="de-DE" dirty="0"/>
+              <a:t>time-domain vs. </a:t>
+            </a:r>
+            <a:r>
+              <a:rPr lang="de-DE" dirty="0" err="1"/>
+              <a:t>frequency</a:t>
+            </a:r>
+            <a:r>
+              <a:rPr lang="de-DE" dirty="0"/>
+              <a:t>-domain </a:t>
+            </a:r>
+            <a:r>
+              <a:rPr lang="de-DE" dirty="0" err="1"/>
+              <a:t>analysis</a:t>
+            </a:r>
+            <a:endParaRPr lang="de-DE" dirty="0"/>
+          </a:p>
+          <a:p>
+            <a:r>
+              <a:rPr lang="de-DE" dirty="0"/>
+              <a:t>Fourier and Laplace </a:t>
+            </a:r>
+            <a:r>
+              <a:rPr lang="de-DE" dirty="0" err="1"/>
+              <a:t>transforms</a:t>
+            </a:r>
+            <a:endParaRPr lang="de-DE" dirty="0"/>
+          </a:p>
+          <a:p>
+            <a:pPr marL="0" indent="0">
+              <a:buNone/>
+            </a:pPr>
+            <a:endParaRPr lang="de-DE" dirty="0"/>
+          </a:p>
+          <a:p>
+            <a:pPr marL="0" indent="0">
+              <a:buNone/>
+            </a:pPr>
+            <a:r>
+              <a:rPr lang="de-DE" dirty="0" err="1"/>
+              <a:t>communication</a:t>
+            </a:r>
+            <a:r>
+              <a:rPr lang="de-DE" dirty="0"/>
+              <a:t> </a:t>
+            </a:r>
+            <a:r>
+              <a:rPr lang="de-DE" dirty="0" err="1"/>
+              <a:t>systems</a:t>
+            </a:r>
+            <a:endParaRPr lang="de-DE" dirty="0"/>
+          </a:p>
+          <a:p>
+            <a:r>
+              <a:rPr lang="de-DE" dirty="0" err="1"/>
+              <a:t>amplitude</a:t>
+            </a:r>
+            <a:r>
+              <a:rPr lang="de-DE" dirty="0"/>
+              <a:t>/</a:t>
+            </a:r>
+            <a:r>
+              <a:rPr lang="de-DE" dirty="0" err="1"/>
+              <a:t>frequency</a:t>
+            </a:r>
+            <a:r>
+              <a:rPr lang="de-DE" dirty="0"/>
+              <a:t> </a:t>
+            </a:r>
+            <a:r>
+              <a:rPr lang="de-DE" dirty="0" err="1"/>
+              <a:t>modulation</a:t>
+            </a:r>
+            <a:r>
+              <a:rPr lang="de-DE" dirty="0"/>
+              <a:t> (AM/FM)</a:t>
+            </a:r>
+          </a:p>
+          <a:p>
+            <a:r>
+              <a:rPr lang="de-DE" dirty="0"/>
+              <a:t>digital </a:t>
+            </a:r>
+            <a:r>
+              <a:rPr lang="de-DE" dirty="0" err="1"/>
+              <a:t>modulation</a:t>
+            </a:r>
+            <a:r>
+              <a:rPr lang="de-DE" dirty="0"/>
+              <a:t> (ASK, FSK, PSK)</a:t>
+            </a:r>
+          </a:p>
+          <a:p>
+            <a:r>
+              <a:rPr lang="de-DE" dirty="0" err="1"/>
+              <a:t>noise</a:t>
+            </a:r>
+            <a:r>
+              <a:rPr lang="de-DE" dirty="0"/>
+              <a:t>, </a:t>
+            </a:r>
+            <a:r>
+              <a:rPr lang="de-DE" dirty="0" err="1"/>
+              <a:t>bandwidth</a:t>
+            </a:r>
+            <a:r>
+              <a:rPr lang="de-DE" dirty="0"/>
+              <a:t>, and </a:t>
+            </a:r>
+            <a:r>
+              <a:rPr lang="de-DE" dirty="0" err="1"/>
+              <a:t>filtering</a:t>
+            </a:r>
+            <a:r>
+              <a:rPr lang="de-DE" dirty="0"/>
+              <a:t> </a:t>
+            </a:r>
+            <a:r>
+              <a:rPr lang="de-DE" dirty="0" err="1"/>
+              <a:t>concepts</a:t>
+            </a:r>
+            <a:endParaRPr lang="de-DE" dirty="0"/>
+          </a:p>
+          <a:p>
+            <a:r>
+              <a:rPr lang="de-DE" dirty="0" err="1"/>
+              <a:t>communication</a:t>
+            </a:r>
+            <a:r>
+              <a:rPr lang="de-DE" dirty="0"/>
+              <a:t> </a:t>
+            </a:r>
+            <a:r>
+              <a:rPr lang="de-DE" dirty="0" err="1"/>
+              <a:t>channels</a:t>
+            </a:r>
+            <a:r>
+              <a:rPr lang="de-DE" dirty="0"/>
+              <a:t> and </a:t>
+            </a:r>
+            <a:r>
+              <a:rPr lang="de-DE" dirty="0" err="1"/>
+              <a:t>data</a:t>
+            </a:r>
+            <a:r>
+              <a:rPr lang="de-DE" dirty="0"/>
+              <a:t> </a:t>
+            </a:r>
+            <a:r>
+              <a:rPr lang="de-DE" dirty="0" err="1"/>
+              <a:t>transmission</a:t>
+            </a:r>
+            <a:endParaRPr lang="de-DE" dirty="0"/>
+          </a:p>
+        </p:txBody>
+      </p:sp>
+      <p:sp>
+        <p:nvSpPr>
+          <p:cNvPr id="4" name="Foliennummernplatzhalter 3">
+            <a:extLst>
+              <a:ext uri="{FF2B5EF4-FFF2-40B4-BE49-F238E27FC236}">
+                <a16:creationId xmlns:a16="http://schemas.microsoft.com/office/drawing/2014/main" id="{81D00159-36CB-5D28-5E14-AAA7EC157448}"/>
+              </a:ext>
+            </a:extLst>
+          </p:cNvPr>
+          <p:cNvSpPr>
+            <a:spLocks noGrp="1"/>
+          </p:cNvSpPr>
+          <p:nvPr>
+            <p:ph type="sldNum" sz="quarter" idx="12"/>
+          </p:nvPr>
+        </p:nvSpPr>
+        <p:spPr/>
+        <p:txBody>
+          <a:bodyPr/>
+          <a:lstStyle/>
+          <a:p>
+            <a:fld id="{487C53EB-36EE-1F44-B26B-550DFA5AE236}" type="slidenum">
+              <a:rPr lang="de-DE" smtClean="0"/>
+              <a:t>15</a:t>
+            </a:fld>
+            <a:endParaRPr lang="de-DE"/>
+          </a:p>
+        </p:txBody>
+      </p:sp>
+      <p:pic>
+        <p:nvPicPr>
+          <p:cNvPr id="3074" name="Picture 2">
+            <a:extLst>
+              <a:ext uri="{FF2B5EF4-FFF2-40B4-BE49-F238E27FC236}">
+                <a16:creationId xmlns:a16="http://schemas.microsoft.com/office/drawing/2014/main" id="{27E39474-BF12-F855-43A6-282848030047}"/>
+              </a:ext>
+            </a:extLst>
+          </p:cNvPr>
+          <p:cNvPicPr>
+            <a:picLocks noChangeAspect="1" noChangeArrowheads="1"/>
+          </p:cNvPicPr>
+          <p:nvPr/>
+        </p:nvPicPr>
+        <p:blipFill>
+          <a:blip r:embed="rId2">
+            <a:extLst>
+              <a:ext uri="{28A0092B-C50C-407E-A947-70E740481C1C}">
+                <a14:useLocalDpi xmlns:a14="http://schemas.microsoft.com/office/drawing/2010/main" val="0"/>
+              </a:ext>
+            </a:extLst>
+          </a:blip>
+          <a:srcRect/>
+          <a:stretch>
+            <a:fillRect/>
+          </a:stretch>
+        </p:blipFill>
+        <p:spPr bwMode="auto">
+          <a:xfrm>
+            <a:off x="8394700" y="2674144"/>
+            <a:ext cx="3175000" cy="2654300"/>
+          </a:xfrm>
+          <a:prstGeom prst="rect">
+            <a:avLst/>
+          </a:prstGeom>
+          <a:noFill/>
+          <a:extLst>
+            <a:ext uri="{909E8E84-426E-40DD-AFC4-6F175D3DCCD1}">
+              <a14:hiddenFill xmlns:a14="http://schemas.microsoft.com/office/drawing/2010/main">
+                <a:solidFill>
+                  <a:srgbClr val="FFFFFF"/>
+                </a:solidFill>
+              </a14:hiddenFill>
+            </a:ext>
+          </a:extLst>
+        </p:spPr>
+      </p:pic>
+    </p:spTree>
+    <p:extLst>
+      <p:ext uri="{BB962C8B-B14F-4D97-AF65-F5344CB8AC3E}">
+        <p14:creationId xmlns:p14="http://schemas.microsoft.com/office/powerpoint/2010/main" val="1009869982"/>
+      </p:ext>
+    </p:extLst>
+  </p:cSld>
+  <p:clrMapOvr>
+    <a:masterClrMapping/>
+  </p:clrMapOvr>
+</p:sld>
+</file>
+
+<file path=ppt/slides/slide16.xml><?xml version="1.0" encoding="utf-8"?>
+<p:sld xmlns:a="http://schemas.openxmlformats.org/drawingml/2006/main" xmlns:r="http://schemas.openxmlformats.org/officeDocument/2006/relationships" xmlns:p="http://schemas.openxmlformats.org/presentationml/2006/main">
+  <p:cSld>
+    <p:spTree>
+      <p:nvGrpSpPr>
+        <p:cNvPr id="1" name=""/>
+        <p:cNvGrpSpPr/>
+        <p:nvPr/>
+      </p:nvGrpSpPr>
+      <p:grpSpPr>
+        <a:xfrm>
+          <a:off x="0" y="0"/>
+          <a:ext cx="0" cy="0"/>
+          <a:chOff x="0" y="0"/>
+          <a:chExt cx="0" cy="0"/>
+        </a:xfrm>
+      </p:grpSpPr>
+      <p:sp>
+        <p:nvSpPr>
+          <p:cNvPr id="2" name="Titel 1">
+            <a:extLst>
+              <a:ext uri="{FF2B5EF4-FFF2-40B4-BE49-F238E27FC236}">
+                <a16:creationId xmlns:a16="http://schemas.microsoft.com/office/drawing/2014/main" id="{5766A4C2-9266-7203-BB84-BAA0BBA2D064}"/>
+              </a:ext>
+            </a:extLst>
+          </p:cNvPr>
+          <p:cNvSpPr>
+            <a:spLocks noGrp="1"/>
+          </p:cNvSpPr>
+          <p:nvPr>
+            <p:ph type="title"/>
+          </p:nvPr>
+        </p:nvSpPr>
+        <p:spPr/>
+        <p:txBody>
+          <a:bodyPr/>
+          <a:lstStyle/>
+          <a:p>
+            <a:r>
+              <a:rPr lang="de-DE" dirty="0"/>
+              <a:t>Control Systems</a:t>
+            </a:r>
+          </a:p>
+        </p:txBody>
+      </p:sp>
+      <p:sp>
+        <p:nvSpPr>
+          <p:cNvPr id="3" name="Inhaltsplatzhalter 2">
+            <a:extLst>
+              <a:ext uri="{FF2B5EF4-FFF2-40B4-BE49-F238E27FC236}">
+                <a16:creationId xmlns:a16="http://schemas.microsoft.com/office/drawing/2014/main" id="{D2987060-39ED-4C85-1627-55E612B0A864}"/>
+              </a:ext>
+            </a:extLst>
+          </p:cNvPr>
+          <p:cNvSpPr>
+            <a:spLocks noGrp="1"/>
+          </p:cNvSpPr>
+          <p:nvPr>
+            <p:ph idx="1"/>
+          </p:nvPr>
+        </p:nvSpPr>
+        <p:spPr>
+          <a:xfrm>
+            <a:off x="838201" y="1825625"/>
+            <a:ext cx="7329616" cy="4351338"/>
+          </a:xfrm>
+        </p:spPr>
+        <p:txBody>
+          <a:bodyPr/>
+          <a:lstStyle/>
+          <a:p>
+            <a:pPr marL="0" indent="0">
+              <a:buNone/>
+            </a:pPr>
+            <a:endParaRPr lang="de-DE" dirty="0"/>
+          </a:p>
+          <a:p>
+            <a:r>
+              <a:rPr lang="de-DE" dirty="0" err="1"/>
+              <a:t>feedback</a:t>
+            </a:r>
+            <a:r>
+              <a:rPr lang="de-DE" dirty="0"/>
+              <a:t>, </a:t>
+            </a:r>
+            <a:r>
+              <a:rPr lang="de-DE" dirty="0" err="1"/>
+              <a:t>stability</a:t>
+            </a:r>
+            <a:r>
+              <a:rPr lang="de-DE" dirty="0"/>
+              <a:t>, and </a:t>
+            </a:r>
+            <a:r>
+              <a:rPr lang="de-DE" dirty="0" err="1"/>
+              <a:t>dynamic</a:t>
+            </a:r>
+            <a:r>
+              <a:rPr lang="de-DE" dirty="0"/>
+              <a:t> </a:t>
+            </a:r>
+            <a:r>
+              <a:rPr lang="de-DE" dirty="0" err="1"/>
+              <a:t>response</a:t>
+            </a:r>
+            <a:endParaRPr lang="de-DE" dirty="0"/>
+          </a:p>
+          <a:p>
+            <a:pPr marL="0" indent="0">
+              <a:buNone/>
+            </a:pPr>
+            <a:endParaRPr lang="de-DE" dirty="0"/>
+          </a:p>
+          <a:p>
+            <a:r>
+              <a:rPr lang="de-DE" dirty="0"/>
+              <a:t>root </a:t>
+            </a:r>
+            <a:r>
+              <a:rPr lang="de-DE" dirty="0" err="1"/>
+              <a:t>locus</a:t>
+            </a:r>
+            <a:r>
+              <a:rPr lang="de-DE" dirty="0"/>
+              <a:t>, Bode, and </a:t>
+            </a:r>
+            <a:r>
+              <a:rPr lang="de-DE" dirty="0" err="1"/>
+              <a:t>Nyquist</a:t>
+            </a:r>
+            <a:r>
+              <a:rPr lang="de-DE" dirty="0"/>
+              <a:t> </a:t>
+            </a:r>
+            <a:r>
+              <a:rPr lang="de-DE" dirty="0" err="1"/>
+              <a:t>techniques</a:t>
+            </a:r>
+            <a:endParaRPr lang="de-DE" dirty="0"/>
+          </a:p>
+          <a:p>
+            <a:pPr marL="0" indent="0">
+              <a:buNone/>
+            </a:pPr>
+            <a:endParaRPr lang="de-DE" dirty="0"/>
+          </a:p>
+          <a:p>
+            <a:r>
+              <a:rPr lang="de-DE" dirty="0"/>
+              <a:t>PID </a:t>
+            </a:r>
+            <a:r>
+              <a:rPr lang="de-DE" dirty="0" err="1"/>
+              <a:t>control</a:t>
+            </a:r>
+            <a:r>
+              <a:rPr lang="de-DE" dirty="0"/>
+              <a:t> and real-</a:t>
+            </a:r>
+            <a:r>
+              <a:rPr lang="de-DE" dirty="0" err="1"/>
+              <a:t>world</a:t>
+            </a:r>
+            <a:r>
+              <a:rPr lang="de-DE" dirty="0"/>
+              <a:t> </a:t>
+            </a:r>
+            <a:r>
+              <a:rPr lang="de-DE" dirty="0" err="1"/>
+              <a:t>applications</a:t>
+            </a:r>
+            <a:r>
+              <a:rPr lang="de-DE" dirty="0"/>
+              <a:t> (</a:t>
+            </a:r>
+            <a:r>
+              <a:rPr lang="de-DE" dirty="0" err="1"/>
+              <a:t>motors</a:t>
+            </a:r>
+            <a:r>
+              <a:rPr lang="de-DE" dirty="0"/>
+              <a:t>, </a:t>
+            </a:r>
+            <a:r>
+              <a:rPr lang="de-DE" dirty="0" err="1"/>
+              <a:t>robotics</a:t>
+            </a:r>
+            <a:r>
+              <a:rPr lang="de-DE" dirty="0"/>
+              <a:t>)</a:t>
+            </a:r>
+          </a:p>
+        </p:txBody>
+      </p:sp>
+      <p:sp>
+        <p:nvSpPr>
+          <p:cNvPr id="4" name="Foliennummernplatzhalter 3">
+            <a:extLst>
+              <a:ext uri="{FF2B5EF4-FFF2-40B4-BE49-F238E27FC236}">
+                <a16:creationId xmlns:a16="http://schemas.microsoft.com/office/drawing/2014/main" id="{BD96D762-A330-9A42-BD7C-EF29141C863C}"/>
+              </a:ext>
+            </a:extLst>
+          </p:cNvPr>
+          <p:cNvSpPr>
+            <a:spLocks noGrp="1"/>
+          </p:cNvSpPr>
+          <p:nvPr>
+            <p:ph type="sldNum" sz="quarter" idx="12"/>
+          </p:nvPr>
+        </p:nvSpPr>
+        <p:spPr/>
+        <p:txBody>
+          <a:bodyPr/>
+          <a:lstStyle/>
+          <a:p>
+            <a:fld id="{487C53EB-36EE-1F44-B26B-550DFA5AE236}" type="slidenum">
+              <a:rPr lang="de-DE" smtClean="0"/>
+              <a:t>16</a:t>
+            </a:fld>
+            <a:endParaRPr lang="de-DE"/>
+          </a:p>
+        </p:txBody>
+      </p:sp>
+      <p:pic>
+        <p:nvPicPr>
+          <p:cNvPr id="5124" name="Picture 4">
+            <a:extLst>
+              <a:ext uri="{FF2B5EF4-FFF2-40B4-BE49-F238E27FC236}">
+                <a16:creationId xmlns:a16="http://schemas.microsoft.com/office/drawing/2014/main" id="{F961C27B-5EA1-0289-C56C-E3292661BCEE}"/>
+              </a:ext>
+            </a:extLst>
+          </p:cNvPr>
+          <p:cNvPicPr>
+            <a:picLocks noChangeAspect="1" noChangeArrowheads="1"/>
+          </p:cNvPicPr>
+          <p:nvPr/>
+        </p:nvPicPr>
+        <p:blipFill>
+          <a:blip r:embed="rId2">
+            <a:extLst>
+              <a:ext uri="{28A0092B-C50C-407E-A947-70E740481C1C}">
+                <a14:useLocalDpi xmlns:a14="http://schemas.microsoft.com/office/drawing/2010/main" val="0"/>
+              </a:ext>
+            </a:extLst>
+          </a:blip>
+          <a:srcRect/>
+          <a:stretch>
+            <a:fillRect/>
+          </a:stretch>
+        </p:blipFill>
+        <p:spPr bwMode="auto">
+          <a:xfrm>
+            <a:off x="8775700" y="2185194"/>
+            <a:ext cx="2413000" cy="3632200"/>
+          </a:xfrm>
+          <a:prstGeom prst="rect">
+            <a:avLst/>
+          </a:prstGeom>
+          <a:noFill/>
+          <a:extLst>
+            <a:ext uri="{909E8E84-426E-40DD-AFC4-6F175D3DCCD1}">
+              <a14:hiddenFill xmlns:a14="http://schemas.microsoft.com/office/drawing/2010/main">
+                <a:solidFill>
+                  <a:srgbClr val="FFFFFF"/>
+                </a:solidFill>
+              </a14:hiddenFill>
+            </a:ext>
+          </a:extLst>
+        </p:spPr>
+      </p:pic>
+    </p:spTree>
+    <p:extLst>
+      <p:ext uri="{BB962C8B-B14F-4D97-AF65-F5344CB8AC3E}">
+        <p14:creationId xmlns:p14="http://schemas.microsoft.com/office/powerpoint/2010/main" val="3140469727"/>
+      </p:ext>
+    </p:extLst>
+  </p:cSld>
+  <p:clrMapOvr>
+    <a:masterClrMapping/>
+  </p:clrMapOvr>
+</p:sld>
+</file>
+
+<file path=ppt/slides/slide17.xml><?xml version="1.0" encoding="utf-8"?>
+<p:sld xmlns:a="http://schemas.openxmlformats.org/drawingml/2006/main" xmlns:r="http://schemas.openxmlformats.org/officeDocument/2006/relationships" xmlns:p="http://schemas.openxmlformats.org/presentationml/2006/main">
+  <p:cSld>
+    <p:spTree>
+      <p:nvGrpSpPr>
+        <p:cNvPr id="1" name=""/>
+        <p:cNvGrpSpPr/>
+        <p:nvPr/>
+      </p:nvGrpSpPr>
+      <p:grpSpPr>
+        <a:xfrm>
+          <a:off x="0" y="0"/>
+          <a:ext cx="0" cy="0"/>
+          <a:chOff x="0" y="0"/>
+          <a:chExt cx="0" cy="0"/>
+        </a:xfrm>
+      </p:grpSpPr>
+      <p:sp>
+        <p:nvSpPr>
+          <p:cNvPr id="2" name="Titel 1">
+            <a:extLst>
+              <a:ext uri="{FF2B5EF4-FFF2-40B4-BE49-F238E27FC236}">
+                <a16:creationId xmlns:a16="http://schemas.microsoft.com/office/drawing/2014/main" id="{0CC534FC-41EE-3B24-00E4-8C41F9D5F1EB}"/>
+              </a:ext>
+            </a:extLst>
+          </p:cNvPr>
+          <p:cNvSpPr>
+            <a:spLocks noGrp="1"/>
+          </p:cNvSpPr>
+          <p:nvPr>
+            <p:ph type="title"/>
+          </p:nvPr>
+        </p:nvSpPr>
+        <p:spPr/>
+        <p:txBody>
+          <a:bodyPr/>
+          <a:lstStyle/>
+          <a:p>
+            <a:r>
+              <a:rPr lang="de-DE" dirty="0"/>
+              <a:t>Embedded Systems</a:t>
+            </a:r>
+          </a:p>
+        </p:txBody>
+      </p:sp>
+      <p:sp>
+        <p:nvSpPr>
+          <p:cNvPr id="3" name="Inhaltsplatzhalter 2">
+            <a:extLst>
+              <a:ext uri="{FF2B5EF4-FFF2-40B4-BE49-F238E27FC236}">
+                <a16:creationId xmlns:a16="http://schemas.microsoft.com/office/drawing/2014/main" id="{628D2C43-4882-46AA-3BF3-E056EC9B431F}"/>
+              </a:ext>
+            </a:extLst>
+          </p:cNvPr>
+          <p:cNvSpPr>
+            <a:spLocks noGrp="1"/>
+          </p:cNvSpPr>
+          <p:nvPr>
+            <p:ph idx="1"/>
+          </p:nvPr>
+        </p:nvSpPr>
+        <p:spPr>
+          <a:xfrm>
+            <a:off x="838200" y="1825625"/>
+            <a:ext cx="4860852" cy="4351338"/>
+          </a:xfrm>
+        </p:spPr>
+        <p:txBody>
+          <a:bodyPr/>
+          <a:lstStyle/>
+          <a:p>
+            <a:pPr marL="0" indent="0">
+              <a:buNone/>
+            </a:pPr>
+            <a:endParaRPr lang="de-DE" dirty="0"/>
+          </a:p>
+          <a:p>
+            <a:pPr marL="0" indent="0">
+              <a:buNone/>
+            </a:pPr>
+            <a:r>
+              <a:rPr lang="de-DE" dirty="0" err="1"/>
+              <a:t>hardware</a:t>
+            </a:r>
+            <a:r>
+              <a:rPr lang="de-DE" dirty="0"/>
+              <a:t>–</a:t>
+            </a:r>
+            <a:r>
+              <a:rPr lang="de-DE" dirty="0" err="1"/>
+              <a:t>software</a:t>
+            </a:r>
+            <a:r>
+              <a:rPr lang="de-DE" dirty="0"/>
+              <a:t> </a:t>
+            </a:r>
+            <a:r>
+              <a:rPr lang="de-DE" dirty="0" err="1"/>
+              <a:t>integration</a:t>
+            </a:r>
+            <a:endParaRPr lang="de-DE" dirty="0"/>
+          </a:p>
+          <a:p>
+            <a:pPr marL="0" indent="0">
+              <a:buNone/>
+            </a:pPr>
+            <a:endParaRPr lang="de-DE" dirty="0"/>
+          </a:p>
+          <a:p>
+            <a:r>
+              <a:rPr lang="de-DE" dirty="0" err="1"/>
+              <a:t>microcontrollers</a:t>
+            </a:r>
+            <a:r>
+              <a:rPr lang="de-DE" dirty="0"/>
+              <a:t> and digital </a:t>
+            </a:r>
+            <a:r>
+              <a:rPr lang="de-DE" dirty="0" err="1"/>
+              <a:t>systems</a:t>
+            </a:r>
+            <a:endParaRPr lang="de-DE" dirty="0"/>
+          </a:p>
+          <a:p>
+            <a:r>
+              <a:rPr lang="de-DE" dirty="0" err="1"/>
+              <a:t>sensors</a:t>
+            </a:r>
+            <a:r>
+              <a:rPr lang="de-DE" dirty="0"/>
+              <a:t>, </a:t>
+            </a:r>
+            <a:r>
+              <a:rPr lang="de-DE" dirty="0" err="1"/>
+              <a:t>actuators</a:t>
+            </a:r>
+            <a:r>
+              <a:rPr lang="de-DE" dirty="0"/>
+              <a:t>, and real-time </a:t>
+            </a:r>
+            <a:r>
+              <a:rPr lang="de-DE" dirty="0" err="1"/>
+              <a:t>control</a:t>
+            </a:r>
+            <a:endParaRPr lang="de-DE" dirty="0"/>
+          </a:p>
+        </p:txBody>
+      </p:sp>
+      <p:sp>
+        <p:nvSpPr>
+          <p:cNvPr id="4" name="Foliennummernplatzhalter 3">
+            <a:extLst>
+              <a:ext uri="{FF2B5EF4-FFF2-40B4-BE49-F238E27FC236}">
+                <a16:creationId xmlns:a16="http://schemas.microsoft.com/office/drawing/2014/main" id="{7727894F-ECF0-2F7F-F1EF-4C561180ADD1}"/>
+              </a:ext>
+            </a:extLst>
+          </p:cNvPr>
+          <p:cNvSpPr>
+            <a:spLocks noGrp="1"/>
+          </p:cNvSpPr>
+          <p:nvPr>
+            <p:ph type="sldNum" sz="quarter" idx="12"/>
+          </p:nvPr>
+        </p:nvSpPr>
+        <p:spPr/>
+        <p:txBody>
+          <a:bodyPr/>
+          <a:lstStyle/>
+          <a:p>
+            <a:fld id="{487C53EB-36EE-1F44-B26B-550DFA5AE236}" type="slidenum">
+              <a:rPr lang="de-DE" smtClean="0"/>
+              <a:t>17</a:t>
+            </a:fld>
+            <a:endParaRPr lang="de-DE"/>
+          </a:p>
+        </p:txBody>
+      </p:sp>
+      <p:pic>
+        <p:nvPicPr>
+          <p:cNvPr id="1026" name="Picture 2" descr="undefined">
+            <a:extLst>
+              <a:ext uri="{FF2B5EF4-FFF2-40B4-BE49-F238E27FC236}">
+                <a16:creationId xmlns:a16="http://schemas.microsoft.com/office/drawing/2014/main" id="{FA803D64-FAE6-D0C5-3957-62AAE5941C24}"/>
+              </a:ext>
+            </a:extLst>
+          </p:cNvPr>
+          <p:cNvPicPr>
+            <a:picLocks noChangeAspect="1" noChangeArrowheads="1"/>
+          </p:cNvPicPr>
+          <p:nvPr/>
+        </p:nvPicPr>
+        <p:blipFill>
+          <a:blip r:embed="rId2">
+            <a:extLst>
+              <a:ext uri="{28A0092B-C50C-407E-A947-70E740481C1C}">
+                <a14:useLocalDpi xmlns:a14="http://schemas.microsoft.com/office/drawing/2010/main" val="0"/>
+              </a:ext>
+            </a:extLst>
+          </a:blip>
+          <a:srcRect/>
+          <a:stretch>
+            <a:fillRect/>
+          </a:stretch>
+        </p:blipFill>
+        <p:spPr bwMode="auto">
+          <a:xfrm>
+            <a:off x="5699052" y="2248731"/>
+            <a:ext cx="6288103" cy="3505126"/>
+          </a:xfrm>
+          <a:prstGeom prst="rect">
+            <a:avLst/>
+          </a:prstGeom>
+          <a:noFill/>
+          <a:extLst>
+            <a:ext uri="{909E8E84-426E-40DD-AFC4-6F175D3DCCD1}">
+              <a14:hiddenFill xmlns:a14="http://schemas.microsoft.com/office/drawing/2010/main">
+                <a:solidFill>
+                  <a:srgbClr val="FFFFFF"/>
+                </a:solidFill>
+              </a14:hiddenFill>
+            </a:ext>
+          </a:extLst>
+        </p:spPr>
+      </p:pic>
     </p:spTree>
     <p:extLst>
       <p:ext uri="{BB962C8B-B14F-4D97-AF65-F5344CB8AC3E}">
@@ -5291,471 +7358,676 @@
           </a:p>
         </p:txBody>
       </p:sp>
-      <p:sp>
-        <p:nvSpPr>
-          <p:cNvPr id="3" name="Inhaltsplatzhalter 2">
-            <a:extLst>
-              <a:ext uri="{FF2B5EF4-FFF2-40B4-BE49-F238E27FC236}">
-                <a16:creationId xmlns:a16="http://schemas.microsoft.com/office/drawing/2014/main" id="{1B77FFBF-FA08-B624-1218-B627F3FF0AEB}"/>
-              </a:ext>
-            </a:extLst>
-          </p:cNvPr>
-          <p:cNvSpPr>
-            <a:spLocks noGrp="1"/>
-          </p:cNvSpPr>
-          <p:nvPr>
-            <p:ph idx="1"/>
-          </p:nvPr>
-        </p:nvSpPr>
-        <p:spPr/>
-        <p:txBody>
-          <a:bodyPr>
-            <a:normAutofit/>
-          </a:bodyPr>
-          <a:lstStyle/>
-          <a:p>
-            <a:pPr marL="0" indent="0">
-              <a:buNone/>
-            </a:pPr>
-            <a:r>
-              <a:rPr lang="de-DE" dirty="0" err="1"/>
-              <a:t>protect</a:t>
-            </a:r>
-            <a:r>
-              <a:rPr lang="de-DE" dirty="0"/>
-              <a:t> </a:t>
-            </a:r>
-            <a:r>
-              <a:rPr lang="de-DE" dirty="0" err="1"/>
-              <a:t>circuits</a:t>
-            </a:r>
-            <a:r>
-              <a:rPr lang="de-DE" dirty="0"/>
-              <a:t> </a:t>
-            </a:r>
-            <a:r>
-              <a:rPr lang="de-DE" dirty="0" err="1"/>
-              <a:t>from</a:t>
-            </a:r>
-            <a:r>
-              <a:rPr lang="de-DE" dirty="0"/>
-              <a:t> </a:t>
-            </a:r>
-            <a:r>
-              <a:rPr lang="de-DE" b="1" dirty="0" err="1"/>
-              <a:t>excess</a:t>
-            </a:r>
-            <a:r>
-              <a:rPr lang="de-DE" b="1" dirty="0"/>
-              <a:t> </a:t>
-            </a:r>
-            <a:r>
-              <a:rPr lang="de-DE" b="1" dirty="0" err="1"/>
-              <a:t>current</a:t>
-            </a:r>
-            <a:r>
-              <a:rPr lang="de-DE" dirty="0"/>
-              <a:t>, </a:t>
-            </a:r>
-            <a:r>
-              <a:rPr lang="de-DE" dirty="0" err="1"/>
-              <a:t>which</a:t>
-            </a:r>
-            <a:r>
-              <a:rPr lang="de-DE" dirty="0"/>
-              <a:t> </a:t>
-            </a:r>
-            <a:r>
-              <a:rPr lang="de-DE" dirty="0" err="1"/>
-              <a:t>is</a:t>
-            </a:r>
-            <a:r>
-              <a:rPr lang="de-DE" dirty="0"/>
-              <a:t> </a:t>
-            </a:r>
-            <a:r>
-              <a:rPr lang="de-DE" dirty="0" err="1"/>
-              <a:t>usually</a:t>
-            </a:r>
-            <a:r>
-              <a:rPr lang="de-DE" dirty="0"/>
-              <a:t> </a:t>
-            </a:r>
-            <a:r>
-              <a:rPr lang="de-DE" dirty="0" err="1"/>
-              <a:t>caused</a:t>
-            </a:r>
-            <a:r>
-              <a:rPr lang="de-DE" dirty="0"/>
-              <a:t> </a:t>
-            </a:r>
-            <a:r>
-              <a:rPr lang="de-DE" dirty="0" err="1"/>
-              <a:t>by</a:t>
-            </a:r>
-            <a:r>
-              <a:rPr lang="de-DE" dirty="0"/>
-              <a:t>:</a:t>
-            </a:r>
-          </a:p>
-          <a:p>
-            <a:r>
-              <a:rPr lang="de-DE" dirty="0" err="1"/>
-              <a:t>overload</a:t>
-            </a:r>
-            <a:r>
-              <a:rPr lang="de-DE" dirty="0"/>
-              <a:t> (</a:t>
-            </a:r>
-            <a:r>
-              <a:rPr lang="de-DE" dirty="0" err="1"/>
-              <a:t>more</a:t>
-            </a:r>
-            <a:r>
-              <a:rPr lang="de-DE" dirty="0"/>
-              <a:t> </a:t>
-            </a:r>
-            <a:r>
-              <a:rPr lang="de-DE" dirty="0" err="1"/>
-              <a:t>devices</a:t>
-            </a:r>
-            <a:r>
-              <a:rPr lang="de-DE" dirty="0"/>
-              <a:t> </a:t>
-            </a:r>
-            <a:r>
-              <a:rPr lang="de-DE" dirty="0" err="1"/>
-              <a:t>than</a:t>
-            </a:r>
-            <a:r>
-              <a:rPr lang="de-DE" dirty="0"/>
-              <a:t> </a:t>
-            </a:r>
-            <a:r>
-              <a:rPr lang="de-DE" dirty="0" err="1"/>
-              <a:t>the</a:t>
-            </a:r>
-            <a:r>
-              <a:rPr lang="de-DE" dirty="0"/>
-              <a:t> </a:t>
-            </a:r>
-            <a:r>
-              <a:rPr lang="de-DE" dirty="0" err="1"/>
-              <a:t>circuit</a:t>
-            </a:r>
-            <a:r>
-              <a:rPr lang="de-DE" dirty="0"/>
-              <a:t> </a:t>
-            </a:r>
-            <a:r>
-              <a:rPr lang="de-DE" dirty="0" err="1"/>
-              <a:t>can</a:t>
-            </a:r>
-            <a:r>
-              <a:rPr lang="de-DE" dirty="0"/>
-              <a:t> handle)</a:t>
-            </a:r>
-          </a:p>
-          <a:p>
-            <a:r>
-              <a:rPr lang="de-DE" dirty="0" err="1"/>
-              <a:t>short</a:t>
-            </a:r>
-            <a:r>
-              <a:rPr lang="de-DE" dirty="0"/>
-              <a:t> </a:t>
-            </a:r>
-            <a:r>
-              <a:rPr lang="de-DE" dirty="0" err="1"/>
-              <a:t>circuit</a:t>
-            </a:r>
-            <a:r>
-              <a:rPr lang="de-DE" dirty="0"/>
-              <a:t> (</a:t>
-            </a:r>
-            <a:r>
-              <a:rPr lang="de-DE" dirty="0" err="1"/>
-              <a:t>very</a:t>
-            </a:r>
-            <a:r>
-              <a:rPr lang="de-DE" dirty="0"/>
-              <a:t> </a:t>
-            </a:r>
-            <a:r>
-              <a:rPr lang="de-DE" dirty="0" err="1"/>
-              <a:t>low</a:t>
-            </a:r>
-            <a:r>
-              <a:rPr lang="de-DE" dirty="0"/>
-              <a:t> </a:t>
-            </a:r>
-            <a:r>
-              <a:rPr lang="de-DE" dirty="0" err="1"/>
-              <a:t>resistance</a:t>
-            </a:r>
-            <a:r>
-              <a:rPr lang="de-DE" dirty="0"/>
-              <a:t> </a:t>
-            </a:r>
-            <a:r>
-              <a:rPr lang="de-DE" dirty="0" err="1"/>
-              <a:t>path</a:t>
-            </a:r>
-            <a:r>
-              <a:rPr lang="de-DE" dirty="0"/>
-              <a:t>)</a:t>
-            </a:r>
-          </a:p>
-          <a:p>
-            <a:pPr marL="0" indent="0">
-              <a:buNone/>
-            </a:pPr>
-            <a:endParaRPr lang="de-DE" dirty="0"/>
-          </a:p>
-          <a:p>
-            <a:pPr marL="0" indent="0">
-              <a:buNone/>
-            </a:pPr>
-            <a:r>
-              <a:rPr lang="de-DE" dirty="0" err="1"/>
-              <a:t>typically</a:t>
-            </a:r>
-            <a:r>
-              <a:rPr lang="de-DE" dirty="0"/>
-              <a:t> 16 A </a:t>
-            </a:r>
-            <a:r>
-              <a:rPr lang="de-DE" dirty="0" err="1"/>
-              <a:t>for</a:t>
-            </a:r>
-            <a:r>
-              <a:rPr lang="de-DE" dirty="0"/>
-              <a:t> power </a:t>
-            </a:r>
-            <a:r>
-              <a:rPr lang="de-DE" dirty="0" err="1"/>
-              <a:t>outlets</a:t>
-            </a:r>
-            <a:r>
-              <a:rPr lang="de-DE" dirty="0"/>
-              <a:t>:</a:t>
-            </a:r>
-          </a:p>
-          <a:p>
-            <a:r>
-              <a:rPr lang="de-DE" sz="2200" dirty="0"/>
-              <a:t>maximum </a:t>
-            </a:r>
-            <a:r>
-              <a:rPr lang="de-DE" sz="2200" dirty="0" err="1"/>
-              <a:t>continuous</a:t>
-            </a:r>
-            <a:r>
-              <a:rPr lang="de-DE" sz="2200" dirty="0"/>
-              <a:t> power (</a:t>
-            </a:r>
-            <a:r>
-              <a:rPr lang="de-DE" sz="2200" dirty="0" err="1"/>
-              <a:t>assuming</a:t>
-            </a:r>
-            <a:r>
-              <a:rPr lang="de-DE" sz="2200" dirty="0"/>
-              <a:t> 230 V): P = V I = 230 V 16 A = 3680 W</a:t>
-            </a:r>
-          </a:p>
-          <a:p>
-            <a:r>
-              <a:rPr lang="de-DE" sz="2200" dirty="0" err="1"/>
-              <a:t>this</a:t>
-            </a:r>
-            <a:r>
-              <a:rPr lang="de-DE" sz="2200" dirty="0"/>
-              <a:t> </a:t>
-            </a:r>
-            <a:r>
-              <a:rPr lang="de-DE" sz="2200" dirty="0" err="1"/>
-              <a:t>is</a:t>
-            </a:r>
-            <a:r>
-              <a:rPr lang="de-DE" sz="2200" dirty="0"/>
-              <a:t> </a:t>
-            </a:r>
-            <a:r>
-              <a:rPr lang="de-DE" sz="2200" dirty="0" err="1"/>
-              <a:t>enough</a:t>
-            </a:r>
-            <a:r>
-              <a:rPr lang="de-DE" sz="2200" dirty="0"/>
-              <a:t> </a:t>
-            </a:r>
-            <a:r>
-              <a:rPr lang="de-DE" sz="2200" dirty="0" err="1"/>
-              <a:t>to</a:t>
-            </a:r>
-            <a:r>
-              <a:rPr lang="de-DE" sz="2200" dirty="0"/>
-              <a:t> power </a:t>
-            </a:r>
-            <a:r>
-              <a:rPr lang="de-DE" sz="2200" dirty="0" err="1"/>
-              <a:t>several</a:t>
-            </a:r>
-            <a:r>
-              <a:rPr lang="de-DE" sz="2200" dirty="0"/>
-              <a:t> </a:t>
-            </a:r>
-            <a:r>
-              <a:rPr lang="de-DE" sz="2200" dirty="0" err="1"/>
-              <a:t>devices</a:t>
-            </a:r>
-            <a:r>
-              <a:rPr lang="de-DE" sz="2200" dirty="0"/>
-              <a:t> at </a:t>
-            </a:r>
-            <a:r>
-              <a:rPr lang="de-DE" sz="2200" dirty="0" err="1"/>
-              <a:t>once</a:t>
-            </a:r>
-            <a:r>
-              <a:rPr lang="de-DE" sz="2200" dirty="0"/>
-              <a:t>, like: 1–2 </a:t>
-            </a:r>
-            <a:r>
-              <a:rPr lang="de-DE" sz="2200" dirty="0" err="1"/>
-              <a:t>kettles</a:t>
-            </a:r>
-            <a:r>
-              <a:rPr lang="de-DE" sz="2200" dirty="0"/>
-              <a:t>, 1 </a:t>
-            </a:r>
-            <a:r>
-              <a:rPr lang="de-DE" sz="2200" dirty="0" err="1"/>
-              <a:t>microwave</a:t>
-            </a:r>
-            <a:r>
-              <a:rPr lang="de-DE" sz="2200" dirty="0"/>
-              <a:t>, </a:t>
-            </a:r>
-            <a:r>
-              <a:rPr lang="de-DE" sz="2200" dirty="0" err="1"/>
-              <a:t>some</a:t>
-            </a:r>
-            <a:r>
-              <a:rPr lang="de-DE" sz="2200" dirty="0"/>
-              <a:t> </a:t>
-            </a:r>
-            <a:r>
-              <a:rPr lang="de-DE" sz="2200" dirty="0" err="1"/>
-              <a:t>small</a:t>
-            </a:r>
-            <a:r>
-              <a:rPr lang="de-DE" sz="2200" dirty="0"/>
-              <a:t> </a:t>
-            </a:r>
-            <a:r>
-              <a:rPr lang="de-DE" sz="2200" dirty="0" err="1"/>
-              <a:t>appliances</a:t>
-            </a:r>
-            <a:r>
-              <a:rPr lang="de-DE" sz="2200" dirty="0"/>
-              <a:t> </a:t>
-            </a:r>
-            <a:r>
-              <a:rPr lang="de-DE" sz="2200" dirty="0" err="1"/>
-              <a:t>together</a:t>
-            </a:r>
-            <a:endParaRPr lang="de-DE" sz="2200" dirty="0"/>
-          </a:p>
-          <a:p>
-            <a:r>
-              <a:rPr lang="de-DE" sz="2200" dirty="0" err="1"/>
-              <a:t>Beyond</a:t>
-            </a:r>
-            <a:r>
-              <a:rPr lang="de-DE" sz="2200" dirty="0"/>
-              <a:t> 16 A, </a:t>
-            </a:r>
-            <a:r>
-              <a:rPr lang="de-DE" sz="2200" dirty="0" err="1"/>
-              <a:t>the</a:t>
-            </a:r>
-            <a:r>
-              <a:rPr lang="de-DE" sz="2200" dirty="0"/>
-              <a:t> </a:t>
-            </a:r>
-            <a:r>
-              <a:rPr lang="de-DE" sz="2200" dirty="0" err="1"/>
-              <a:t>circuit</a:t>
-            </a:r>
-            <a:r>
-              <a:rPr lang="de-DE" sz="2200" dirty="0"/>
-              <a:t> </a:t>
-            </a:r>
-            <a:r>
-              <a:rPr lang="de-DE" sz="2200" dirty="0" err="1"/>
-              <a:t>breaker</a:t>
-            </a:r>
-            <a:r>
-              <a:rPr lang="de-DE" sz="2200" dirty="0"/>
-              <a:t> </a:t>
-            </a:r>
-            <a:r>
-              <a:rPr lang="de-DE" sz="2200" dirty="0" err="1"/>
-              <a:t>trips</a:t>
-            </a:r>
-            <a:r>
-              <a:rPr lang="de-DE" sz="2200" dirty="0"/>
-              <a:t> </a:t>
-            </a:r>
-            <a:r>
-              <a:rPr lang="de-DE" sz="2200" dirty="0" err="1"/>
-              <a:t>to</a:t>
-            </a:r>
-            <a:r>
-              <a:rPr lang="de-DE" sz="2200" dirty="0"/>
-              <a:t> </a:t>
-            </a:r>
-            <a:r>
-              <a:rPr lang="de-DE" sz="2200" dirty="0" err="1"/>
-              <a:t>prevent</a:t>
-            </a:r>
-            <a:r>
-              <a:rPr lang="de-DE" sz="2200" dirty="0"/>
-              <a:t> </a:t>
-            </a:r>
-            <a:r>
-              <a:rPr lang="de-DE" sz="2200" dirty="0" err="1"/>
-              <a:t>overheating</a:t>
-            </a:r>
-            <a:r>
-              <a:rPr lang="de-DE" sz="2200" dirty="0"/>
-              <a:t> and </a:t>
-            </a:r>
-            <a:r>
-              <a:rPr lang="de-DE" sz="2200" dirty="0" err="1"/>
-              <a:t>fire</a:t>
-            </a:r>
-            <a:r>
-              <a:rPr lang="de-DE" sz="2200" dirty="0"/>
-              <a:t> </a:t>
-            </a:r>
-            <a:r>
-              <a:rPr lang="de-DE" sz="2200" dirty="0" err="1"/>
-              <a:t>risk</a:t>
-            </a:r>
-            <a:r>
-              <a:rPr lang="de-DE" sz="2200" dirty="0"/>
-              <a:t>.</a:t>
-            </a:r>
-          </a:p>
-          <a:p>
-            <a:pPr marL="0" indent="0">
-              <a:buNone/>
-            </a:pPr>
-            <a:endParaRPr lang="de-DE" dirty="0"/>
-          </a:p>
-        </p:txBody>
-      </p:sp>
+      <mc:AlternateContent xmlns:mc="http://schemas.openxmlformats.org/markup-compatibility/2006">
+        <mc:Choice xmlns:a14="http://schemas.microsoft.com/office/drawing/2010/main" Requires="a14">
+          <p:sp>
+            <p:nvSpPr>
+              <p:cNvPr id="3" name="Inhaltsplatzhalter 2">
+                <a:extLst>
+                  <a:ext uri="{FF2B5EF4-FFF2-40B4-BE49-F238E27FC236}">
+                    <a16:creationId xmlns:a16="http://schemas.microsoft.com/office/drawing/2014/main" id="{1B77FFBF-FA08-B624-1218-B627F3FF0AEB}"/>
+                  </a:ext>
+                </a:extLst>
+              </p:cNvPr>
+              <p:cNvSpPr>
+                <a:spLocks noGrp="1"/>
+              </p:cNvSpPr>
+              <p:nvPr>
+                <p:ph idx="1"/>
+              </p:nvPr>
+            </p:nvSpPr>
+            <p:spPr/>
+            <p:txBody>
+              <a:bodyPr>
+                <a:normAutofit/>
+              </a:bodyPr>
+              <a:lstStyle/>
+              <a:p>
+                <a:pPr marL="0" indent="0">
+                  <a:buNone/>
+                </a:pPr>
+                <a:r>
+                  <a:rPr lang="de-DE" dirty="0"/>
+                  <a:t>protect </a:t>
+                </a:r>
+                <a:r>
+                  <a:rPr lang="de-DE" dirty="0" err="1"/>
+                  <a:t>circuits</a:t>
+                </a:r>
+                <a:r>
+                  <a:rPr lang="de-DE" dirty="0"/>
+                  <a:t> </a:t>
+                </a:r>
+                <a:r>
+                  <a:rPr lang="de-DE" dirty="0" err="1"/>
+                  <a:t>from</a:t>
+                </a:r>
+                <a:r>
+                  <a:rPr lang="de-DE" dirty="0"/>
+                  <a:t> </a:t>
+                </a:r>
+                <a:r>
+                  <a:rPr lang="de-DE" dirty="0" err="1"/>
+                  <a:t>excess</a:t>
+                </a:r>
+                <a:r>
+                  <a:rPr lang="de-DE" dirty="0"/>
+                  <a:t> </a:t>
+                </a:r>
+                <a:r>
+                  <a:rPr lang="de-DE" dirty="0" err="1"/>
+                  <a:t>current</a:t>
+                </a:r>
+                <a:r>
+                  <a:rPr lang="de-DE" dirty="0"/>
+                  <a:t>, </a:t>
+                </a:r>
+                <a:r>
+                  <a:rPr lang="de-DE" dirty="0" err="1"/>
+                  <a:t>which</a:t>
+                </a:r>
+                <a:r>
+                  <a:rPr lang="de-DE" dirty="0"/>
+                  <a:t> </a:t>
+                </a:r>
+                <a:r>
+                  <a:rPr lang="de-DE" dirty="0" err="1"/>
+                  <a:t>is</a:t>
+                </a:r>
+                <a:r>
+                  <a:rPr lang="de-DE" dirty="0"/>
+                  <a:t> </a:t>
+                </a:r>
+                <a:r>
+                  <a:rPr lang="de-DE" dirty="0" err="1"/>
+                  <a:t>usually</a:t>
+                </a:r>
+                <a:r>
+                  <a:rPr lang="de-DE" dirty="0"/>
+                  <a:t> </a:t>
+                </a:r>
+                <a:r>
+                  <a:rPr lang="de-DE" dirty="0" err="1"/>
+                  <a:t>caused</a:t>
+                </a:r>
+                <a:r>
+                  <a:rPr lang="de-DE" dirty="0"/>
+                  <a:t> </a:t>
+                </a:r>
+                <a:r>
+                  <a:rPr lang="de-DE" dirty="0" err="1"/>
+                  <a:t>by</a:t>
+                </a:r>
+                <a:r>
+                  <a:rPr lang="de-DE" dirty="0"/>
+                  <a:t>:</a:t>
+                </a:r>
+              </a:p>
+              <a:p>
+                <a:r>
+                  <a:rPr lang="de-DE" dirty="0" err="1"/>
+                  <a:t>overload</a:t>
+                </a:r>
+                <a:r>
+                  <a:rPr lang="de-DE" dirty="0"/>
+                  <a:t> (</a:t>
+                </a:r>
+                <a:r>
+                  <a:rPr lang="de-DE" dirty="0" err="1"/>
+                  <a:t>more</a:t>
+                </a:r>
+                <a:r>
+                  <a:rPr lang="de-DE" dirty="0"/>
+                  <a:t> </a:t>
+                </a:r>
+                <a:r>
+                  <a:rPr lang="de-DE" dirty="0" err="1"/>
+                  <a:t>devices</a:t>
+                </a:r>
+                <a:r>
+                  <a:rPr lang="de-DE" dirty="0"/>
+                  <a:t> </a:t>
+                </a:r>
+                <a:r>
+                  <a:rPr lang="de-DE" dirty="0" err="1"/>
+                  <a:t>than</a:t>
+                </a:r>
+                <a:r>
+                  <a:rPr lang="de-DE" dirty="0"/>
+                  <a:t> </a:t>
+                </a:r>
+                <a:r>
+                  <a:rPr lang="de-DE" dirty="0" err="1"/>
+                  <a:t>the</a:t>
+                </a:r>
+                <a:r>
+                  <a:rPr lang="de-DE" dirty="0"/>
+                  <a:t> </a:t>
+                </a:r>
+                <a:r>
+                  <a:rPr lang="de-DE" dirty="0" err="1"/>
+                  <a:t>circuit</a:t>
+                </a:r>
+                <a:r>
+                  <a:rPr lang="de-DE" dirty="0"/>
+                  <a:t> </a:t>
+                </a:r>
+                <a:r>
+                  <a:rPr lang="de-DE" dirty="0" err="1"/>
+                  <a:t>can</a:t>
+                </a:r>
+                <a:r>
+                  <a:rPr lang="de-DE" dirty="0"/>
+                  <a:t> handle)</a:t>
+                </a:r>
+              </a:p>
+              <a:p>
+                <a:r>
+                  <a:rPr lang="de-DE" dirty="0" err="1"/>
+                  <a:t>short</a:t>
+                </a:r>
+                <a:r>
+                  <a:rPr lang="de-DE" dirty="0"/>
+                  <a:t> </a:t>
+                </a:r>
+                <a:r>
+                  <a:rPr lang="de-DE" dirty="0" err="1"/>
+                  <a:t>circuit</a:t>
+                </a:r>
+                <a:r>
+                  <a:rPr lang="de-DE" dirty="0"/>
+                  <a:t> (</a:t>
+                </a:r>
+                <a:r>
+                  <a:rPr lang="de-DE" dirty="0" err="1"/>
+                  <a:t>very</a:t>
+                </a:r>
+                <a:r>
+                  <a:rPr lang="de-DE" dirty="0"/>
+                  <a:t> </a:t>
+                </a:r>
+                <a:r>
+                  <a:rPr lang="de-DE" dirty="0" err="1"/>
+                  <a:t>low</a:t>
+                </a:r>
+                <a:r>
+                  <a:rPr lang="de-DE" dirty="0"/>
+                  <a:t> </a:t>
+                </a:r>
+                <a:r>
+                  <a:rPr lang="de-DE" dirty="0" err="1"/>
+                  <a:t>resistance</a:t>
+                </a:r>
+                <a:r>
+                  <a:rPr lang="de-DE" dirty="0"/>
+                  <a:t> </a:t>
+                </a:r>
+                <a:r>
+                  <a:rPr lang="de-DE" dirty="0" err="1"/>
+                  <a:t>path</a:t>
+                </a:r>
+                <a:r>
+                  <a:rPr lang="de-DE" dirty="0"/>
+                  <a:t>)</a:t>
+                </a:r>
+              </a:p>
+              <a:p>
+                <a:pPr marL="0" indent="0">
+                  <a:buNone/>
+                </a:pPr>
+                <a:endParaRPr lang="de-DE" dirty="0"/>
+              </a:p>
+              <a:p>
+                <a:pPr marL="0" indent="0">
+                  <a:buNone/>
+                </a:pPr>
+                <a:r>
+                  <a:rPr lang="de-DE" dirty="0" err="1"/>
+                  <a:t>typically</a:t>
+                </a:r>
+                <a:r>
+                  <a:rPr lang="de-DE" dirty="0"/>
+                  <a:t> </a:t>
+                </a:r>
+                <a14:m>
+                  <m:oMath xmlns:m="http://schemas.openxmlformats.org/officeDocument/2006/math">
+                    <m:r>
+                      <a:rPr lang="de-DE" i="1">
+                        <a:latin typeface="Cambria Math" panose="02040503050406030204" pitchFamily="18" charset="0"/>
+                        <a:ea typeface="Cambria Math" panose="02040503050406030204" pitchFamily="18" charset="0"/>
+                      </a:rPr>
+                      <m:t>16 </m:t>
+                    </m:r>
+                    <m:r>
+                      <m:rPr>
+                        <m:sty m:val="p"/>
+                      </m:rPr>
+                      <a:rPr lang="de-DE">
+                        <a:latin typeface="Cambria Math" panose="02040503050406030204" pitchFamily="18" charset="0"/>
+                        <a:ea typeface="Cambria Math" panose="02040503050406030204" pitchFamily="18" charset="0"/>
+                      </a:rPr>
+                      <m:t>A</m:t>
+                    </m:r>
+                  </m:oMath>
+                </a14:m>
+                <a:r>
+                  <a:rPr lang="de-DE" dirty="0"/>
+                  <a:t> </a:t>
+                </a:r>
+                <a:r>
+                  <a:rPr lang="de-DE" dirty="0" err="1"/>
+                  <a:t>for</a:t>
+                </a:r>
+                <a:r>
+                  <a:rPr lang="de-DE" dirty="0"/>
+                  <a:t> power </a:t>
+                </a:r>
+                <a:r>
+                  <a:rPr lang="de-DE" dirty="0" err="1"/>
+                  <a:t>outlets</a:t>
+                </a:r>
+                <a:r>
+                  <a:rPr lang="de-DE" dirty="0"/>
+                  <a:t>:</a:t>
+                </a:r>
+              </a:p>
+              <a:p>
+                <a:r>
+                  <a:rPr lang="de-DE" sz="2200" dirty="0"/>
+                  <a:t>maximum </a:t>
+                </a:r>
+                <a:r>
+                  <a:rPr lang="de-DE" sz="2200" dirty="0" err="1"/>
+                  <a:t>continuous</a:t>
+                </a:r>
+                <a:r>
+                  <a:rPr lang="de-DE" sz="2200" dirty="0"/>
+                  <a:t> power (</a:t>
+                </a:r>
+                <a:r>
+                  <a:rPr lang="de-DE" sz="2200" dirty="0" err="1"/>
+                  <a:t>assuming</a:t>
+                </a:r>
+                <a:r>
+                  <a:rPr lang="de-DE" sz="2200" dirty="0"/>
+                  <a:t> </a:t>
+                </a:r>
+                <a14:m>
+                  <m:oMath xmlns:m="http://schemas.openxmlformats.org/officeDocument/2006/math">
+                    <m:r>
+                      <a:rPr lang="de-DE" sz="2200" i="1">
+                        <a:latin typeface="Cambria Math" panose="02040503050406030204" pitchFamily="18" charset="0"/>
+                        <a:ea typeface="Cambria Math" panose="02040503050406030204" pitchFamily="18" charset="0"/>
+                      </a:rPr>
+                      <m:t>230 </m:t>
+                    </m:r>
+                    <m:r>
+                      <m:rPr>
+                        <m:sty m:val="p"/>
+                      </m:rPr>
+                      <a:rPr lang="de-DE" sz="2200">
+                        <a:latin typeface="Cambria Math" panose="02040503050406030204" pitchFamily="18" charset="0"/>
+                        <a:ea typeface="Cambria Math" panose="02040503050406030204" pitchFamily="18" charset="0"/>
+                      </a:rPr>
+                      <m:t>V</m:t>
+                    </m:r>
+                  </m:oMath>
+                </a14:m>
+                <a:r>
+                  <a:rPr lang="de-DE" sz="2200" dirty="0"/>
+                  <a:t>): </a:t>
+                </a:r>
+                <a14:m>
+                  <m:oMath xmlns:m="http://schemas.openxmlformats.org/officeDocument/2006/math">
+                    <m:r>
+                      <a:rPr lang="de-DE" sz="2200" b="0" i="1" smtClean="0">
+                        <a:latin typeface="Cambria Math" panose="02040503050406030204" pitchFamily="18" charset="0"/>
+                      </a:rPr>
+                      <m:t>𝑃</m:t>
+                    </m:r>
+                    <m:r>
+                      <a:rPr lang="de-DE" sz="2200" b="0" i="1" smtClean="0">
+                        <a:latin typeface="Cambria Math" panose="02040503050406030204" pitchFamily="18" charset="0"/>
+                      </a:rPr>
+                      <m:t>=</m:t>
+                    </m:r>
+                    <m:r>
+                      <a:rPr lang="de-DE" sz="2200" b="0" i="1" smtClean="0">
+                        <a:latin typeface="Cambria Math" panose="02040503050406030204" pitchFamily="18" charset="0"/>
+                      </a:rPr>
+                      <m:t>𝑉</m:t>
+                    </m:r>
+                    <m:r>
+                      <a:rPr lang="de-DE" sz="2200" b="0" i="1" smtClean="0">
+                        <a:latin typeface="Cambria Math" panose="02040503050406030204" pitchFamily="18" charset="0"/>
+                        <a:ea typeface="Cambria Math" panose="02040503050406030204" pitchFamily="18" charset="0"/>
+                      </a:rPr>
+                      <m:t>∙</m:t>
+                    </m:r>
+                    <m:r>
+                      <a:rPr lang="de-DE" sz="2200" b="0" i="1" smtClean="0">
+                        <a:latin typeface="Cambria Math" panose="02040503050406030204" pitchFamily="18" charset="0"/>
+                        <a:ea typeface="Cambria Math" panose="02040503050406030204" pitchFamily="18" charset="0"/>
+                      </a:rPr>
+                      <m:t>𝐼</m:t>
+                    </m:r>
+                    <m:r>
+                      <a:rPr lang="de-DE" sz="2200" b="0" i="1" smtClean="0">
+                        <a:latin typeface="Cambria Math" panose="02040503050406030204" pitchFamily="18" charset="0"/>
+                        <a:ea typeface="Cambria Math" panose="02040503050406030204" pitchFamily="18" charset="0"/>
+                      </a:rPr>
+                      <m:t>=230 </m:t>
+                    </m:r>
+                    <m:r>
+                      <m:rPr>
+                        <m:sty m:val="p"/>
+                      </m:rPr>
+                      <a:rPr lang="de-DE" sz="2200" b="0" i="0" smtClean="0">
+                        <a:latin typeface="Cambria Math" panose="02040503050406030204" pitchFamily="18" charset="0"/>
+                        <a:ea typeface="Cambria Math" panose="02040503050406030204" pitchFamily="18" charset="0"/>
+                      </a:rPr>
+                      <m:t>V</m:t>
+                    </m:r>
+                    <m:r>
+                      <a:rPr lang="de-DE" sz="2200" b="0" i="1" smtClean="0">
+                        <a:latin typeface="Cambria Math" panose="02040503050406030204" pitchFamily="18" charset="0"/>
+                        <a:ea typeface="Cambria Math" panose="02040503050406030204" pitchFamily="18" charset="0"/>
+                      </a:rPr>
+                      <m:t>∙16 </m:t>
+                    </m:r>
+                    <m:r>
+                      <m:rPr>
+                        <m:sty m:val="p"/>
+                      </m:rPr>
+                      <a:rPr lang="de-DE" sz="2200" b="0" i="0" smtClean="0">
+                        <a:latin typeface="Cambria Math" panose="02040503050406030204" pitchFamily="18" charset="0"/>
+                        <a:ea typeface="Cambria Math" panose="02040503050406030204" pitchFamily="18" charset="0"/>
+                      </a:rPr>
+                      <m:t>A</m:t>
+                    </m:r>
+                    <m:r>
+                      <a:rPr lang="de-DE" sz="2200" b="0" i="1" smtClean="0">
+                        <a:latin typeface="Cambria Math" panose="02040503050406030204" pitchFamily="18" charset="0"/>
+                        <a:ea typeface="Cambria Math" panose="02040503050406030204" pitchFamily="18" charset="0"/>
+                      </a:rPr>
+                      <m:t>=3680</m:t>
+                    </m:r>
+                    <m:r>
+                      <a:rPr lang="de-DE" sz="2200" b="0" i="0" smtClean="0">
+                        <a:latin typeface="Cambria Math" panose="02040503050406030204" pitchFamily="18" charset="0"/>
+                        <a:ea typeface="Cambria Math" panose="02040503050406030204" pitchFamily="18" charset="0"/>
+                      </a:rPr>
+                      <m:t> </m:t>
+                    </m:r>
+                    <m:r>
+                      <m:rPr>
+                        <m:sty m:val="p"/>
+                      </m:rPr>
+                      <a:rPr lang="de-DE" sz="2200" b="0" i="0" smtClean="0">
+                        <a:latin typeface="Cambria Math" panose="02040503050406030204" pitchFamily="18" charset="0"/>
+                        <a:ea typeface="Cambria Math" panose="02040503050406030204" pitchFamily="18" charset="0"/>
+                      </a:rPr>
+                      <m:t>W</m:t>
+                    </m:r>
+                  </m:oMath>
+                </a14:m>
+                <a:endParaRPr lang="de-DE" sz="2200" dirty="0"/>
+              </a:p>
+              <a:p>
+                <a:r>
+                  <a:rPr lang="de-DE" sz="2200" dirty="0"/>
+                  <a:t>this </a:t>
+                </a:r>
+                <a:r>
+                  <a:rPr lang="de-DE" sz="2200" dirty="0" err="1"/>
+                  <a:t>is</a:t>
+                </a:r>
+                <a:r>
+                  <a:rPr lang="de-DE" sz="2200" dirty="0"/>
+                  <a:t> </a:t>
+                </a:r>
+                <a:r>
+                  <a:rPr lang="de-DE" sz="2200" dirty="0" err="1"/>
+                  <a:t>enough</a:t>
+                </a:r>
+                <a:r>
+                  <a:rPr lang="de-DE" sz="2200" dirty="0"/>
+                  <a:t> </a:t>
+                </a:r>
+                <a:r>
+                  <a:rPr lang="de-DE" sz="2200" dirty="0" err="1"/>
+                  <a:t>to</a:t>
+                </a:r>
+                <a:r>
+                  <a:rPr lang="de-DE" sz="2200" dirty="0"/>
+                  <a:t> power </a:t>
+                </a:r>
+                <a:r>
+                  <a:rPr lang="de-DE" sz="2200" dirty="0" err="1"/>
+                  <a:t>several</a:t>
+                </a:r>
+                <a:r>
+                  <a:rPr lang="de-DE" sz="2200" dirty="0"/>
+                  <a:t> </a:t>
+                </a:r>
+                <a:r>
+                  <a:rPr lang="de-DE" sz="2200" dirty="0" err="1"/>
+                  <a:t>devices</a:t>
+                </a:r>
+                <a:r>
+                  <a:rPr lang="de-DE" sz="2200" dirty="0"/>
+                  <a:t> at </a:t>
+                </a:r>
+                <a:r>
+                  <a:rPr lang="de-DE" sz="2200" dirty="0" err="1"/>
+                  <a:t>once</a:t>
+                </a:r>
+                <a:r>
+                  <a:rPr lang="de-DE" sz="2200" dirty="0"/>
+                  <a:t>, like: 1–2 </a:t>
+                </a:r>
+                <a:r>
+                  <a:rPr lang="de-DE" sz="2200" dirty="0" err="1"/>
+                  <a:t>kettles</a:t>
+                </a:r>
+                <a:r>
+                  <a:rPr lang="de-DE" sz="2200" dirty="0"/>
+                  <a:t>, 1 </a:t>
+                </a:r>
+                <a:r>
+                  <a:rPr lang="de-DE" sz="2200" dirty="0" err="1"/>
+                  <a:t>microwave</a:t>
+                </a:r>
+                <a:r>
+                  <a:rPr lang="de-DE" sz="2200" dirty="0"/>
+                  <a:t>, </a:t>
+                </a:r>
+                <a:r>
+                  <a:rPr lang="de-DE" sz="2200" dirty="0" err="1"/>
+                  <a:t>some</a:t>
+                </a:r>
+                <a:r>
+                  <a:rPr lang="de-DE" sz="2200" dirty="0"/>
+                  <a:t> </a:t>
+                </a:r>
+                <a:r>
+                  <a:rPr lang="de-DE" sz="2200" dirty="0" err="1"/>
+                  <a:t>small</a:t>
+                </a:r>
+                <a:r>
+                  <a:rPr lang="de-DE" sz="2200" dirty="0"/>
+                  <a:t> </a:t>
+                </a:r>
+                <a:r>
+                  <a:rPr lang="de-DE" sz="2200" dirty="0" err="1"/>
+                  <a:t>appliances</a:t>
+                </a:r>
+                <a:r>
+                  <a:rPr lang="de-DE" sz="2200" dirty="0"/>
+                  <a:t> </a:t>
+                </a:r>
+                <a:r>
+                  <a:rPr lang="de-DE" sz="2200" dirty="0" err="1"/>
+                  <a:t>together</a:t>
+                </a:r>
+                <a:endParaRPr lang="de-DE" sz="2200" dirty="0"/>
+              </a:p>
+              <a:p>
+                <a:r>
+                  <a:rPr lang="de-DE" sz="2200" dirty="0" err="1"/>
+                  <a:t>Beyond</a:t>
+                </a:r>
+                <a:r>
+                  <a:rPr lang="de-DE" sz="2200" dirty="0"/>
+                  <a:t> </a:t>
+                </a:r>
+                <a14:m>
+                  <m:oMath xmlns:m="http://schemas.openxmlformats.org/officeDocument/2006/math">
+                    <m:r>
+                      <a:rPr lang="de-DE" sz="2200" i="1">
+                        <a:latin typeface="Cambria Math" panose="02040503050406030204" pitchFamily="18" charset="0"/>
+                        <a:ea typeface="Cambria Math" panose="02040503050406030204" pitchFamily="18" charset="0"/>
+                      </a:rPr>
+                      <m:t>16 </m:t>
+                    </m:r>
+                    <m:r>
+                      <m:rPr>
+                        <m:sty m:val="p"/>
+                      </m:rPr>
+                      <a:rPr lang="de-DE" sz="2200">
+                        <a:latin typeface="Cambria Math" panose="02040503050406030204" pitchFamily="18" charset="0"/>
+                        <a:ea typeface="Cambria Math" panose="02040503050406030204" pitchFamily="18" charset="0"/>
+                      </a:rPr>
+                      <m:t>A</m:t>
+                    </m:r>
+                  </m:oMath>
+                </a14:m>
+                <a:r>
+                  <a:rPr lang="de-DE" sz="2200" dirty="0"/>
+                  <a:t>, </a:t>
+                </a:r>
+                <a:r>
+                  <a:rPr lang="de-DE" sz="2200" dirty="0" err="1"/>
+                  <a:t>the</a:t>
+                </a:r>
+                <a:r>
+                  <a:rPr lang="de-DE" sz="2200" dirty="0"/>
+                  <a:t> </a:t>
+                </a:r>
+                <a:r>
+                  <a:rPr lang="de-DE" sz="2200" dirty="0" err="1"/>
+                  <a:t>circuit</a:t>
+                </a:r>
+                <a:r>
+                  <a:rPr lang="de-DE" sz="2200" dirty="0"/>
+                  <a:t> </a:t>
+                </a:r>
+                <a:r>
+                  <a:rPr lang="de-DE" sz="2200" dirty="0" err="1"/>
+                  <a:t>breaker</a:t>
+                </a:r>
+                <a:r>
+                  <a:rPr lang="de-DE" sz="2200" dirty="0"/>
+                  <a:t> </a:t>
+                </a:r>
+                <a:r>
+                  <a:rPr lang="de-DE" sz="2200" dirty="0" err="1"/>
+                  <a:t>trips</a:t>
+                </a:r>
+                <a:r>
+                  <a:rPr lang="de-DE" sz="2200" dirty="0"/>
+                  <a:t> </a:t>
+                </a:r>
+                <a:r>
+                  <a:rPr lang="de-DE" sz="2200" dirty="0" err="1"/>
+                  <a:t>to</a:t>
+                </a:r>
+                <a:r>
+                  <a:rPr lang="de-DE" sz="2200" dirty="0"/>
+                  <a:t> </a:t>
+                </a:r>
+                <a:r>
+                  <a:rPr lang="de-DE" sz="2200" dirty="0" err="1"/>
+                  <a:t>prevent</a:t>
+                </a:r>
+                <a:r>
+                  <a:rPr lang="de-DE" sz="2200" dirty="0"/>
+                  <a:t> </a:t>
+                </a:r>
+                <a:r>
+                  <a:rPr lang="de-DE" sz="2200" dirty="0" err="1"/>
+                  <a:t>overheating</a:t>
+                </a:r>
+                <a:r>
+                  <a:rPr lang="de-DE" sz="2200" dirty="0"/>
+                  <a:t> and </a:t>
+                </a:r>
+                <a:r>
+                  <a:rPr lang="de-DE" sz="2200" dirty="0" err="1"/>
+                  <a:t>fire</a:t>
+                </a:r>
+                <a:r>
+                  <a:rPr lang="de-DE" sz="2200" dirty="0"/>
+                  <a:t> </a:t>
+                </a:r>
+                <a:r>
+                  <a:rPr lang="de-DE" sz="2200" dirty="0" err="1"/>
+                  <a:t>risk</a:t>
+                </a:r>
+                <a:r>
+                  <a:rPr lang="de-DE" sz="2200" dirty="0"/>
+                  <a:t>.</a:t>
+                </a:r>
+              </a:p>
+              <a:p>
+                <a:pPr marL="0" indent="0">
+                  <a:buNone/>
+                </a:pPr>
+                <a:endParaRPr lang="de-DE" dirty="0"/>
+              </a:p>
+            </p:txBody>
+          </p:sp>
+        </mc:Choice>
+        <mc:Fallback>
+          <p:sp>
+            <p:nvSpPr>
+              <p:cNvPr id="3" name="Inhaltsplatzhalter 2">
+                <a:extLst>
+                  <a:ext uri="{FF2B5EF4-FFF2-40B4-BE49-F238E27FC236}">
+                    <a16:creationId xmlns:a16="http://schemas.microsoft.com/office/drawing/2014/main" id="{1B77FFBF-FA08-B624-1218-B627F3FF0AEB}"/>
+                  </a:ext>
+                </a:extLst>
+              </p:cNvPr>
+              <p:cNvSpPr>
+                <a:spLocks noGrp="1" noRot="1" noChangeAspect="1" noMove="1" noResize="1" noEditPoints="1" noAdjustHandles="1" noChangeArrowheads="1" noChangeShapeType="1" noTextEdit="1"/>
+              </p:cNvSpPr>
+              <p:nvPr>
+                <p:ph idx="1"/>
+              </p:nvPr>
+            </p:nvSpPr>
+            <p:spPr>
+              <a:blipFill>
+                <a:blip r:embed="rId2"/>
+                <a:stretch>
+                  <a:fillRect l="-1206" t="-2326" r="-362"/>
+                </a:stretch>
+              </a:blipFill>
+            </p:spPr>
+            <p:txBody>
+              <a:bodyPr/>
+              <a:lstStyle/>
+              <a:p>
+                <a:r>
+                  <a:rPr lang="de-DE">
+                    <a:noFill/>
+                  </a:rPr>
+                  <a:t> </a:t>
+                </a:r>
+              </a:p>
+            </p:txBody>
+          </p:sp>
+        </mc:Fallback>
+      </mc:AlternateContent>
       <p:sp>
         <p:nvSpPr>
           <p:cNvPr id="4" name="Foliennummernplatzhalter 3">
@@ -5820,7 +8092,7 @@
           <p:cNvPr id="2" name="Titel 1">
             <a:extLst>
               <a:ext uri="{FF2B5EF4-FFF2-40B4-BE49-F238E27FC236}">
-                <a16:creationId xmlns:a16="http://schemas.microsoft.com/office/drawing/2014/main" id="{EBF57596-D64B-8C5C-1ABE-907D073031D0}"/>
+                <a16:creationId xmlns:a16="http://schemas.microsoft.com/office/drawing/2014/main" id="{6725CEF4-343C-FDCC-3BAB-D894E6A29593}"/>
               </a:ext>
             </a:extLst>
           </p:cNvPr>
@@ -5829,42 +8101,6 @@
           </p:cNvSpPr>
           <p:nvPr>
             <p:ph type="title"/>
-          </p:nvPr>
-        </p:nvSpPr>
-        <p:spPr/>
-        <p:txBody>
-          <a:bodyPr/>
-          <a:lstStyle/>
-          <a:p>
-            <a:r>
-              <a:rPr lang="de-DE" dirty="0"/>
-              <a:t>Residual </a:t>
-            </a:r>
-            <a:r>
-              <a:rPr lang="de-DE" dirty="0" err="1"/>
-              <a:t>Current</a:t>
-            </a:r>
-            <a:r>
-              <a:rPr lang="de-DE" dirty="0"/>
-              <a:t> Device (RCD)</a:t>
-            </a:r>
-          </a:p>
-        </p:txBody>
-      </p:sp>
-      <p:sp>
-        <p:nvSpPr>
-          <p:cNvPr id="3" name="Inhaltsplatzhalter 2">
-            <a:extLst>
-              <a:ext uri="{FF2B5EF4-FFF2-40B4-BE49-F238E27FC236}">
-                <a16:creationId xmlns:a16="http://schemas.microsoft.com/office/drawing/2014/main" id="{9E54D016-7F25-9A0B-13F2-75D2853D0617}"/>
-              </a:ext>
-            </a:extLst>
-          </p:cNvPr>
-          <p:cNvSpPr>
-            <a:spLocks noGrp="1"/>
-          </p:cNvSpPr>
-          <p:nvPr>
-            <p:ph idx="1"/>
           </p:nvPr>
         </p:nvSpPr>
         <p:spPr/>
@@ -5874,41 +8110,43 @@
           </a:bodyPr>
           <a:lstStyle/>
           <a:p>
+            <a:r>
+              <a:rPr lang="de-DE" dirty="0"/>
+              <a:t>Thermistor</a:t>
+            </a:r>
+          </a:p>
+        </p:txBody>
+      </p:sp>
+      <p:sp>
+        <p:nvSpPr>
+          <p:cNvPr id="3" name="Inhaltsplatzhalter 2">
+            <a:extLst>
+              <a:ext uri="{FF2B5EF4-FFF2-40B4-BE49-F238E27FC236}">
+                <a16:creationId xmlns:a16="http://schemas.microsoft.com/office/drawing/2014/main" id="{C5A23CFA-0975-4482-D291-F4C778FA11FB}"/>
+              </a:ext>
+            </a:extLst>
+          </p:cNvPr>
+          <p:cNvSpPr>
+            <a:spLocks noGrp="1"/>
+          </p:cNvSpPr>
+          <p:nvPr>
+            <p:ph idx="1"/>
+          </p:nvPr>
+        </p:nvSpPr>
+        <p:spPr>
+          <a:xfrm>
+            <a:off x="838200" y="1825625"/>
+            <a:ext cx="6136758" cy="4351338"/>
+          </a:xfrm>
+        </p:spPr>
+        <p:txBody>
+          <a:bodyPr/>
+          <a:lstStyle/>
+          <a:p>
             <a:pPr marL="0" indent="0">
               <a:buNone/>
             </a:pPr>
-            <a:r>
-              <a:rPr lang="de-DE" dirty="0" err="1"/>
-              <a:t>circuit</a:t>
-            </a:r>
-            <a:r>
-              <a:rPr lang="de-DE" dirty="0"/>
-              <a:t> </a:t>
-            </a:r>
-            <a:r>
-              <a:rPr lang="de-DE" dirty="0" err="1"/>
-              <a:t>for</a:t>
-            </a:r>
-            <a:r>
-              <a:rPr lang="de-DE" dirty="0"/>
-              <a:t> fault </a:t>
-            </a:r>
-            <a:r>
-              <a:rPr lang="de-DE" dirty="0" err="1"/>
-              <a:t>current</a:t>
-            </a:r>
-            <a:r>
-              <a:rPr lang="de-DE" dirty="0"/>
-              <a:t> </a:t>
-            </a:r>
-            <a:r>
-              <a:rPr lang="de-DE" dirty="0" err="1"/>
-              <a:t>measurement</a:t>
-            </a:r>
-            <a:r>
-              <a:rPr lang="de-DE" dirty="0"/>
-              <a:t> (30 mA)</a:t>
-            </a:r>
+            <a:endParaRPr lang="de-DE" dirty="0"/>
           </a:p>
           <a:p>
             <a:pPr marL="0" indent="0">
@@ -5916,34 +8154,150 @@
             </a:pPr>
             <a:r>
               <a:rPr lang="de-DE" dirty="0" err="1"/>
-              <a:t>to</a:t>
-            </a:r>
-            <a:r>
-              <a:rPr lang="de-DE" dirty="0"/>
-              <a:t> </a:t>
-            </a:r>
-            <a:r>
-              <a:rPr lang="de-DE" dirty="0" err="1"/>
-              <a:t>ensure</a:t>
-            </a:r>
-            <a:r>
-              <a:rPr lang="de-DE" dirty="0"/>
-              <a:t> </a:t>
-            </a:r>
-            <a:r>
-              <a:rPr lang="de-DE" dirty="0" err="1"/>
-              <a:t>electrical</a:t>
-            </a:r>
-            <a:r>
-              <a:rPr lang="de-DE" dirty="0"/>
-              <a:t> </a:t>
-            </a:r>
-            <a:r>
-              <a:rPr lang="de-DE" dirty="0" err="1"/>
-              <a:t>safety</a:t>
+              <a:t>temperature-dependent</a:t>
+            </a:r>
+            <a:r>
+              <a:rPr lang="de-DE" dirty="0"/>
+              <a:t> </a:t>
+            </a:r>
+            <a:r>
+              <a:rPr lang="de-DE" dirty="0" err="1"/>
+              <a:t>resistance</a:t>
             </a:r>
             <a:endParaRPr lang="de-DE" dirty="0"/>
           </a:p>
+          <a:p>
+            <a:pPr marL="0" indent="0">
+              <a:buNone/>
+            </a:pPr>
+            <a:endParaRPr lang="de-DE" dirty="0"/>
+          </a:p>
+          <a:p>
+            <a:pPr marL="0" indent="0">
+              <a:buNone/>
+            </a:pPr>
+            <a:r>
+              <a:rPr lang="de-DE" dirty="0" err="1"/>
+              <a:t>applied</a:t>
+            </a:r>
+            <a:r>
+              <a:rPr lang="de-DE" dirty="0"/>
+              <a:t> in electronic </a:t>
+            </a:r>
+            <a:r>
+              <a:rPr lang="de-DE" dirty="0" err="1"/>
+              <a:t>thermometers</a:t>
+            </a:r>
+            <a:r>
+              <a:rPr lang="de-DE" dirty="0"/>
+              <a:t> and </a:t>
+            </a:r>
+            <a:r>
+              <a:rPr lang="de-DE" dirty="0" err="1"/>
+              <a:t>thermostats</a:t>
+            </a:r>
+            <a:r>
+              <a:rPr lang="de-DE" dirty="0"/>
+              <a:t> (</a:t>
+            </a:r>
+            <a:r>
+              <a:rPr lang="de-DE" dirty="0" err="1"/>
+              <a:t>control</a:t>
+            </a:r>
+            <a:r>
+              <a:rPr lang="de-DE" dirty="0"/>
+              <a:t> </a:t>
+            </a:r>
+            <a:r>
+              <a:rPr lang="de-DE" dirty="0" err="1"/>
+              <a:t>device</a:t>
+            </a:r>
+            <a:r>
+              <a:rPr lang="de-DE" dirty="0"/>
+              <a:t>):</a:t>
+            </a:r>
+          </a:p>
+          <a:p>
+            <a:pPr marL="0" indent="0">
+              <a:buNone/>
+            </a:pPr>
+            <a:r>
+              <a:rPr lang="de-DE" dirty="0"/>
+              <a:t>By </a:t>
+            </a:r>
+            <a:r>
+              <a:rPr lang="de-DE" dirty="0" err="1"/>
+              <a:t>measuring</a:t>
+            </a:r>
+            <a:r>
+              <a:rPr lang="de-DE" dirty="0"/>
+              <a:t> </a:t>
+            </a:r>
+            <a:r>
+              <a:rPr lang="de-DE" dirty="0" err="1"/>
+              <a:t>the</a:t>
+            </a:r>
+            <a:r>
+              <a:rPr lang="de-DE" dirty="0"/>
+              <a:t> </a:t>
+            </a:r>
+            <a:r>
+              <a:rPr lang="de-DE" dirty="0" err="1"/>
+              <a:t>resistance</a:t>
+            </a:r>
+            <a:r>
+              <a:rPr lang="de-DE" dirty="0"/>
+              <a:t>, </a:t>
+            </a:r>
+            <a:r>
+              <a:rPr lang="de-DE" dirty="0" err="1"/>
+              <a:t>the</a:t>
+            </a:r>
+            <a:r>
+              <a:rPr lang="de-DE" dirty="0"/>
+              <a:t> </a:t>
+            </a:r>
+            <a:r>
+              <a:rPr lang="de-DE" dirty="0" err="1"/>
+              <a:t>corresponding</a:t>
+            </a:r>
+            <a:r>
+              <a:rPr lang="de-DE" dirty="0"/>
+              <a:t> </a:t>
+            </a:r>
+            <a:r>
+              <a:rPr lang="de-DE" dirty="0" err="1"/>
+              <a:t>temperature</a:t>
+            </a:r>
+            <a:r>
+              <a:rPr lang="de-DE" dirty="0"/>
+              <a:t> </a:t>
+            </a:r>
+            <a:r>
+              <a:rPr lang="de-DE" dirty="0" err="1"/>
+              <a:t>can</a:t>
+            </a:r>
+            <a:r>
+              <a:rPr lang="de-DE" dirty="0"/>
+              <a:t> </a:t>
+            </a:r>
+            <a:r>
+              <a:rPr lang="de-DE" dirty="0" err="1"/>
+              <a:t>be</a:t>
+            </a:r>
+            <a:r>
+              <a:rPr lang="de-DE" dirty="0"/>
+              <a:t> </a:t>
+            </a:r>
+            <a:r>
+              <a:rPr lang="de-DE" dirty="0" err="1"/>
+              <a:t>inferred</a:t>
+            </a:r>
+            <a:r>
+              <a:rPr lang="de-DE" dirty="0"/>
+              <a:t>. </a:t>
+            </a:r>
+          </a:p>
         </p:txBody>
       </p:sp>
       <p:sp>
@@ -5951,7 +8305,7 @@
           <p:cNvPr id="4" name="Foliennummernplatzhalter 3">
             <a:extLst>
               <a:ext uri="{FF2B5EF4-FFF2-40B4-BE49-F238E27FC236}">
-                <a16:creationId xmlns:a16="http://schemas.microsoft.com/office/drawing/2014/main" id="{298D15F4-361B-6544-787C-D3A8275BE7E9}"/>
+                <a16:creationId xmlns:a16="http://schemas.microsoft.com/office/drawing/2014/main" id="{B14D5BC0-C249-C11E-8440-B175B800DF01}"/>
               </a:ext>
             </a:extLst>
           </p:cNvPr>
@@ -5975,10 +8329,104 @@
           </a:p>
         </p:txBody>
       </p:sp>
+      <p:pic>
+        <p:nvPicPr>
+          <p:cNvPr id="8194" name="Picture 2">
+            <a:extLst>
+              <a:ext uri="{FF2B5EF4-FFF2-40B4-BE49-F238E27FC236}">
+                <a16:creationId xmlns:a16="http://schemas.microsoft.com/office/drawing/2014/main" id="{174F7F71-ACFE-62D1-8535-53F0988F442F}"/>
+              </a:ext>
+            </a:extLst>
+          </p:cNvPr>
+          <p:cNvPicPr>
+            <a:picLocks noChangeAspect="1" noChangeArrowheads="1"/>
+          </p:cNvPicPr>
+          <p:nvPr/>
+        </p:nvPicPr>
+        <p:blipFill>
+          <a:blip r:embed="rId2">
+            <a:extLst>
+              <a:ext uri="{28A0092B-C50C-407E-A947-70E740481C1C}">
+                <a14:useLocalDpi xmlns:a14="http://schemas.microsoft.com/office/drawing/2010/main" val="0"/>
+              </a:ext>
+            </a:extLst>
+          </a:blip>
+          <a:srcRect/>
+          <a:stretch>
+            <a:fillRect/>
+          </a:stretch>
+        </p:blipFill>
+        <p:spPr bwMode="auto">
+          <a:xfrm>
+            <a:off x="7893560" y="838616"/>
+            <a:ext cx="3059181" cy="2753263"/>
+          </a:xfrm>
+          <a:prstGeom prst="rect">
+            <a:avLst/>
+          </a:prstGeom>
+          <a:noFill/>
+          <a:extLst>
+            <a:ext uri="{909E8E84-426E-40DD-AFC4-6F175D3DCCD1}">
+              <a14:hiddenFill xmlns:a14="http://schemas.microsoft.com/office/drawing/2010/main">
+                <a:solidFill>
+                  <a:srgbClr val="FFFFFF"/>
+                </a:solidFill>
+              </a14:hiddenFill>
+            </a:ext>
+          </a:extLst>
+        </p:spPr>
+      </p:pic>
+      <p:pic>
+        <p:nvPicPr>
+          <p:cNvPr id="8196" name="Picture 4">
+            <a:extLst>
+              <a:ext uri="{FF2B5EF4-FFF2-40B4-BE49-F238E27FC236}">
+                <a16:creationId xmlns:a16="http://schemas.microsoft.com/office/drawing/2014/main" id="{6B5BDE12-4DEE-2748-854C-5553334EB813}"/>
+              </a:ext>
+            </a:extLst>
+          </p:cNvPr>
+          <p:cNvPicPr>
+            <a:picLocks noChangeAspect="1" noChangeArrowheads="1"/>
+          </p:cNvPicPr>
+          <p:nvPr/>
+        </p:nvPicPr>
+        <p:blipFill>
+          <a:blip r:embed="rId3">
+            <a:extLst>
+              <a:ext uri="{28A0092B-C50C-407E-A947-70E740481C1C}">
+                <a14:useLocalDpi xmlns:a14="http://schemas.microsoft.com/office/drawing/2010/main" val="0"/>
+              </a:ext>
+            </a:extLst>
+          </a:blip>
+          <a:srcRect/>
+          <a:stretch>
+            <a:fillRect/>
+          </a:stretch>
+        </p:blipFill>
+        <p:spPr bwMode="auto">
+          <a:xfrm>
+            <a:off x="8413579" y="4063273"/>
+            <a:ext cx="2145119" cy="2295277"/>
+          </a:xfrm>
+          <a:prstGeom prst="rect">
+            <a:avLst/>
+          </a:prstGeom>
+          <a:noFill/>
+          <a:extLst>
+            <a:ext uri="{909E8E84-426E-40DD-AFC4-6F175D3DCCD1}">
+              <a14:hiddenFill xmlns:a14="http://schemas.microsoft.com/office/drawing/2010/main">
+                <a:solidFill>
+                  <a:srgbClr val="FFFFFF"/>
+                </a:solidFill>
+              </a14:hiddenFill>
+            </a:ext>
+          </a:extLst>
+        </p:spPr>
+      </p:pic>
     </p:spTree>
     <p:extLst>
       <p:ext uri="{BB962C8B-B14F-4D97-AF65-F5344CB8AC3E}">
-        <p14:creationId xmlns:p14="http://schemas.microsoft.com/office/powerpoint/2010/main" val="2525979817"/>
+        <p14:creationId xmlns:p14="http://schemas.microsoft.com/office/powerpoint/2010/main" val="3201950814"/>
       </p:ext>
     </p:extLst>
   </p:cSld>
@@ -6010,7 +8458,7 @@
           <p:cNvPr id="2" name="Titel 1">
             <a:extLst>
               <a:ext uri="{FF2B5EF4-FFF2-40B4-BE49-F238E27FC236}">
-                <a16:creationId xmlns:a16="http://schemas.microsoft.com/office/drawing/2014/main" id="{919C170B-9873-B68B-138D-F1299B4F438A}"/>
+                <a16:creationId xmlns:a16="http://schemas.microsoft.com/office/drawing/2014/main" id="{363CE8B1-F546-8497-9D7E-EE5BA39E3D95}"/>
               </a:ext>
             </a:extLst>
           </p:cNvPr>
@@ -6027,12 +8475,16 @@
           <a:lstStyle/>
           <a:p>
             <a:r>
-              <a:rPr lang="de-DE" dirty="0" err="1"/>
-              <a:t>Capacitive</a:t>
-            </a:r>
-            <a:r>
-              <a:rPr lang="de-DE" dirty="0"/>
-              <a:t> Touchscreen</a:t>
+              <a:rPr lang="de-DE" dirty="0"/>
+              <a:t>LED and </a:t>
+            </a:r>
+            <a:r>
+              <a:rPr lang="de-DE" dirty="0" err="1"/>
+              <a:t>Resistor</a:t>
+            </a:r>
+            <a:r>
+              <a:rPr lang="de-DE" dirty="0"/>
+              <a:t> Circuit</a:t>
             </a:r>
           </a:p>
         </p:txBody>
@@ -6042,7 +8494,7 @@
           <p:cNvPr id="3" name="Inhaltsplatzhalter 2">
             <a:extLst>
               <a:ext uri="{FF2B5EF4-FFF2-40B4-BE49-F238E27FC236}">
-                <a16:creationId xmlns:a16="http://schemas.microsoft.com/office/drawing/2014/main" id="{DBFE36DE-F6D4-07BE-3AFC-86EEFF873819}"/>
+                <a16:creationId xmlns:a16="http://schemas.microsoft.com/office/drawing/2014/main" id="{3DB2B985-EA88-C5D5-1E02-05C55BC84B11}"/>
               </a:ext>
             </a:extLst>
           </p:cNvPr>
@@ -6053,12 +8505,130 @@
             <p:ph idx="1"/>
           </p:nvPr>
         </p:nvSpPr>
-        <p:spPr/>
+        <p:spPr>
+          <a:xfrm>
+            <a:off x="838200" y="1825625"/>
+            <a:ext cx="5987902" cy="4351338"/>
+          </a:xfrm>
+        </p:spPr>
         <p:txBody>
           <a:bodyPr/>
           <a:lstStyle/>
           <a:p>
-            <a:endParaRPr lang="de-DE"/>
+            <a:pPr marL="0" indent="0">
+              <a:buNone/>
+            </a:pPr>
+            <a:endParaRPr lang="de-DE" dirty="0"/>
+          </a:p>
+          <a:p>
+            <a:pPr marL="0" indent="0">
+              <a:buNone/>
+            </a:pPr>
+            <a:r>
+              <a:rPr lang="de-DE" dirty="0"/>
+              <a:t>DC </a:t>
+            </a:r>
+            <a:r>
+              <a:rPr lang="de-DE" dirty="0" err="1"/>
+              <a:t>circuit</a:t>
+            </a:r>
+            <a:r>
+              <a:rPr lang="de-DE" dirty="0"/>
+              <a:t> (LED </a:t>
+            </a:r>
+            <a:r>
+              <a:rPr lang="de-DE" dirty="0" err="1"/>
+              <a:t>is</a:t>
+            </a:r>
+            <a:r>
+              <a:rPr lang="de-DE" dirty="0"/>
+              <a:t> </a:t>
+            </a:r>
+            <a:r>
+              <a:rPr lang="de-DE" dirty="0" err="1"/>
+              <a:t>diode</a:t>
+            </a:r>
+            <a:r>
+              <a:rPr lang="de-DE" dirty="0"/>
+              <a:t>)</a:t>
+            </a:r>
+          </a:p>
+          <a:p>
+            <a:pPr marL="0" indent="0">
+              <a:buNone/>
+            </a:pPr>
+            <a:endParaRPr lang="de-DE" dirty="0"/>
+          </a:p>
+          <a:p>
+            <a:pPr marL="0" indent="0">
+              <a:buNone/>
+            </a:pPr>
+            <a:r>
+              <a:rPr lang="de-DE" dirty="0" err="1"/>
+              <a:t>resistor</a:t>
+            </a:r>
+            <a:r>
+              <a:rPr lang="de-DE" dirty="0"/>
+              <a:t> </a:t>
+            </a:r>
+            <a:r>
+              <a:rPr lang="de-DE" dirty="0" err="1"/>
+              <a:t>limits</a:t>
+            </a:r>
+            <a:r>
+              <a:rPr lang="de-DE" dirty="0"/>
+              <a:t> </a:t>
+            </a:r>
+            <a:r>
+              <a:rPr lang="de-DE" dirty="0" err="1"/>
+              <a:t>current</a:t>
+            </a:r>
+            <a:r>
+              <a:rPr lang="de-DE" dirty="0"/>
+              <a:t> </a:t>
+            </a:r>
+            <a:r>
+              <a:rPr lang="de-DE" dirty="0" err="1"/>
+              <a:t>through</a:t>
+            </a:r>
+            <a:r>
+              <a:rPr lang="de-DE" dirty="0"/>
+              <a:t> LED</a:t>
+            </a:r>
+          </a:p>
+          <a:p>
+            <a:pPr marL="0" indent="0">
+              <a:buNone/>
+            </a:pPr>
+            <a:endParaRPr lang="de-DE" dirty="0"/>
+          </a:p>
+          <a:p>
+            <a:pPr marL="0" indent="0">
+              <a:buNone/>
+            </a:pPr>
+            <a:r>
+              <a:rPr lang="de-DE" dirty="0">
+                <a:sym typeface="Wingdings" pitchFamily="2" charset="2"/>
+              </a:rPr>
+              <a:t></a:t>
+            </a:r>
+            <a:r>
+              <a:rPr lang="de-DE" dirty="0"/>
+              <a:t> </a:t>
+            </a:r>
+            <a:r>
+              <a:rPr lang="de-DE" dirty="0" err="1"/>
+              <a:t>preventing</a:t>
+            </a:r>
+            <a:r>
+              <a:rPr lang="de-DE" dirty="0"/>
+              <a:t> </a:t>
+            </a:r>
+            <a:r>
+              <a:rPr lang="de-DE" dirty="0" err="1"/>
+              <a:t>damage</a:t>
+            </a:r>
+            <a:endParaRPr lang="de-DE" dirty="0"/>
           </a:p>
         </p:txBody>
       </p:sp>
@@ -6067,7 +8637,7 @@
           <p:cNvPr id="4" name="Foliennummernplatzhalter 3">
             <a:extLst>
               <a:ext uri="{FF2B5EF4-FFF2-40B4-BE49-F238E27FC236}">
-                <a16:creationId xmlns:a16="http://schemas.microsoft.com/office/drawing/2014/main" id="{AB130081-4835-1F09-CE6F-BC968A689A72}"/>
+                <a16:creationId xmlns:a16="http://schemas.microsoft.com/office/drawing/2014/main" id="{3C0C5690-4861-CD3E-2D59-BEDB4367EB0A}"/>
               </a:ext>
             </a:extLst>
           </p:cNvPr>
@@ -6091,10 +8661,57 @@
           </a:p>
         </p:txBody>
       </p:sp>
+      <p:pic>
+        <p:nvPicPr>
+          <p:cNvPr id="9218" name="Picture 2" descr="Resistors for LED Circuits | Resistor Applications | Resistor Guide">
+            <a:extLst>
+              <a:ext uri="{FF2B5EF4-FFF2-40B4-BE49-F238E27FC236}">
+                <a16:creationId xmlns:a16="http://schemas.microsoft.com/office/drawing/2014/main" id="{505BCEFC-0C62-49E9-4E19-555E0377209C}"/>
+              </a:ext>
+            </a:extLst>
+          </p:cNvPr>
+          <p:cNvPicPr>
+            <a:picLocks noChangeAspect="1" noChangeArrowheads="1"/>
+          </p:cNvPicPr>
+          <p:nvPr/>
+        </p:nvPicPr>
+        <p:blipFill>
+          <a:blip r:embed="rId2">
+            <a:extLst>
+              <a:ext uri="{28A0092B-C50C-407E-A947-70E740481C1C}">
+                <a14:useLocalDpi xmlns:a14="http://schemas.microsoft.com/office/drawing/2010/main" val="0"/>
+              </a:ext>
+            </a:extLst>
+          </a:blip>
+          <a:srcRect/>
+          <a:stretch>
+            <a:fillRect/>
+          </a:stretch>
+        </p:blipFill>
+        <p:spPr bwMode="auto">
+          <a:xfrm>
+            <a:off x="6826102" y="2246068"/>
+            <a:ext cx="3891221" cy="2365863"/>
+          </a:xfrm>
+          <a:prstGeom prst="rect">
+            <a:avLst/>
+          </a:prstGeom>
+          <a:noFill/>
+          <a:extLst>
+            <a:ext uri="{909E8E84-426E-40DD-AFC4-6F175D3DCCD1}">
+              <a14:hiddenFill xmlns:a14="http://schemas.microsoft.com/office/drawing/2010/main">
+                <a:solidFill>
+                  <a:srgbClr val="FFFFFF"/>
+                </a:solidFill>
+              </a14:hiddenFill>
+            </a:ext>
+          </a:extLst>
+        </p:spPr>
+      </p:pic>
     </p:spTree>
     <p:extLst>
       <p:ext uri="{BB962C8B-B14F-4D97-AF65-F5344CB8AC3E}">
-        <p14:creationId xmlns:p14="http://schemas.microsoft.com/office/powerpoint/2010/main" val="1081872773"/>
+        <p14:creationId xmlns:p14="http://schemas.microsoft.com/office/powerpoint/2010/main" val="3455278314"/>
       </p:ext>
     </p:extLst>
   </p:cSld>
@@ -6126,7 +8743,7 @@
           <p:cNvPr id="2" name="Titel 1">
             <a:extLst>
               <a:ext uri="{FF2B5EF4-FFF2-40B4-BE49-F238E27FC236}">
-                <a16:creationId xmlns:a16="http://schemas.microsoft.com/office/drawing/2014/main" id="{9A8D044F-0264-A3D4-6226-B93EDC27186E}"/>
+                <a16:creationId xmlns:a16="http://schemas.microsoft.com/office/drawing/2014/main" id="{919C170B-9873-B68B-138D-F1299B4F438A}"/>
               </a:ext>
             </a:extLst>
           </p:cNvPr>
@@ -6144,11 +8761,11 @@
           <a:p>
             <a:r>
               <a:rPr lang="de-DE" dirty="0" err="1"/>
-              <a:t>Inductive</a:t>
-            </a:r>
-            <a:r>
-              <a:rPr lang="de-DE" dirty="0"/>
-              <a:t> Sensor</a:t>
+              <a:t>Capacitive</a:t>
+            </a:r>
+            <a:r>
+              <a:rPr lang="de-DE" dirty="0"/>
+              <a:t> Touchscreen</a:t>
             </a:r>
           </a:p>
         </p:txBody>
@@ -6158,7 +8775,7 @@
           <p:cNvPr id="3" name="Inhaltsplatzhalter 2">
             <a:extLst>
               <a:ext uri="{FF2B5EF4-FFF2-40B4-BE49-F238E27FC236}">
-                <a16:creationId xmlns:a16="http://schemas.microsoft.com/office/drawing/2014/main" id="{C51813F3-0DCD-1D31-A6BF-E8AB84F2E000}"/>
+                <a16:creationId xmlns:a16="http://schemas.microsoft.com/office/drawing/2014/main" id="{DBFE36DE-F6D4-07BE-3AFC-86EEFF873819}"/>
               </a:ext>
             </a:extLst>
           </p:cNvPr>
@@ -6169,12 +8786,192 @@
             <p:ph idx="1"/>
           </p:nvPr>
         </p:nvSpPr>
-        <p:spPr/>
+        <p:spPr>
+          <a:xfrm>
+            <a:off x="838200" y="1825625"/>
+            <a:ext cx="6519530" cy="4351338"/>
+          </a:xfrm>
+        </p:spPr>
         <p:txBody>
           <a:bodyPr/>
           <a:lstStyle/>
           <a:p>
-            <a:endParaRPr lang="de-DE"/>
+            <a:pPr marL="0" indent="0">
+              <a:buNone/>
+            </a:pPr>
+            <a:endParaRPr lang="de-DE" dirty="0"/>
+          </a:p>
+          <a:p>
+            <a:pPr marL="0" indent="0">
+              <a:buNone/>
+            </a:pPr>
+            <a:r>
+              <a:rPr lang="de-DE" dirty="0" err="1"/>
+              <a:t>usage</a:t>
+            </a:r>
+            <a:r>
+              <a:rPr lang="de-DE" dirty="0"/>
+              <a:t> </a:t>
+            </a:r>
+            <a:r>
+              <a:rPr lang="de-DE" dirty="0" err="1"/>
+              <a:t>of</a:t>
+            </a:r>
+            <a:r>
+              <a:rPr lang="de-DE" dirty="0"/>
+              <a:t> </a:t>
+            </a:r>
+            <a:r>
+              <a:rPr lang="de-DE" dirty="0" err="1"/>
+              <a:t>electric</a:t>
+            </a:r>
+            <a:r>
+              <a:rPr lang="de-DE" dirty="0"/>
+              <a:t> </a:t>
+            </a:r>
+            <a:r>
+              <a:rPr lang="de-DE" dirty="0" err="1"/>
+              <a:t>fields</a:t>
+            </a:r>
+            <a:r>
+              <a:rPr lang="de-DE" dirty="0"/>
+              <a:t> </a:t>
+            </a:r>
+            <a:r>
+              <a:rPr lang="de-DE" dirty="0" err="1"/>
+              <a:t>for</a:t>
+            </a:r>
+            <a:r>
+              <a:rPr lang="de-DE" dirty="0"/>
+              <a:t> </a:t>
+            </a:r>
+            <a:r>
+              <a:rPr lang="de-DE" dirty="0" err="1"/>
+              <a:t>sensing</a:t>
+            </a:r>
+            <a:endParaRPr lang="de-DE" dirty="0"/>
+          </a:p>
+          <a:p>
+            <a:pPr marL="0" indent="0">
+              <a:buNone/>
+            </a:pPr>
+            <a:endParaRPr lang="de-DE" dirty="0"/>
+          </a:p>
+          <a:p>
+            <a:r>
+              <a:rPr lang="de-DE" dirty="0" err="1"/>
+              <a:t>finger</a:t>
+            </a:r>
+            <a:r>
+              <a:rPr lang="de-DE" dirty="0"/>
+              <a:t> </a:t>
+            </a:r>
+            <a:r>
+              <a:rPr lang="de-DE" dirty="0" err="1"/>
+              <a:t>changes</a:t>
+            </a:r>
+            <a:r>
+              <a:rPr lang="de-DE" dirty="0"/>
+              <a:t> </a:t>
+            </a:r>
+            <a:r>
+              <a:rPr lang="de-DE" dirty="0" err="1"/>
+              <a:t>local</a:t>
+            </a:r>
+            <a:r>
+              <a:rPr lang="de-DE" dirty="0"/>
+              <a:t> </a:t>
+            </a:r>
+            <a:r>
+              <a:rPr lang="de-DE" dirty="0" err="1"/>
+              <a:t>capacitance</a:t>
+            </a:r>
+            <a:r>
+              <a:rPr lang="de-DE" dirty="0"/>
+              <a:t> </a:t>
+            </a:r>
+            <a:r>
+              <a:rPr lang="de-DE" dirty="0" err="1"/>
+              <a:t>between</a:t>
+            </a:r>
+            <a:r>
+              <a:rPr lang="de-DE" dirty="0"/>
+              <a:t> </a:t>
+            </a:r>
+            <a:r>
+              <a:rPr lang="de-DE" dirty="0" err="1"/>
+              <a:t>electrodes</a:t>
+            </a:r>
+            <a:endParaRPr lang="de-DE" dirty="0"/>
+          </a:p>
+          <a:p>
+            <a:pPr marL="0" indent="0">
+              <a:buNone/>
+            </a:pPr>
+            <a:endParaRPr lang="de-DE" dirty="0"/>
+          </a:p>
+          <a:p>
+            <a:r>
+              <a:rPr lang="de-DE" dirty="0" err="1"/>
+              <a:t>variation</a:t>
+            </a:r>
+            <a:r>
+              <a:rPr lang="de-DE" dirty="0"/>
+              <a:t> </a:t>
+            </a:r>
+            <a:r>
+              <a:rPr lang="de-DE" dirty="0" err="1"/>
+              <a:t>is</a:t>
+            </a:r>
+            <a:r>
+              <a:rPr lang="de-DE" dirty="0"/>
+              <a:t> </a:t>
+            </a:r>
+            <a:r>
+              <a:rPr lang="de-DE" dirty="0" err="1"/>
+              <a:t>detected</a:t>
+            </a:r>
+            <a:r>
+              <a:rPr lang="de-DE" dirty="0"/>
+              <a:t> and </a:t>
+            </a:r>
+            <a:r>
+              <a:rPr lang="de-DE" dirty="0" err="1"/>
+              <a:t>processed</a:t>
+            </a:r>
+            <a:r>
+              <a:rPr lang="de-DE" dirty="0"/>
+              <a:t> </a:t>
+            </a:r>
+            <a:r>
+              <a:rPr lang="de-DE" dirty="0" err="1"/>
+              <a:t>to</a:t>
+            </a:r>
+            <a:r>
+              <a:rPr lang="de-DE" dirty="0"/>
+              <a:t> </a:t>
+            </a:r>
+            <a:r>
+              <a:rPr lang="de-DE" dirty="0" err="1"/>
+              <a:t>determine</a:t>
+            </a:r>
+            <a:r>
+              <a:rPr lang="de-DE" dirty="0"/>
+              <a:t> </a:t>
+            </a:r>
+            <a:r>
+              <a:rPr lang="de-DE" dirty="0" err="1"/>
+              <a:t>touch</a:t>
+            </a:r>
+            <a:r>
+              <a:rPr lang="de-DE" dirty="0"/>
+              <a:t> </a:t>
+            </a:r>
+            <a:r>
+              <a:rPr lang="de-DE" dirty="0" err="1"/>
+              <a:t>position</a:t>
+            </a:r>
+            <a:endParaRPr lang="de-DE" dirty="0"/>
           </a:p>
         </p:txBody>
       </p:sp>
@@ -6183,7 +8980,7 @@
           <p:cNvPr id="4" name="Foliennummernplatzhalter 3">
             <a:extLst>
               <a:ext uri="{FF2B5EF4-FFF2-40B4-BE49-F238E27FC236}">
-                <a16:creationId xmlns:a16="http://schemas.microsoft.com/office/drawing/2014/main" id="{31B3BAAE-686C-56FB-B2CD-A92AAF80F2F9}"/>
+                <a16:creationId xmlns:a16="http://schemas.microsoft.com/office/drawing/2014/main" id="{AB130081-4835-1F09-CE6F-BC968A689A72}"/>
               </a:ext>
             </a:extLst>
           </p:cNvPr>
@@ -6207,10 +9004,57 @@
           </a:p>
         </p:txBody>
       </p:sp>
+      <p:pic>
+        <p:nvPicPr>
+          <p:cNvPr id="6146" name="Picture 2">
+            <a:extLst>
+              <a:ext uri="{FF2B5EF4-FFF2-40B4-BE49-F238E27FC236}">
+                <a16:creationId xmlns:a16="http://schemas.microsoft.com/office/drawing/2014/main" id="{761C19EA-5B99-7316-5665-F827718D1358}"/>
+              </a:ext>
+            </a:extLst>
+          </p:cNvPr>
+          <p:cNvPicPr>
+            <a:picLocks noChangeAspect="1" noChangeArrowheads="1"/>
+          </p:cNvPicPr>
+          <p:nvPr/>
+        </p:nvPicPr>
+        <p:blipFill>
+          <a:blip r:embed="rId2">
+            <a:extLst>
+              <a:ext uri="{28A0092B-C50C-407E-A947-70E740481C1C}">
+                <a14:useLocalDpi xmlns:a14="http://schemas.microsoft.com/office/drawing/2010/main" val="0"/>
+              </a:ext>
+            </a:extLst>
+          </a:blip>
+          <a:srcRect/>
+          <a:stretch>
+            <a:fillRect/>
+          </a:stretch>
+        </p:blipFill>
+        <p:spPr bwMode="auto">
+          <a:xfrm>
+            <a:off x="7581013" y="1429122"/>
+            <a:ext cx="3560136" cy="4927228"/>
+          </a:xfrm>
+          <a:prstGeom prst="rect">
+            <a:avLst/>
+          </a:prstGeom>
+          <a:noFill/>
+          <a:extLst>
+            <a:ext uri="{909E8E84-426E-40DD-AFC4-6F175D3DCCD1}">
+              <a14:hiddenFill xmlns:a14="http://schemas.microsoft.com/office/drawing/2010/main">
+                <a:solidFill>
+                  <a:srgbClr val="FFFFFF"/>
+                </a:solidFill>
+              </a14:hiddenFill>
+            </a:ext>
+          </a:extLst>
+        </p:spPr>
+      </p:pic>
     </p:spTree>
     <p:extLst>
       <p:ext uri="{BB962C8B-B14F-4D97-AF65-F5344CB8AC3E}">
-        <p14:creationId xmlns:p14="http://schemas.microsoft.com/office/powerpoint/2010/main" val="2178475457"/>
+        <p14:creationId xmlns:p14="http://schemas.microsoft.com/office/powerpoint/2010/main" val="1081872773"/>
       </p:ext>
     </p:extLst>
   </p:cSld>
@@ -6242,7 +9086,7 @@
           <p:cNvPr id="2" name="Titel 1">
             <a:extLst>
               <a:ext uri="{FF2B5EF4-FFF2-40B4-BE49-F238E27FC236}">
-                <a16:creationId xmlns:a16="http://schemas.microsoft.com/office/drawing/2014/main" id="{6725CEF4-343C-FDCC-3BAB-D894E6A29593}"/>
+                <a16:creationId xmlns:a16="http://schemas.microsoft.com/office/drawing/2014/main" id="{9A8D044F-0264-A3D4-6226-B93EDC27186E}"/>
               </a:ext>
             </a:extLst>
           </p:cNvPr>
@@ -6258,7 +9102,14 @@
           <a:bodyPr/>
           <a:lstStyle/>
           <a:p>
-            <a:endParaRPr lang="de-DE"/>
+            <a:r>
+              <a:rPr lang="de-DE" dirty="0" err="1"/>
+              <a:t>Inductive</a:t>
+            </a:r>
+            <a:r>
+              <a:rPr lang="de-DE" dirty="0"/>
+              <a:t> Sensor</a:t>
+            </a:r>
           </a:p>
         </p:txBody>
       </p:sp>
@@ -6267,7 +9118,7 @@
           <p:cNvPr id="3" name="Inhaltsplatzhalter 2">
             <a:extLst>
               <a:ext uri="{FF2B5EF4-FFF2-40B4-BE49-F238E27FC236}">
-                <a16:creationId xmlns:a16="http://schemas.microsoft.com/office/drawing/2014/main" id="{C5A23CFA-0975-4482-D291-F4C778FA11FB}"/>
+                <a16:creationId xmlns:a16="http://schemas.microsoft.com/office/drawing/2014/main" id="{C51813F3-0DCD-1D31-A6BF-E8AB84F2E000}"/>
               </a:ext>
             </a:extLst>
           </p:cNvPr>
@@ -6278,12 +9129,248 @@
             <p:ph idx="1"/>
           </p:nvPr>
         </p:nvSpPr>
-        <p:spPr/>
-        <p:txBody>
-          <a:bodyPr/>
+        <p:spPr>
+          <a:xfrm>
+            <a:off x="838199" y="1825625"/>
+            <a:ext cx="7412666" cy="4351338"/>
+          </a:xfrm>
+        </p:spPr>
+        <p:txBody>
+          <a:bodyPr>
+            <a:normAutofit/>
+          </a:bodyPr>
           <a:lstStyle/>
           <a:p>
-            <a:endParaRPr lang="de-DE"/>
+            <a:pPr marL="0" indent="0">
+              <a:buNone/>
+            </a:pPr>
+            <a:endParaRPr lang="de-DE" dirty="0"/>
+          </a:p>
+          <a:p>
+            <a:pPr marL="0" indent="0">
+              <a:buNone/>
+            </a:pPr>
+            <a:r>
+              <a:rPr lang="de-DE" dirty="0" err="1"/>
+              <a:t>enables</a:t>
+            </a:r>
+            <a:r>
+              <a:rPr lang="de-DE" dirty="0"/>
+              <a:t> </a:t>
+            </a:r>
+            <a:r>
+              <a:rPr lang="de-DE" dirty="0" err="1"/>
+              <a:t>detection</a:t>
+            </a:r>
+            <a:r>
+              <a:rPr lang="de-DE" dirty="0"/>
+              <a:t> </a:t>
+            </a:r>
+            <a:r>
+              <a:rPr lang="de-DE" dirty="0" err="1"/>
+              <a:t>of</a:t>
+            </a:r>
+            <a:r>
+              <a:rPr lang="de-DE" dirty="0"/>
+              <a:t> metallic </a:t>
+            </a:r>
+            <a:r>
+              <a:rPr lang="de-DE" dirty="0" err="1"/>
+              <a:t>objects</a:t>
+            </a:r>
+            <a:r>
+              <a:rPr lang="de-DE" dirty="0"/>
+              <a:t> </a:t>
+            </a:r>
+            <a:r>
+              <a:rPr lang="de-DE" dirty="0" err="1"/>
+              <a:t>without</a:t>
+            </a:r>
+            <a:r>
+              <a:rPr lang="de-DE" dirty="0"/>
+              <a:t> </a:t>
+            </a:r>
+            <a:r>
+              <a:rPr lang="de-DE" dirty="0" err="1"/>
+              <a:t>physical</a:t>
+            </a:r>
+            <a:r>
+              <a:rPr lang="de-DE" dirty="0"/>
+              <a:t> </a:t>
+            </a:r>
+            <a:r>
+              <a:rPr lang="de-DE" dirty="0" err="1"/>
+              <a:t>contact</a:t>
+            </a:r>
+            <a:endParaRPr lang="de-DE" dirty="0"/>
+          </a:p>
+          <a:p>
+            <a:pPr marL="0" indent="0">
+              <a:buNone/>
+            </a:pPr>
+            <a:endParaRPr lang="de-DE" dirty="0"/>
+          </a:p>
+          <a:p>
+            <a:pPr marL="0" indent="0">
+              <a:buNone/>
+            </a:pPr>
+            <a:r>
+              <a:rPr lang="de-DE" dirty="0" err="1"/>
+              <a:t>operation</a:t>
+            </a:r>
+            <a:r>
+              <a:rPr lang="de-DE" dirty="0"/>
+              <a:t> </a:t>
+            </a:r>
+            <a:r>
+              <a:rPr lang="de-DE" dirty="0" err="1"/>
+              <a:t>based</a:t>
+            </a:r>
+            <a:r>
+              <a:rPr lang="de-DE" dirty="0"/>
+              <a:t> on </a:t>
+            </a:r>
+            <a:r>
+              <a:rPr lang="de-DE" dirty="0" err="1"/>
+              <a:t>electromagnetic</a:t>
+            </a:r>
+            <a:r>
+              <a:rPr lang="de-DE" dirty="0"/>
+              <a:t> </a:t>
+            </a:r>
+            <a:r>
+              <a:rPr lang="de-DE" dirty="0" err="1"/>
+              <a:t>induction</a:t>
+            </a:r>
+            <a:r>
+              <a:rPr lang="de-DE" dirty="0"/>
+              <a:t>:</a:t>
+            </a:r>
+          </a:p>
+          <a:p>
+            <a:pPr marL="0" indent="0">
+              <a:buNone/>
+            </a:pPr>
+            <a:r>
+              <a:rPr lang="de-DE" dirty="0" err="1"/>
+              <a:t>When</a:t>
+            </a:r>
+            <a:r>
+              <a:rPr lang="de-DE" dirty="0"/>
+              <a:t> a </a:t>
+            </a:r>
+            <a:r>
+              <a:rPr lang="de-DE" dirty="0" err="1"/>
+              <a:t>metal</a:t>
+            </a:r>
+            <a:r>
+              <a:rPr lang="de-DE" dirty="0"/>
+              <a:t> </a:t>
+            </a:r>
+            <a:r>
+              <a:rPr lang="de-DE" dirty="0" err="1"/>
+              <a:t>object</a:t>
+            </a:r>
+            <a:r>
+              <a:rPr lang="de-DE" dirty="0"/>
+              <a:t> </a:t>
+            </a:r>
+            <a:r>
+              <a:rPr lang="de-DE" dirty="0" err="1"/>
+              <a:t>enters</a:t>
+            </a:r>
+            <a:r>
+              <a:rPr lang="de-DE" dirty="0"/>
+              <a:t> </a:t>
+            </a:r>
+            <a:r>
+              <a:rPr lang="de-DE" dirty="0" err="1"/>
+              <a:t>the</a:t>
+            </a:r>
+            <a:r>
+              <a:rPr lang="de-DE" dirty="0"/>
+              <a:t> </a:t>
+            </a:r>
+            <a:r>
+              <a:rPr lang="de-DE" dirty="0" err="1"/>
+              <a:t>magnetic</a:t>
+            </a:r>
+            <a:r>
+              <a:rPr lang="de-DE" dirty="0"/>
+              <a:t> </a:t>
+            </a:r>
+            <a:r>
+              <a:rPr lang="de-DE" dirty="0" err="1"/>
+              <a:t>field</a:t>
+            </a:r>
+            <a:r>
+              <a:rPr lang="de-DE" dirty="0"/>
+              <a:t> </a:t>
+            </a:r>
+            <a:r>
+              <a:rPr lang="de-DE" dirty="0" err="1"/>
+              <a:t>produced</a:t>
+            </a:r>
+            <a:r>
+              <a:rPr lang="de-DE" dirty="0"/>
+              <a:t> </a:t>
+            </a:r>
+            <a:r>
+              <a:rPr lang="de-DE" dirty="0" err="1"/>
+              <a:t>by</a:t>
+            </a:r>
+            <a:r>
+              <a:rPr lang="de-DE" dirty="0"/>
+              <a:t> a </a:t>
+            </a:r>
+            <a:r>
+              <a:rPr lang="de-DE" dirty="0" err="1"/>
+              <a:t>coil</a:t>
+            </a:r>
+            <a:r>
+              <a:rPr lang="de-DE" dirty="0"/>
+              <a:t>, </a:t>
+            </a:r>
+            <a:r>
+              <a:rPr lang="de-DE" dirty="0" err="1"/>
+              <a:t>eddy</a:t>
+            </a:r>
+            <a:r>
+              <a:rPr lang="de-DE" dirty="0"/>
+              <a:t> </a:t>
+            </a:r>
+            <a:r>
+              <a:rPr lang="de-DE" dirty="0" err="1"/>
+              <a:t>currents</a:t>
+            </a:r>
+            <a:r>
+              <a:rPr lang="de-DE" dirty="0"/>
+              <a:t> alter </a:t>
+            </a:r>
+            <a:r>
+              <a:rPr lang="de-DE" dirty="0" err="1"/>
+              <a:t>the</a:t>
+            </a:r>
+            <a:r>
+              <a:rPr lang="de-DE" dirty="0"/>
+              <a:t> </a:t>
+            </a:r>
+            <a:r>
+              <a:rPr lang="de-DE" dirty="0" err="1"/>
+              <a:t>coil’s</a:t>
+            </a:r>
+            <a:r>
+              <a:rPr lang="de-DE" dirty="0"/>
+              <a:t> </a:t>
+            </a:r>
+            <a:r>
+              <a:rPr lang="de-DE" dirty="0" err="1"/>
+              <a:t>impedance</a:t>
+            </a:r>
+            <a:r>
+              <a:rPr lang="de-DE" dirty="0"/>
+              <a:t>.</a:t>
+            </a:r>
           </a:p>
         </p:txBody>
       </p:sp>
@@ -6292,7 +9379,7 @@
           <p:cNvPr id="4" name="Foliennummernplatzhalter 3">
             <a:extLst>
               <a:ext uri="{FF2B5EF4-FFF2-40B4-BE49-F238E27FC236}">
-                <a16:creationId xmlns:a16="http://schemas.microsoft.com/office/drawing/2014/main" id="{B14D5BC0-C249-C11E-8440-B175B800DF01}"/>
+                <a16:creationId xmlns:a16="http://schemas.microsoft.com/office/drawing/2014/main" id="{31B3BAAE-686C-56FB-B2CD-A92AAF80F2F9}"/>
               </a:ext>
             </a:extLst>
           </p:cNvPr>
@@ -6316,10 +9403,57 @@
           </a:p>
         </p:txBody>
       </p:sp>
+      <p:pic>
+        <p:nvPicPr>
+          <p:cNvPr id="7170" name="Picture 2">
+            <a:extLst>
+              <a:ext uri="{FF2B5EF4-FFF2-40B4-BE49-F238E27FC236}">
+                <a16:creationId xmlns:a16="http://schemas.microsoft.com/office/drawing/2014/main" id="{627649DE-5C38-F7B7-9856-CFC0BAF72147}"/>
+              </a:ext>
+            </a:extLst>
+          </p:cNvPr>
+          <p:cNvPicPr>
+            <a:picLocks noChangeAspect="1" noChangeArrowheads="1"/>
+          </p:cNvPicPr>
+          <p:nvPr/>
+        </p:nvPicPr>
+        <p:blipFill>
+          <a:blip r:embed="rId2">
+            <a:extLst>
+              <a:ext uri="{28A0092B-C50C-407E-A947-70E740481C1C}">
+                <a14:useLocalDpi xmlns:a14="http://schemas.microsoft.com/office/drawing/2010/main" val="0"/>
+              </a:ext>
+            </a:extLst>
+          </a:blip>
+          <a:srcRect/>
+          <a:stretch>
+            <a:fillRect/>
+          </a:stretch>
+        </p:blipFill>
+        <p:spPr bwMode="auto">
+          <a:xfrm>
+            <a:off x="8394700" y="2368550"/>
+            <a:ext cx="3175000" cy="2120900"/>
+          </a:xfrm>
+          <a:prstGeom prst="rect">
+            <a:avLst/>
+          </a:prstGeom>
+          <a:noFill/>
+          <a:extLst>
+            <a:ext uri="{909E8E84-426E-40DD-AFC4-6F175D3DCCD1}">
+              <a14:hiddenFill xmlns:a14="http://schemas.microsoft.com/office/drawing/2010/main">
+                <a:solidFill>
+                  <a:srgbClr val="FFFFFF"/>
+                </a:solidFill>
+              </a14:hiddenFill>
+            </a:ext>
+          </a:extLst>
+        </p:spPr>
+      </p:pic>
     </p:spTree>
     <p:extLst>
       <p:ext uri="{BB962C8B-B14F-4D97-AF65-F5344CB8AC3E}">
-        <p14:creationId xmlns:p14="http://schemas.microsoft.com/office/powerpoint/2010/main" val="3201950814"/>
+        <p14:creationId xmlns:p14="http://schemas.microsoft.com/office/powerpoint/2010/main" val="2178475457"/>
       </p:ext>
     </p:extLst>
   </p:cSld>
@@ -6351,7 +9485,7 @@
           <p:cNvPr id="2" name="Titel 1">
             <a:extLst>
               <a:ext uri="{FF2B5EF4-FFF2-40B4-BE49-F238E27FC236}">
-                <a16:creationId xmlns:a16="http://schemas.microsoft.com/office/drawing/2014/main" id="{16B5AFDD-6905-A1A6-D8E9-30779D340D0B}"/>
+                <a16:creationId xmlns:a16="http://schemas.microsoft.com/office/drawing/2014/main" id="{EBF57596-D64B-8C5C-1ABE-907D073031D0}"/>
               </a:ext>
             </a:extLst>
           </p:cNvPr>
@@ -6369,183 +9503,698 @@
           <a:p>
             <a:r>
               <a:rPr lang="de-DE" dirty="0"/>
-              <a:t>Semiconductor Devices and Electronics</a:t>
-            </a:r>
-          </a:p>
-        </p:txBody>
-      </p:sp>
-      <p:sp>
-        <p:nvSpPr>
-          <p:cNvPr id="3" name="Inhaltsplatzhalter 2">
-            <a:extLst>
-              <a:ext uri="{FF2B5EF4-FFF2-40B4-BE49-F238E27FC236}">
-                <a16:creationId xmlns:a16="http://schemas.microsoft.com/office/drawing/2014/main" id="{5BE38531-D0DF-A922-4ACF-65C093FFDE90}"/>
-              </a:ext>
-            </a:extLst>
-          </p:cNvPr>
-          <p:cNvSpPr>
-            <a:spLocks noGrp="1"/>
-          </p:cNvSpPr>
-          <p:nvPr>
-            <p:ph idx="1"/>
-          </p:nvPr>
-        </p:nvSpPr>
-        <p:spPr/>
-        <p:txBody>
-          <a:bodyPr/>
-          <a:lstStyle/>
-          <a:p>
-            <a:r>
-              <a:rPr lang="de-DE" dirty="0" err="1"/>
-              <a:t>diodes</a:t>
-            </a:r>
-            <a:r>
-              <a:rPr lang="de-DE" dirty="0"/>
-              <a:t> and </a:t>
-            </a:r>
-            <a:r>
-              <a:rPr lang="de-DE" dirty="0" err="1"/>
-              <a:t>transistors</a:t>
-            </a:r>
-            <a:r>
-              <a:rPr lang="de-DE" dirty="0"/>
-              <a:t> — </a:t>
-            </a:r>
-            <a:r>
-              <a:rPr lang="de-DE" dirty="0" err="1"/>
-              <a:t>switching</a:t>
-            </a:r>
-            <a:r>
-              <a:rPr lang="de-DE" dirty="0"/>
-              <a:t> and </a:t>
-            </a:r>
-            <a:r>
-              <a:rPr lang="de-DE" dirty="0" err="1"/>
-              <a:t>amplification</a:t>
-            </a:r>
-            <a:endParaRPr lang="de-DE" dirty="0"/>
-          </a:p>
-          <a:p>
-            <a:r>
-              <a:rPr lang="de-DE" dirty="0"/>
-              <a:t>operational </a:t>
-            </a:r>
-            <a:r>
-              <a:rPr lang="de-DE" dirty="0" err="1"/>
-              <a:t>amplifiers</a:t>
-            </a:r>
-            <a:r>
-              <a:rPr lang="de-DE" dirty="0"/>
-              <a:t> — </a:t>
-            </a:r>
-            <a:r>
-              <a:rPr lang="de-DE" dirty="0" err="1"/>
-              <a:t>building</a:t>
-            </a:r>
-            <a:r>
-              <a:rPr lang="de-DE" dirty="0"/>
-              <a:t> </a:t>
-            </a:r>
-            <a:r>
-              <a:rPr lang="de-DE" dirty="0" err="1"/>
-              <a:t>blocks</a:t>
-            </a:r>
-            <a:r>
-              <a:rPr lang="de-DE" dirty="0"/>
-              <a:t> </a:t>
-            </a:r>
-            <a:r>
-              <a:rPr lang="de-DE" dirty="0" err="1"/>
-              <a:t>for</a:t>
-            </a:r>
-            <a:r>
-              <a:rPr lang="de-DE" dirty="0"/>
-              <a:t> analog </a:t>
-            </a:r>
-            <a:r>
-              <a:rPr lang="de-DE" dirty="0" err="1"/>
-              <a:t>circuits</a:t>
-            </a:r>
-            <a:endParaRPr lang="de-DE" dirty="0"/>
-          </a:p>
-          <a:p>
-            <a:r>
-              <a:rPr lang="de-DE" dirty="0"/>
-              <a:t>analog </a:t>
-            </a:r>
-            <a:r>
-              <a:rPr lang="de-DE" dirty="0" err="1"/>
-              <a:t>circuit</a:t>
-            </a:r>
-            <a:r>
-              <a:rPr lang="de-DE" dirty="0"/>
-              <a:t> design — </a:t>
-            </a:r>
-            <a:r>
-              <a:rPr lang="de-DE" dirty="0" err="1"/>
-              <a:t>filters</a:t>
-            </a:r>
-            <a:r>
-              <a:rPr lang="de-DE" dirty="0"/>
-              <a:t>, </a:t>
-            </a:r>
-            <a:r>
-              <a:rPr lang="de-DE" dirty="0" err="1"/>
-              <a:t>amplifiers</a:t>
-            </a:r>
-            <a:r>
-              <a:rPr lang="de-DE" dirty="0"/>
-              <a:t>, </a:t>
-            </a:r>
-            <a:r>
-              <a:rPr lang="de-DE" dirty="0" err="1"/>
-              <a:t>signal</a:t>
-            </a:r>
-            <a:r>
-              <a:rPr lang="de-DE" dirty="0"/>
-              <a:t> </a:t>
-            </a:r>
-            <a:r>
-              <a:rPr lang="de-DE" dirty="0" err="1"/>
-              <a:t>conditioning</a:t>
-            </a:r>
-            <a:endParaRPr lang="de-DE" dirty="0"/>
-          </a:p>
-          <a:p>
-            <a:r>
-              <a:rPr lang="de-DE" dirty="0"/>
-              <a:t>digital </a:t>
-            </a:r>
-            <a:r>
-              <a:rPr lang="de-DE" dirty="0" err="1"/>
-              <a:t>electronics</a:t>
-            </a:r>
-            <a:r>
-              <a:rPr lang="de-DE" dirty="0"/>
-              <a:t> — </a:t>
-            </a:r>
-            <a:r>
-              <a:rPr lang="de-DE" dirty="0" err="1"/>
-              <a:t>logic</a:t>
-            </a:r>
-            <a:r>
-              <a:rPr lang="de-DE" dirty="0"/>
-              <a:t> </a:t>
-            </a:r>
-            <a:r>
-              <a:rPr lang="de-DE" dirty="0" err="1"/>
-              <a:t>gates</a:t>
-            </a:r>
-            <a:endParaRPr lang="de-DE" dirty="0"/>
-          </a:p>
-        </p:txBody>
-      </p:sp>
+              <a:t>Residual </a:t>
+            </a:r>
+            <a:r>
+              <a:rPr lang="de-DE" dirty="0" err="1"/>
+              <a:t>Current</a:t>
+            </a:r>
+            <a:r>
+              <a:rPr lang="de-DE" dirty="0"/>
+              <a:t> Device (RCD)</a:t>
+            </a:r>
+          </a:p>
+        </p:txBody>
+      </p:sp>
+      <mc:AlternateContent xmlns:mc="http://schemas.openxmlformats.org/markup-compatibility/2006">
+        <mc:Choice xmlns:a14="http://schemas.microsoft.com/office/drawing/2010/main" Requires="a14">
+          <p:sp>
+            <p:nvSpPr>
+              <p:cNvPr id="3" name="Inhaltsplatzhalter 2">
+                <a:extLst>
+                  <a:ext uri="{FF2B5EF4-FFF2-40B4-BE49-F238E27FC236}">
+                    <a16:creationId xmlns:a16="http://schemas.microsoft.com/office/drawing/2014/main" id="{9E54D016-7F25-9A0B-13F2-75D2853D0617}"/>
+                  </a:ext>
+                </a:extLst>
+              </p:cNvPr>
+              <p:cNvSpPr>
+                <a:spLocks noGrp="1"/>
+              </p:cNvSpPr>
+              <p:nvPr>
+                <p:ph idx="1"/>
+              </p:nvPr>
+            </p:nvSpPr>
+            <p:spPr>
+              <a:xfrm>
+                <a:off x="467833" y="1887279"/>
+                <a:ext cx="8394269" cy="4605596"/>
+              </a:xfrm>
+            </p:spPr>
+            <p:txBody>
+              <a:bodyPr>
+                <a:normAutofit fontScale="92500" lnSpcReduction="20000"/>
+              </a:bodyPr>
+              <a:lstStyle/>
+              <a:p>
+                <a:pPr marL="0" indent="0">
+                  <a:buNone/>
+                </a:pPr>
+                <a:r>
+                  <a:rPr lang="de-DE" dirty="0"/>
+                  <a:t>circuit </a:t>
+                </a:r>
+                <a:r>
+                  <a:rPr lang="de-DE" dirty="0" err="1"/>
+                  <a:t>for</a:t>
+                </a:r>
+                <a:r>
+                  <a:rPr lang="de-DE" dirty="0"/>
+                  <a:t> fault </a:t>
+                </a:r>
+                <a:r>
+                  <a:rPr lang="de-DE" dirty="0" err="1"/>
+                  <a:t>current</a:t>
+                </a:r>
+                <a:r>
+                  <a:rPr lang="de-DE" dirty="0"/>
+                  <a:t> </a:t>
+                </a:r>
+                <a:r>
+                  <a:rPr lang="de-DE" dirty="0" err="1"/>
+                  <a:t>measurement</a:t>
+                </a:r>
+                <a:r>
+                  <a:rPr lang="de-DE" dirty="0"/>
+                  <a:t> (</a:t>
+                </a:r>
+                <a14:m>
+                  <m:oMath xmlns:m="http://schemas.openxmlformats.org/officeDocument/2006/math">
+                    <m:r>
+                      <a:rPr lang="de-DE" b="0" i="1" dirty="0" smtClean="0">
+                        <a:latin typeface="Cambria Math" panose="02040503050406030204" pitchFamily="18" charset="0"/>
+                        <a:ea typeface="Cambria Math" panose="02040503050406030204" pitchFamily="18" charset="0"/>
+                      </a:rPr>
+                      <m:t>30</m:t>
+                    </m:r>
+                    <m:r>
+                      <a:rPr lang="de-DE" b="0" i="1">
+                        <a:latin typeface="Cambria Math" panose="02040503050406030204" pitchFamily="18" charset="0"/>
+                        <a:ea typeface="Cambria Math" panose="02040503050406030204" pitchFamily="18" charset="0"/>
+                      </a:rPr>
+                      <m:t> </m:t>
+                    </m:r>
+                    <m:r>
+                      <m:rPr>
+                        <m:sty m:val="p"/>
+                      </m:rPr>
+                      <a:rPr lang="de-DE" b="0" i="0" smtClean="0">
+                        <a:latin typeface="Cambria Math" panose="02040503050406030204" pitchFamily="18" charset="0"/>
+                        <a:ea typeface="Cambria Math" panose="02040503050406030204" pitchFamily="18" charset="0"/>
+                      </a:rPr>
+                      <m:t>m</m:t>
+                    </m:r>
+                    <m:r>
+                      <m:rPr>
+                        <m:sty m:val="p"/>
+                      </m:rPr>
+                      <a:rPr lang="de-DE" b="0" i="0">
+                        <a:latin typeface="Cambria Math" panose="02040503050406030204" pitchFamily="18" charset="0"/>
+                        <a:ea typeface="Cambria Math" panose="02040503050406030204" pitchFamily="18" charset="0"/>
+                      </a:rPr>
+                      <m:t>A</m:t>
+                    </m:r>
+                  </m:oMath>
+                </a14:m>
+                <a:r>
+                  <a:rPr lang="de-DE" dirty="0"/>
+                  <a:t>):</a:t>
+                </a:r>
+              </a:p>
+              <a:p>
+                <a:r>
+                  <a:rPr lang="de-DE" dirty="0"/>
+                  <a:t>Both </a:t>
+                </a:r>
+                <a:r>
+                  <a:rPr lang="de-DE" dirty="0" err="1"/>
+                  <a:t>conductors</a:t>
+                </a:r>
+                <a:r>
+                  <a:rPr lang="de-DE" dirty="0"/>
+                  <a:t> pass </a:t>
+                </a:r>
+                <a:r>
+                  <a:rPr lang="de-DE" dirty="0" err="1"/>
+                  <a:t>through</a:t>
+                </a:r>
+                <a:r>
+                  <a:rPr lang="de-DE" dirty="0"/>
+                  <a:t> a </a:t>
+                </a:r>
+                <a:r>
+                  <a:rPr lang="de-DE" dirty="0" err="1"/>
+                  <a:t>toroidal</a:t>
+                </a:r>
+                <a:r>
+                  <a:rPr lang="de-DE" dirty="0"/>
+                  <a:t> </a:t>
+                </a:r>
+                <a:r>
+                  <a:rPr lang="de-DE" dirty="0" err="1"/>
+                  <a:t>magnetic</a:t>
+                </a:r>
+                <a:r>
+                  <a:rPr lang="de-DE" dirty="0"/>
+                  <a:t> </a:t>
+                </a:r>
+                <a:r>
+                  <a:rPr lang="de-DE" dirty="0" err="1"/>
+                  <a:t>core</a:t>
+                </a:r>
+                <a:r>
+                  <a:rPr lang="de-DE" dirty="0"/>
+                  <a:t>.</a:t>
+                </a:r>
+              </a:p>
+              <a:p>
+                <a:r>
+                  <a:rPr lang="de-DE" dirty="0"/>
+                  <a:t>The </a:t>
+                </a:r>
+                <a:r>
+                  <a:rPr lang="de-DE" dirty="0" err="1"/>
+                  <a:t>equally</a:t>
+                </a:r>
+                <a:r>
+                  <a:rPr lang="de-DE" dirty="0"/>
+                  <a:t> large but </a:t>
+                </a:r>
+                <a:r>
+                  <a:rPr lang="de-DE" dirty="0" err="1"/>
+                  <a:t>opposing</a:t>
+                </a:r>
+                <a:r>
+                  <a:rPr lang="de-DE" dirty="0"/>
+                  <a:t> </a:t>
+                </a:r>
+                <a:r>
+                  <a:rPr lang="de-DE" dirty="0" err="1"/>
+                  <a:t>currents</a:t>
+                </a:r>
+                <a:r>
+                  <a:rPr lang="de-DE" dirty="0"/>
+                  <a:t> </a:t>
+                </a:r>
+                <a:r>
+                  <a:rPr lang="de-DE" dirty="0" err="1"/>
+                  <a:t>normally</a:t>
+                </a:r>
+                <a:r>
+                  <a:rPr lang="de-DE" dirty="0"/>
+                  <a:t> </a:t>
+                </a:r>
+                <a:r>
+                  <a:rPr lang="de-DE" dirty="0" err="1"/>
+                  <a:t>produce</a:t>
+                </a:r>
+                <a:r>
+                  <a:rPr lang="de-DE" dirty="0"/>
+                  <a:t> </a:t>
+                </a:r>
+                <a:r>
+                  <a:rPr lang="de-DE" dirty="0" err="1"/>
+                  <a:t>magnetic</a:t>
+                </a:r>
+                <a:r>
+                  <a:rPr lang="de-DE" dirty="0"/>
+                  <a:t> </a:t>
+                </a:r>
+                <a:r>
+                  <a:rPr lang="de-DE" dirty="0" err="1"/>
+                  <a:t>fields</a:t>
+                </a:r>
+                <a:r>
+                  <a:rPr lang="de-DE" dirty="0"/>
+                  <a:t> </a:t>
+                </a:r>
+                <a:r>
+                  <a:rPr lang="de-DE" dirty="0" err="1"/>
+                  <a:t>that</a:t>
+                </a:r>
+                <a:r>
+                  <a:rPr lang="de-DE" dirty="0"/>
+                  <a:t> </a:t>
+                </a:r>
+                <a:r>
+                  <a:rPr lang="de-DE" dirty="0" err="1"/>
+                  <a:t>cancel</a:t>
+                </a:r>
+                <a:r>
+                  <a:rPr lang="de-DE" dirty="0"/>
+                  <a:t> </a:t>
+                </a:r>
+                <a:r>
+                  <a:rPr lang="de-DE" dirty="0" err="1"/>
+                  <a:t>each</a:t>
+                </a:r>
+                <a:r>
+                  <a:rPr lang="de-DE" dirty="0"/>
+                  <a:t> </a:t>
+                </a:r>
+                <a:r>
+                  <a:rPr lang="de-DE" dirty="0" err="1"/>
+                  <a:t>other</a:t>
+                </a:r>
+                <a:r>
+                  <a:rPr lang="de-DE" dirty="0"/>
+                  <a:t>, </a:t>
+                </a:r>
+                <a:r>
+                  <a:rPr lang="de-DE" dirty="0" err="1"/>
+                  <a:t>resulting</a:t>
+                </a:r>
+                <a:r>
+                  <a:rPr lang="de-DE" dirty="0"/>
+                  <a:t> in </a:t>
+                </a:r>
+                <a:r>
+                  <a:rPr lang="de-DE" dirty="0" err="1"/>
+                  <a:t>no</a:t>
+                </a:r>
+                <a:r>
+                  <a:rPr lang="de-DE" dirty="0"/>
+                  <a:t> </a:t>
+                </a:r>
+                <a:r>
+                  <a:rPr lang="de-DE" dirty="0" err="1"/>
+                  <a:t>net</a:t>
+                </a:r>
+                <a:r>
+                  <a:rPr lang="de-DE" dirty="0"/>
+                  <a:t> </a:t>
+                </a:r>
+                <a:r>
+                  <a:rPr lang="de-DE" dirty="0" err="1"/>
+                  <a:t>magnetic</a:t>
+                </a:r>
+                <a:r>
+                  <a:rPr lang="de-DE" dirty="0"/>
+                  <a:t> </a:t>
+                </a:r>
+                <a:r>
+                  <a:rPr lang="de-DE" dirty="0" err="1"/>
+                  <a:t>flux</a:t>
+                </a:r>
+                <a:r>
+                  <a:rPr lang="de-DE" dirty="0"/>
+                  <a:t>.</a:t>
+                </a:r>
+              </a:p>
+              <a:p>
+                <a:r>
+                  <a:rPr lang="de-DE" dirty="0" err="1"/>
+                  <a:t>If</a:t>
+                </a:r>
+                <a:r>
+                  <a:rPr lang="de-DE" dirty="0"/>
+                  <a:t> a fault </a:t>
+                </a:r>
+                <a:r>
+                  <a:rPr lang="de-DE" dirty="0" err="1"/>
+                  <a:t>occurs</a:t>
+                </a:r>
+                <a:r>
+                  <a:rPr lang="de-DE" dirty="0"/>
+                  <a:t> (such </a:t>
+                </a:r>
+                <a:r>
+                  <a:rPr lang="de-DE" dirty="0" err="1"/>
+                  <a:t>as</a:t>
+                </a:r>
+                <a:r>
+                  <a:rPr lang="de-DE" dirty="0"/>
+                  <a:t> a </a:t>
+                </a:r>
+                <a:r>
+                  <a:rPr lang="de-DE" dirty="0" err="1"/>
+                  <a:t>person</a:t>
+                </a:r>
+                <a:r>
+                  <a:rPr lang="de-DE" dirty="0"/>
+                  <a:t> </a:t>
+                </a:r>
+                <a:r>
+                  <a:rPr lang="de-DE" dirty="0" err="1"/>
+                  <a:t>touching</a:t>
+                </a:r>
+                <a:r>
+                  <a:rPr lang="de-DE" dirty="0"/>
+                  <a:t> a live </a:t>
+                </a:r>
+                <a:r>
+                  <a:rPr lang="de-DE" dirty="0" err="1"/>
+                  <a:t>part</a:t>
+                </a:r>
+                <a:r>
+                  <a:rPr lang="de-DE" dirty="0"/>
+                  <a:t>) </a:t>
+                </a:r>
+                <a:r>
+                  <a:rPr lang="de-DE" dirty="0" err="1"/>
+                  <a:t>some</a:t>
+                </a:r>
+                <a:r>
+                  <a:rPr lang="de-DE" dirty="0"/>
+                  <a:t> </a:t>
+                </a:r>
+                <a:r>
+                  <a:rPr lang="de-DE" dirty="0" err="1"/>
+                  <a:t>current</a:t>
+                </a:r>
+                <a:r>
+                  <a:rPr lang="de-DE" dirty="0"/>
+                  <a:t> </a:t>
+                </a:r>
+                <a:r>
+                  <a:rPr lang="de-DE" dirty="0" err="1"/>
+                  <a:t>flows</a:t>
+                </a:r>
+                <a:r>
+                  <a:rPr lang="de-DE" dirty="0"/>
+                  <a:t> </a:t>
+                </a:r>
+                <a:r>
+                  <a:rPr lang="de-DE" dirty="0" err="1"/>
+                  <a:t>to</a:t>
+                </a:r>
+                <a:r>
+                  <a:rPr lang="de-DE" dirty="0"/>
+                  <a:t> </a:t>
+                </a:r>
+                <a:r>
+                  <a:rPr lang="de-DE" dirty="0" err="1"/>
+                  <a:t>ground</a:t>
+                </a:r>
+                <a:r>
+                  <a:rPr lang="de-DE" dirty="0"/>
+                  <a:t> (</a:t>
+                </a:r>
+                <a:r>
+                  <a:rPr lang="de-DE" dirty="0" err="1"/>
+                  <a:t>leakage</a:t>
+                </a:r>
+                <a:r>
+                  <a:rPr lang="de-DE" dirty="0"/>
+                  <a:t> </a:t>
+                </a:r>
+                <a:r>
+                  <a:rPr lang="de-DE" dirty="0" err="1"/>
+                  <a:t>current</a:t>
+                </a:r>
+                <a:r>
+                  <a:rPr lang="de-DE" dirty="0"/>
+                  <a:t>), </a:t>
+                </a:r>
+                <a:r>
+                  <a:rPr lang="de-DE" dirty="0" err="1"/>
+                  <a:t>creating</a:t>
+                </a:r>
+                <a:r>
+                  <a:rPr lang="de-DE" dirty="0"/>
+                  <a:t> an </a:t>
+                </a:r>
+                <a:r>
+                  <a:rPr lang="de-DE" dirty="0" err="1"/>
+                  <a:t>imbalance</a:t>
+                </a:r>
+                <a:r>
+                  <a:rPr lang="de-DE" dirty="0"/>
+                  <a:t>.</a:t>
+                </a:r>
+              </a:p>
+              <a:p>
+                <a:r>
+                  <a:rPr lang="de-DE" dirty="0"/>
+                  <a:t>This </a:t>
+                </a:r>
+                <a:r>
+                  <a:rPr lang="de-DE" dirty="0" err="1"/>
+                  <a:t>imbalance</a:t>
+                </a:r>
+                <a:r>
+                  <a:rPr lang="de-DE" dirty="0"/>
+                  <a:t> </a:t>
+                </a:r>
+                <a:r>
+                  <a:rPr lang="de-DE" dirty="0" err="1"/>
+                  <a:t>produces</a:t>
+                </a:r>
+                <a:r>
+                  <a:rPr lang="de-DE" dirty="0"/>
+                  <a:t> a </a:t>
+                </a:r>
+                <a:r>
+                  <a:rPr lang="de-DE" dirty="0" err="1"/>
+                  <a:t>net</a:t>
+                </a:r>
+                <a:r>
+                  <a:rPr lang="de-DE" dirty="0"/>
+                  <a:t> </a:t>
+                </a:r>
+                <a:r>
+                  <a:rPr lang="de-DE" dirty="0" err="1"/>
+                  <a:t>magnetic</a:t>
+                </a:r>
+                <a:r>
+                  <a:rPr lang="de-DE" dirty="0"/>
+                  <a:t> </a:t>
+                </a:r>
+                <a:r>
+                  <a:rPr lang="de-DE" dirty="0" err="1"/>
+                  <a:t>flux</a:t>
+                </a:r>
+                <a:r>
+                  <a:rPr lang="de-DE" dirty="0"/>
+                  <a:t> in </a:t>
+                </a:r>
+                <a:r>
+                  <a:rPr lang="de-DE" dirty="0" err="1"/>
+                  <a:t>the</a:t>
+                </a:r>
+                <a:r>
+                  <a:rPr lang="de-DE" dirty="0"/>
+                  <a:t> </a:t>
+                </a:r>
+                <a:r>
+                  <a:rPr lang="de-DE" dirty="0" err="1"/>
+                  <a:t>core</a:t>
+                </a:r>
+                <a:r>
+                  <a:rPr lang="de-DE" dirty="0"/>
+                  <a:t>, </a:t>
+                </a:r>
+                <a:r>
+                  <a:rPr lang="de-DE" dirty="0" err="1"/>
+                  <a:t>which</a:t>
+                </a:r>
+                <a:r>
+                  <a:rPr lang="de-DE" dirty="0"/>
+                  <a:t> </a:t>
+                </a:r>
+                <a:r>
+                  <a:rPr lang="de-DE" dirty="0" err="1"/>
+                  <a:t>induces</a:t>
+                </a:r>
+                <a:r>
+                  <a:rPr lang="de-DE" dirty="0"/>
+                  <a:t> a </a:t>
+                </a:r>
+                <a:r>
+                  <a:rPr lang="de-DE" dirty="0" err="1"/>
+                  <a:t>voltage</a:t>
+                </a:r>
+                <a:r>
+                  <a:rPr lang="de-DE" dirty="0"/>
+                  <a:t> in a </a:t>
+                </a:r>
+                <a:r>
+                  <a:rPr lang="de-DE" dirty="0" err="1"/>
+                  <a:t>secondary</a:t>
+                </a:r>
+                <a:r>
+                  <a:rPr lang="de-DE" dirty="0"/>
+                  <a:t> </a:t>
+                </a:r>
+                <a:r>
+                  <a:rPr lang="de-DE" dirty="0" err="1"/>
+                  <a:t>winding</a:t>
+                </a:r>
+                <a:r>
+                  <a:rPr lang="de-DE" dirty="0"/>
+                  <a:t>.</a:t>
+                </a:r>
+              </a:p>
+              <a:p>
+                <a:r>
+                  <a:rPr lang="de-DE" dirty="0"/>
+                  <a:t>The </a:t>
+                </a:r>
+                <a:r>
+                  <a:rPr lang="de-DE" dirty="0" err="1"/>
+                  <a:t>induced</a:t>
+                </a:r>
+                <a:r>
+                  <a:rPr lang="de-DE" dirty="0"/>
+                  <a:t> </a:t>
+                </a:r>
+                <a:r>
+                  <a:rPr lang="de-DE" dirty="0" err="1"/>
+                  <a:t>signal</a:t>
+                </a:r>
+                <a:r>
+                  <a:rPr lang="de-DE" dirty="0"/>
+                  <a:t> </a:t>
+                </a:r>
+                <a:r>
+                  <a:rPr lang="de-DE" dirty="0" err="1"/>
+                  <a:t>activates</a:t>
+                </a:r>
+                <a:r>
+                  <a:rPr lang="de-DE" dirty="0"/>
+                  <a:t> a </a:t>
+                </a:r>
+                <a:r>
+                  <a:rPr lang="de-DE" dirty="0" err="1"/>
+                  <a:t>trip</a:t>
+                </a:r>
+                <a:r>
+                  <a:rPr lang="de-DE" dirty="0"/>
+                  <a:t> </a:t>
+                </a:r>
+                <a:r>
+                  <a:rPr lang="de-DE" dirty="0" err="1"/>
+                  <a:t>mechanism</a:t>
+                </a:r>
+                <a:r>
+                  <a:rPr lang="de-DE" dirty="0"/>
+                  <a:t> </a:t>
+                </a:r>
+                <a:r>
+                  <a:rPr lang="de-DE" dirty="0" err="1"/>
+                  <a:t>that</a:t>
+                </a:r>
+                <a:r>
+                  <a:rPr lang="de-DE" dirty="0"/>
+                  <a:t> </a:t>
+                </a:r>
+                <a:r>
+                  <a:rPr lang="de-DE" dirty="0" err="1"/>
+                  <a:t>disconnects</a:t>
+                </a:r>
+                <a:r>
+                  <a:rPr lang="de-DE" dirty="0"/>
+                  <a:t> </a:t>
+                </a:r>
+                <a:r>
+                  <a:rPr lang="de-DE" dirty="0" err="1"/>
+                  <a:t>the</a:t>
+                </a:r>
+                <a:r>
+                  <a:rPr lang="de-DE" dirty="0"/>
+                  <a:t> </a:t>
+                </a:r>
+                <a:r>
+                  <a:rPr lang="de-DE" dirty="0" err="1"/>
+                  <a:t>circuit</a:t>
+                </a:r>
+                <a:r>
+                  <a:rPr lang="de-DE" dirty="0"/>
+                  <a:t> </a:t>
+                </a:r>
+                <a:r>
+                  <a:rPr lang="de-DE" dirty="0" err="1"/>
+                  <a:t>within</a:t>
+                </a:r>
+                <a:r>
+                  <a:rPr lang="de-DE" dirty="0"/>
+                  <a:t> </a:t>
+                </a:r>
+                <a:r>
+                  <a:rPr lang="de-DE" dirty="0" err="1"/>
+                  <a:t>milliseconds</a:t>
+                </a:r>
+                <a:r>
+                  <a:rPr lang="de-DE" dirty="0"/>
+                  <a:t>, </a:t>
+                </a:r>
+                <a:r>
+                  <a:rPr lang="de-DE" dirty="0" err="1"/>
+                  <a:t>preventing</a:t>
+                </a:r>
+                <a:r>
+                  <a:rPr lang="de-DE" dirty="0"/>
+                  <a:t> </a:t>
+                </a:r>
+                <a:r>
+                  <a:rPr lang="de-DE" dirty="0" err="1"/>
+                  <a:t>electric</a:t>
+                </a:r>
+                <a:r>
+                  <a:rPr lang="de-DE" dirty="0"/>
+                  <a:t> </a:t>
+                </a:r>
+                <a:r>
+                  <a:rPr lang="de-DE" dirty="0" err="1"/>
+                  <a:t>shock</a:t>
+                </a:r>
+                <a:r>
+                  <a:rPr lang="de-DE" dirty="0"/>
+                  <a:t>.</a:t>
+                </a:r>
+              </a:p>
+            </p:txBody>
+          </p:sp>
+        </mc:Choice>
+        <mc:Fallback>
+          <p:sp>
+            <p:nvSpPr>
+              <p:cNvPr id="3" name="Inhaltsplatzhalter 2">
+                <a:extLst>
+                  <a:ext uri="{FF2B5EF4-FFF2-40B4-BE49-F238E27FC236}">
+                    <a16:creationId xmlns:a16="http://schemas.microsoft.com/office/drawing/2014/main" id="{9E54D016-7F25-9A0B-13F2-75D2853D0617}"/>
+                  </a:ext>
+                </a:extLst>
+              </p:cNvPr>
+              <p:cNvSpPr>
+                <a:spLocks noGrp="1" noRot="1" noChangeAspect="1" noMove="1" noResize="1" noEditPoints="1" noAdjustHandles="1" noChangeArrowheads="1" noChangeShapeType="1" noTextEdit="1"/>
+              </p:cNvSpPr>
+              <p:nvPr>
+                <p:ph idx="1"/>
+              </p:nvPr>
+            </p:nvSpPr>
+            <p:spPr>
+              <a:xfrm>
+                <a:off x="467833" y="1887279"/>
+                <a:ext cx="8394269" cy="4605596"/>
+              </a:xfrm>
+              <a:blipFill>
+                <a:blip r:embed="rId2"/>
+                <a:stretch>
+                  <a:fillRect l="-1208" t="-3297" r="-755"/>
+                </a:stretch>
+              </a:blipFill>
+            </p:spPr>
+            <p:txBody>
+              <a:bodyPr/>
+              <a:lstStyle/>
+              <a:p>
+                <a:r>
+                  <a:rPr lang="de-DE">
+                    <a:noFill/>
+                  </a:rPr>
+                  <a:t> </a:t>
+                </a:r>
+              </a:p>
+            </p:txBody>
+          </p:sp>
+        </mc:Fallback>
+      </mc:AlternateContent>
       <p:sp>
         <p:nvSpPr>
           <p:cNvPr id="4" name="Foliennummernplatzhalter 3">
             <a:extLst>
               <a:ext uri="{FF2B5EF4-FFF2-40B4-BE49-F238E27FC236}">
-                <a16:creationId xmlns:a16="http://schemas.microsoft.com/office/drawing/2014/main" id="{C9A813EC-88BD-575E-2667-FDC1D47FE316}"/>
+                <a16:creationId xmlns:a16="http://schemas.microsoft.com/office/drawing/2014/main" id="{298D15F4-361B-6544-787C-D3A8275BE7E9}"/>
               </a:ext>
             </a:extLst>
           </p:cNvPr>
@@ -6569,10 +10218,439 @@
           </a:p>
         </p:txBody>
       </p:sp>
+      <p:pic>
+        <p:nvPicPr>
+          <p:cNvPr id="10242" name="Picture 2">
+            <a:extLst>
+              <a:ext uri="{FF2B5EF4-FFF2-40B4-BE49-F238E27FC236}">
+                <a16:creationId xmlns:a16="http://schemas.microsoft.com/office/drawing/2014/main" id="{AFD239F5-D29E-3C26-FFD3-E6E1E7CAE3FB}"/>
+              </a:ext>
+            </a:extLst>
+          </p:cNvPr>
+          <p:cNvPicPr>
+            <a:picLocks noChangeAspect="1" noChangeArrowheads="1"/>
+          </p:cNvPicPr>
+          <p:nvPr/>
+        </p:nvPicPr>
+        <p:blipFill>
+          <a:blip r:embed="rId3">
+            <a:extLst>
+              <a:ext uri="{28A0092B-C50C-407E-A947-70E740481C1C}">
+                <a14:useLocalDpi xmlns:a14="http://schemas.microsoft.com/office/drawing/2010/main" val="0"/>
+              </a:ext>
+            </a:extLst>
+          </a:blip>
+          <a:srcRect/>
+          <a:stretch>
+            <a:fillRect/>
+          </a:stretch>
+        </p:blipFill>
+        <p:spPr bwMode="auto">
+          <a:xfrm>
+            <a:off x="8862102" y="2354521"/>
+            <a:ext cx="3175000" cy="2781300"/>
+          </a:xfrm>
+          <a:prstGeom prst="rect">
+            <a:avLst/>
+          </a:prstGeom>
+          <a:noFill/>
+          <a:extLst>
+            <a:ext uri="{909E8E84-426E-40DD-AFC4-6F175D3DCCD1}">
+              <a14:hiddenFill xmlns:a14="http://schemas.microsoft.com/office/drawing/2010/main">
+                <a:solidFill>
+                  <a:srgbClr val="FFFFFF"/>
+                </a:solidFill>
+              </a14:hiddenFill>
+            </a:ext>
+          </a:extLst>
+        </p:spPr>
+      </p:pic>
+      <p:pic>
+        <p:nvPicPr>
+          <p:cNvPr id="10244" name="Picture 4">
+            <a:extLst>
+              <a:ext uri="{FF2B5EF4-FFF2-40B4-BE49-F238E27FC236}">
+                <a16:creationId xmlns:a16="http://schemas.microsoft.com/office/drawing/2014/main" id="{81350CC0-9F4A-4CA9-9767-66773726AEB5}"/>
+              </a:ext>
+            </a:extLst>
+          </p:cNvPr>
+          <p:cNvPicPr>
+            <a:picLocks noChangeAspect="1" noChangeArrowheads="1"/>
+          </p:cNvPicPr>
+          <p:nvPr/>
+        </p:nvPicPr>
+        <p:blipFill>
+          <a:blip r:embed="rId4">
+            <a:extLst>
+              <a:ext uri="{28A0092B-C50C-407E-A947-70E740481C1C}">
+                <a14:useLocalDpi xmlns:a14="http://schemas.microsoft.com/office/drawing/2010/main" val="0"/>
+              </a:ext>
+            </a:extLst>
+          </a:blip>
+          <a:srcRect/>
+          <a:stretch>
+            <a:fillRect/>
+          </a:stretch>
+        </p:blipFill>
+        <p:spPr bwMode="auto">
+          <a:xfrm>
+            <a:off x="8862102" y="168534"/>
+            <a:ext cx="3175000" cy="2006600"/>
+          </a:xfrm>
+          <a:prstGeom prst="rect">
+            <a:avLst/>
+          </a:prstGeom>
+          <a:noFill/>
+          <a:extLst>
+            <a:ext uri="{909E8E84-426E-40DD-AFC4-6F175D3DCCD1}">
+              <a14:hiddenFill xmlns:a14="http://schemas.microsoft.com/office/drawing/2010/main">
+                <a:solidFill>
+                  <a:srgbClr val="FFFFFF"/>
+                </a:solidFill>
+              </a14:hiddenFill>
+            </a:ext>
+          </a:extLst>
+        </p:spPr>
+      </p:pic>
+      <p:sp>
+        <p:nvSpPr>
+          <p:cNvPr id="7" name="Textfeld 6">
+            <a:extLst>
+              <a:ext uri="{FF2B5EF4-FFF2-40B4-BE49-F238E27FC236}">
+                <a16:creationId xmlns:a16="http://schemas.microsoft.com/office/drawing/2014/main" id="{F23C0606-08F9-E0FA-C736-64DCA0A9106C}"/>
+              </a:ext>
+            </a:extLst>
+          </p:cNvPr>
+          <p:cNvSpPr txBox="1"/>
+          <p:nvPr/>
+        </p:nvSpPr>
+        <p:spPr>
+          <a:xfrm>
+            <a:off x="8799408" y="5156021"/>
+            <a:ext cx="3300388" cy="1200329"/>
+          </a:xfrm>
+          <a:prstGeom prst="rect">
+            <a:avLst/>
+          </a:prstGeom>
+          <a:noFill/>
+        </p:spPr>
+        <p:txBody>
+          <a:bodyPr wrap="square">
+            <a:spAutoFit/>
+          </a:bodyPr>
+          <a:lstStyle/>
+          <a:p>
+            <a:pPr marL="0" marR="0" lvl="0" indent="0" algn="ctr" defTabSz="914400" rtl="0" eaLnBrk="0" fontAlgn="base" latinLnBrk="0" hangingPunct="0">
+              <a:lnSpc>
+                <a:spcPct val="100000"/>
+              </a:lnSpc>
+              <a:spcBef>
+                <a:spcPct val="0"/>
+              </a:spcBef>
+              <a:spcAft>
+                <a:spcPct val="0"/>
+              </a:spcAft>
+              <a:buClrTx/>
+              <a:buSzTx/>
+              <a:buFontTx/>
+              <a:buNone/>
+              <a:tabLst/>
+            </a:pPr>
+            <a:r>
+              <a:rPr kumimoji="0" lang="de-DE" altLang="de-DE" sz="1200" b="0" i="0" u="none" strike="noStrike" cap="none" normalizeH="0" baseline="0" dirty="0">
+                <a:ln>
+                  <a:noFill/>
+                </a:ln>
+                <a:solidFill>
+                  <a:srgbClr val="000000"/>
+                </a:solidFill>
+                <a:effectLst/>
+                <a:latin typeface="Arial" panose="020B0604020202020204" pitchFamily="34" charset="0"/>
+              </a:rPr>
+              <a:t>1: Electromagnet</a:t>
+            </a:r>
+            <a:br>
+              <a:rPr kumimoji="0" lang="de-DE" altLang="de-DE" sz="1200" b="0" i="0" u="none" strike="noStrike" cap="none" normalizeH="0" baseline="0" dirty="0">
+                <a:ln>
+                  <a:noFill/>
+                </a:ln>
+                <a:solidFill>
+                  <a:schemeClr val="tx1"/>
+                </a:solidFill>
+                <a:effectLst/>
+              </a:rPr>
+            </a:br>
+            <a:r>
+              <a:rPr kumimoji="0" lang="de-DE" altLang="de-DE" sz="1200" b="0" i="0" u="none" strike="noStrike" cap="none" normalizeH="0" baseline="0" dirty="0">
+                <a:ln>
+                  <a:noFill/>
+                </a:ln>
+                <a:solidFill>
+                  <a:srgbClr val="000000"/>
+                </a:solidFill>
+                <a:effectLst/>
+                <a:latin typeface="Arial" panose="020B0604020202020204" pitchFamily="34" charset="0"/>
+                <a:cs typeface="Arial" panose="020B0604020202020204" pitchFamily="34" charset="0"/>
+              </a:rPr>
+              <a:t>2: </a:t>
+            </a:r>
+            <a:r>
+              <a:rPr kumimoji="0" lang="de-DE" altLang="de-DE" sz="1200" b="0" i="0" u="none" strike="noStrike" cap="none" normalizeH="0" baseline="0" dirty="0" err="1">
+                <a:ln>
+                  <a:noFill/>
+                </a:ln>
+                <a:solidFill>
+                  <a:srgbClr val="000000"/>
+                </a:solidFill>
+                <a:effectLst/>
+                <a:latin typeface="Arial" panose="020B0604020202020204" pitchFamily="34" charset="0"/>
+                <a:cs typeface="Arial" panose="020B0604020202020204" pitchFamily="34" charset="0"/>
+              </a:rPr>
+              <a:t>Current</a:t>
+            </a:r>
+            <a:r>
+              <a:rPr kumimoji="0" lang="de-DE" altLang="de-DE" sz="1200" b="0" i="0" u="none" strike="noStrike" cap="none" normalizeH="0" baseline="0" dirty="0">
+                <a:ln>
+                  <a:noFill/>
+                </a:ln>
+                <a:solidFill>
+                  <a:srgbClr val="000000"/>
+                </a:solidFill>
+                <a:effectLst/>
+                <a:latin typeface="Arial" panose="020B0604020202020204" pitchFamily="34" charset="0"/>
+                <a:cs typeface="Arial" panose="020B0604020202020204" pitchFamily="34" charset="0"/>
+              </a:rPr>
+              <a:t> </a:t>
+            </a:r>
+            <a:r>
+              <a:rPr kumimoji="0" lang="de-DE" altLang="de-DE" sz="1200" b="0" i="0" u="none" strike="noStrike" cap="none" normalizeH="0" baseline="0" dirty="0" err="1">
+                <a:ln>
+                  <a:noFill/>
+                </a:ln>
+                <a:solidFill>
+                  <a:srgbClr val="000000"/>
+                </a:solidFill>
+                <a:effectLst/>
+                <a:latin typeface="Arial" panose="020B0604020202020204" pitchFamily="34" charset="0"/>
+                <a:cs typeface="Arial" panose="020B0604020202020204" pitchFamily="34" charset="0"/>
+              </a:rPr>
+              <a:t>transformer</a:t>
+            </a:r>
+            <a:r>
+              <a:rPr kumimoji="0" lang="de-DE" altLang="de-DE" sz="1200" b="0" i="0" u="none" strike="noStrike" cap="none" normalizeH="0" baseline="0" dirty="0">
+                <a:ln>
+                  <a:noFill/>
+                </a:ln>
+                <a:solidFill>
+                  <a:srgbClr val="000000"/>
+                </a:solidFill>
+                <a:effectLst/>
+                <a:latin typeface="Arial" panose="020B0604020202020204" pitchFamily="34" charset="0"/>
+                <a:cs typeface="Arial" panose="020B0604020202020204" pitchFamily="34" charset="0"/>
+              </a:rPr>
+              <a:t> </a:t>
+            </a:r>
+            <a:r>
+              <a:rPr kumimoji="0" lang="de-DE" altLang="de-DE" sz="1200" b="0" i="0" u="none" strike="noStrike" cap="none" normalizeH="0" baseline="0" dirty="0" err="1">
+                <a:ln>
+                  <a:noFill/>
+                </a:ln>
+                <a:solidFill>
+                  <a:srgbClr val="000000"/>
+                </a:solidFill>
+                <a:effectLst/>
+                <a:latin typeface="Arial" panose="020B0604020202020204" pitchFamily="34" charset="0"/>
+                <a:cs typeface="Arial" panose="020B0604020202020204" pitchFamily="34" charset="0"/>
+              </a:rPr>
+              <a:t>secondary</a:t>
+            </a:r>
+            <a:r>
+              <a:rPr kumimoji="0" lang="de-DE" altLang="de-DE" sz="1200" b="0" i="0" u="none" strike="noStrike" cap="none" normalizeH="0" baseline="0" dirty="0">
+                <a:ln>
+                  <a:noFill/>
+                </a:ln>
+                <a:solidFill>
+                  <a:srgbClr val="000000"/>
+                </a:solidFill>
+                <a:effectLst/>
+                <a:latin typeface="Arial" panose="020B0604020202020204" pitchFamily="34" charset="0"/>
+                <a:cs typeface="Arial" panose="020B0604020202020204" pitchFamily="34" charset="0"/>
+              </a:rPr>
+              <a:t> </a:t>
+            </a:r>
+            <a:r>
+              <a:rPr kumimoji="0" lang="de-DE" altLang="de-DE" sz="1200" b="0" i="0" u="none" strike="noStrike" cap="none" normalizeH="0" baseline="0" dirty="0" err="1">
+                <a:ln>
+                  <a:noFill/>
+                </a:ln>
+                <a:solidFill>
+                  <a:srgbClr val="000000"/>
+                </a:solidFill>
+                <a:effectLst/>
+                <a:latin typeface="Arial" panose="020B0604020202020204" pitchFamily="34" charset="0"/>
+                <a:cs typeface="Arial" panose="020B0604020202020204" pitchFamily="34" charset="0"/>
+              </a:rPr>
+              <a:t>winding</a:t>
+            </a:r>
+            <a:br>
+              <a:rPr kumimoji="0" lang="de-DE" altLang="de-DE" sz="1200" b="0" i="0" u="none" strike="noStrike" cap="none" normalizeH="0" baseline="0" dirty="0">
+                <a:ln>
+                  <a:noFill/>
+                </a:ln>
+                <a:solidFill>
+                  <a:schemeClr val="tx1"/>
+                </a:solidFill>
+                <a:effectLst/>
+              </a:rPr>
+            </a:br>
+            <a:r>
+              <a:rPr kumimoji="0" lang="de-DE" altLang="de-DE" sz="1200" b="0" i="0" u="none" strike="noStrike" cap="none" normalizeH="0" baseline="0" dirty="0">
+                <a:ln>
+                  <a:noFill/>
+                </a:ln>
+                <a:solidFill>
+                  <a:srgbClr val="000000"/>
+                </a:solidFill>
+                <a:effectLst/>
+                <a:latin typeface="Arial" panose="020B0604020202020204" pitchFamily="34" charset="0"/>
+                <a:cs typeface="Arial" panose="020B0604020202020204" pitchFamily="34" charset="0"/>
+              </a:rPr>
+              <a:t>3: Transformer </a:t>
+            </a:r>
+            <a:r>
+              <a:rPr kumimoji="0" lang="de-DE" altLang="de-DE" sz="1200" b="0" i="0" u="none" strike="noStrike" cap="none" normalizeH="0" baseline="0" dirty="0" err="1">
+                <a:ln>
+                  <a:noFill/>
+                </a:ln>
+                <a:solidFill>
+                  <a:srgbClr val="000000"/>
+                </a:solidFill>
+                <a:effectLst/>
+                <a:latin typeface="Arial" panose="020B0604020202020204" pitchFamily="34" charset="0"/>
+                <a:cs typeface="Arial" panose="020B0604020202020204" pitchFamily="34" charset="0"/>
+              </a:rPr>
+              <a:t>core</a:t>
+            </a:r>
+            <a:br>
+              <a:rPr kumimoji="0" lang="de-DE" altLang="de-DE" sz="1200" b="0" i="0" u="none" strike="noStrike" cap="none" normalizeH="0" baseline="0" dirty="0">
+                <a:ln>
+                  <a:noFill/>
+                </a:ln>
+                <a:solidFill>
+                  <a:schemeClr val="tx1"/>
+                </a:solidFill>
+                <a:effectLst/>
+              </a:rPr>
+            </a:br>
+            <a:r>
+              <a:rPr kumimoji="0" lang="de-DE" altLang="de-DE" sz="1200" b="0" i="0" u="none" strike="noStrike" cap="none" normalizeH="0" baseline="0" dirty="0">
+                <a:ln>
+                  <a:noFill/>
+                </a:ln>
+                <a:solidFill>
+                  <a:srgbClr val="000000"/>
+                </a:solidFill>
+                <a:effectLst/>
+                <a:latin typeface="Arial" panose="020B0604020202020204" pitchFamily="34" charset="0"/>
+                <a:cs typeface="Arial" panose="020B0604020202020204" pitchFamily="34" charset="0"/>
+              </a:rPr>
+              <a:t>4: Test push-button</a:t>
+            </a:r>
+            <a:br>
+              <a:rPr kumimoji="0" lang="de-DE" altLang="de-DE" sz="1200" b="0" i="0" u="none" strike="noStrike" cap="none" normalizeH="0" baseline="0" dirty="0">
+                <a:ln>
+                  <a:noFill/>
+                </a:ln>
+                <a:solidFill>
+                  <a:schemeClr val="tx1"/>
+                </a:solidFill>
+                <a:effectLst/>
+              </a:rPr>
+            </a:br>
+            <a:r>
+              <a:rPr kumimoji="0" lang="de-DE" altLang="de-DE" sz="1200" b="0" i="0" u="none" strike="noStrike" cap="none" normalizeH="0" baseline="0" dirty="0">
+                <a:ln>
+                  <a:noFill/>
+                </a:ln>
+                <a:solidFill>
+                  <a:srgbClr val="000000"/>
+                </a:solidFill>
+                <a:effectLst/>
+                <a:latin typeface="Arial" panose="020B0604020202020204" pitchFamily="34" charset="0"/>
+                <a:cs typeface="Arial" panose="020B0604020202020204" pitchFamily="34" charset="0"/>
+              </a:rPr>
+              <a:t>L: Line </a:t>
+            </a:r>
+            <a:r>
+              <a:rPr kumimoji="0" lang="de-DE" altLang="de-DE" sz="1200" b="0" i="0" u="none" strike="noStrike" cap="none" normalizeH="0" baseline="0" dirty="0" err="1">
+                <a:ln>
+                  <a:noFill/>
+                </a:ln>
+                <a:solidFill>
+                  <a:srgbClr val="000000"/>
+                </a:solidFill>
+                <a:effectLst/>
+                <a:latin typeface="Arial" panose="020B0604020202020204" pitchFamily="34" charset="0"/>
+                <a:cs typeface="Arial" panose="020B0604020202020204" pitchFamily="34" charset="0"/>
+              </a:rPr>
+              <a:t>conductor</a:t>
+            </a:r>
+            <a:br>
+              <a:rPr kumimoji="0" lang="de-DE" altLang="de-DE" sz="1200" b="0" i="0" u="none" strike="noStrike" cap="none" normalizeH="0" baseline="0" dirty="0">
+                <a:ln>
+                  <a:noFill/>
+                </a:ln>
+                <a:solidFill>
+                  <a:schemeClr val="tx1"/>
+                </a:solidFill>
+                <a:effectLst/>
+              </a:rPr>
+            </a:br>
+            <a:r>
+              <a:rPr kumimoji="0" lang="de-DE" altLang="de-DE" sz="1200" b="0" i="0" u="none" strike="noStrike" cap="none" normalizeH="0" baseline="0" dirty="0">
+                <a:ln>
+                  <a:noFill/>
+                </a:ln>
+                <a:solidFill>
+                  <a:srgbClr val="000000"/>
+                </a:solidFill>
+                <a:effectLst/>
+                <a:latin typeface="Arial" panose="020B0604020202020204" pitchFamily="34" charset="0"/>
+                <a:cs typeface="Arial" panose="020B0604020202020204" pitchFamily="34" charset="0"/>
+              </a:rPr>
+              <a:t>N: Neutral </a:t>
+            </a:r>
+            <a:r>
+              <a:rPr kumimoji="0" lang="de-DE" altLang="de-DE" sz="1200" b="0" i="0" u="none" strike="noStrike" cap="none" normalizeH="0" baseline="0" dirty="0" err="1">
+                <a:ln>
+                  <a:noFill/>
+                </a:ln>
+                <a:solidFill>
+                  <a:srgbClr val="000000"/>
+                </a:solidFill>
+                <a:effectLst/>
+                <a:latin typeface="Arial" panose="020B0604020202020204" pitchFamily="34" charset="0"/>
+                <a:cs typeface="Arial" panose="020B0604020202020204" pitchFamily="34" charset="0"/>
+              </a:rPr>
+              <a:t>conductor</a:t>
+            </a:r>
+            <a:endParaRPr kumimoji="0" lang="de-DE" altLang="de-DE" sz="1200" b="0" i="0" u="none" strike="noStrike" cap="none" normalizeH="0" baseline="0" dirty="0">
+              <a:ln>
+                <a:noFill/>
+              </a:ln>
+              <a:solidFill>
+                <a:schemeClr val="tx1"/>
+              </a:solidFill>
+              <a:effectLst/>
+              <a:latin typeface="Arial" panose="020B0604020202020204" pitchFamily="34" charset="0"/>
+            </a:endParaRPr>
+          </a:p>
+        </p:txBody>
+      </p:sp>
     </p:spTree>
     <p:extLst>
       <p:ext uri="{BB962C8B-B14F-4D97-AF65-F5344CB8AC3E}">
-        <p14:creationId xmlns:p14="http://schemas.microsoft.com/office/powerpoint/2010/main" val="3057904092"/>
+        <p14:creationId xmlns:p14="http://schemas.microsoft.com/office/powerpoint/2010/main" val="2525979817"/>
       </p:ext>
     </p:extLst>
   </p:cSld>
